--- a/outputs/manual-20260526-ruti-onboarding/presentations/ruti-clinical-genomic-onboarding/output/ruti-clinical-genomic-onboarding-review.pptx
+++ b/outputs/manual-20260526-ruti-onboarding/presentations/ruti-clinical-genomic-onboarding/output/ruti-clinical-genomic-onboarding-review.pptx
@@ -2,27 +2,27 @@
 <file path=ppt/presentation.xml><?xml version="1.0" encoding="utf-8"?>
 <p:presentation xmlns:p="http://schemas.openxmlformats.org/presentationml/2006/main">
   <p:sldMasterIdLst>
-    <p:sldMasterId xmlns:r="http://schemas.openxmlformats.org/officeDocument/2006/relationships" id="2147483648" r:id="Rc42f4e1a981949a9"/>
+    <p:sldMasterId xmlns:r="http://schemas.openxmlformats.org/officeDocument/2006/relationships" id="2147483648" r:id="R17da4b959eef45f3"/>
   </p:sldMasterIdLst>
   <p:notesMasterIdLst>
-    <p:notesMasterId xmlns:r="http://schemas.openxmlformats.org/officeDocument/2006/relationships" r:id="R661acf5b85d3447c"/>
+    <p:notesMasterId xmlns:r="http://schemas.openxmlformats.org/officeDocument/2006/relationships" r:id="Raf4158cad96a48f0"/>
   </p:notesMasterIdLst>
   <p:sldIdLst>
-    <p:sldId xmlns:r="http://schemas.openxmlformats.org/officeDocument/2006/relationships" id="256" r:id="Raf85b065f2704bfc"/>
-    <p:sldId xmlns:r="http://schemas.openxmlformats.org/officeDocument/2006/relationships" id="257" r:id="Rbef8deb8beb14f57"/>
-    <p:sldId xmlns:r="http://schemas.openxmlformats.org/officeDocument/2006/relationships" id="258" r:id="Rae0bfd26e1c3441a"/>
-    <p:sldId xmlns:r="http://schemas.openxmlformats.org/officeDocument/2006/relationships" id="259" r:id="R8f60084cf7f14c0b"/>
-    <p:sldId xmlns:r="http://schemas.openxmlformats.org/officeDocument/2006/relationships" id="260" r:id="R89637af224a04019"/>
-    <p:sldId xmlns:r="http://schemas.openxmlformats.org/officeDocument/2006/relationships" id="261" r:id="Rd120d22777214a86"/>
-    <p:sldId xmlns:r="http://schemas.openxmlformats.org/officeDocument/2006/relationships" id="262" r:id="Ra74f98811d9e47d2"/>
-    <p:sldId xmlns:r="http://schemas.openxmlformats.org/officeDocument/2006/relationships" id="263" r:id="R634755aec1d3415f"/>
-    <p:sldId xmlns:r="http://schemas.openxmlformats.org/officeDocument/2006/relationships" id="264" r:id="Rc1d16b8c3d234783"/>
-    <p:sldId xmlns:r="http://schemas.openxmlformats.org/officeDocument/2006/relationships" id="265" r:id="Rab62128d9fc24fa9"/>
-    <p:sldId xmlns:r="http://schemas.openxmlformats.org/officeDocument/2006/relationships" id="266" r:id="R02a2045717a94e2d"/>
-    <p:sldId xmlns:r="http://schemas.openxmlformats.org/officeDocument/2006/relationships" id="267" r:id="Rc337ff7139b64da0"/>
-    <p:sldId xmlns:r="http://schemas.openxmlformats.org/officeDocument/2006/relationships" id="268" r:id="Raecad4c4a0254760"/>
-    <p:sldId xmlns:r="http://schemas.openxmlformats.org/officeDocument/2006/relationships" id="269" r:id="Rd5c0f0593e53464a"/>
-    <p:sldId xmlns:r="http://schemas.openxmlformats.org/officeDocument/2006/relationships" id="270" r:id="R53651a24b5894b3e"/>
+    <p:sldId xmlns:r="http://schemas.openxmlformats.org/officeDocument/2006/relationships" id="256" r:id="Rc4577e444e9e4689"/>
+    <p:sldId xmlns:r="http://schemas.openxmlformats.org/officeDocument/2006/relationships" id="257" r:id="R67d4e00e66614a17"/>
+    <p:sldId xmlns:r="http://schemas.openxmlformats.org/officeDocument/2006/relationships" id="258" r:id="R4c5c983c03fb4e09"/>
+    <p:sldId xmlns:r="http://schemas.openxmlformats.org/officeDocument/2006/relationships" id="259" r:id="Rb7295d32204c495f"/>
+    <p:sldId xmlns:r="http://schemas.openxmlformats.org/officeDocument/2006/relationships" id="260" r:id="Rb3b001b147fd4edc"/>
+    <p:sldId xmlns:r="http://schemas.openxmlformats.org/officeDocument/2006/relationships" id="261" r:id="Re97a400758714f17"/>
+    <p:sldId xmlns:r="http://schemas.openxmlformats.org/officeDocument/2006/relationships" id="262" r:id="Rf7014bf444634504"/>
+    <p:sldId xmlns:r="http://schemas.openxmlformats.org/officeDocument/2006/relationships" id="263" r:id="R6eb1b5f304374773"/>
+    <p:sldId xmlns:r="http://schemas.openxmlformats.org/officeDocument/2006/relationships" id="264" r:id="R1ceb9e5af6b74de2"/>
+    <p:sldId xmlns:r="http://schemas.openxmlformats.org/officeDocument/2006/relationships" id="265" r:id="R548c6f28b9154295"/>
+    <p:sldId xmlns:r="http://schemas.openxmlformats.org/officeDocument/2006/relationships" id="266" r:id="R24ce7778e0be46ea"/>
+    <p:sldId xmlns:r="http://schemas.openxmlformats.org/officeDocument/2006/relationships" id="267" r:id="R0f996a413f65459a"/>
+    <p:sldId xmlns:r="http://schemas.openxmlformats.org/officeDocument/2006/relationships" id="268" r:id="R577ce133ec644a8c"/>
+    <p:sldId xmlns:r="http://schemas.openxmlformats.org/officeDocument/2006/relationships" id="269" r:id="R9d92e40618144df7"/>
+    <p:sldId xmlns:r="http://schemas.openxmlformats.org/officeDocument/2006/relationships" id="270" r:id="R0b61932e75f8466e"/>
   </p:sldIdLst>
   <p:sldSz cx="12192000" cy="6858000"/>
   <p:notesSz cx="6858000" cy="9144000"/>
@@ -266,7 +266,7 @@
 </p:notesMaster>
 </file>
 
-<file path=ppt/notesMasters/theme/theme2.xml><?xml version="1.0" encoding="utf-8"?>
+<file path=ppt/notesMasters/theme/theme3.xml><?xml version="1.0" encoding="utf-8"?>
 <a:theme xmlns:a="http://schemas.openxmlformats.org/drawingml/2006/main" name="ChatGPT">
   <a:themeElements>
     <a:clrScheme name="ChatGPT">
@@ -503,7 +503,26 @@
         <p:txBody>
           <a:bodyPr xmlns:a="http://schemas.openxmlformats.org/drawingml/2006/main"/>
           <a:lstStyle xmlns:a="http://schemas.openxmlformats.org/drawingml/2006/main"/>
-          <a:p xmlns:a="http://schemas.openxmlformats.org/drawingml/2006/main"/>
+          <a:p xmlns:a="http://schemas.openxmlformats.org/drawingml/2006/main">
+            <a:r>
+              <a:t>Release source: /Users/Aamir/Desktop/rUTIs/results/pipeline/longcycler_release_claim_registry.json</a:t>
+            </a:r>
+          </a:p>
+          <a:p xmlns:a="http://schemas.openxmlformats.org/drawingml/2006/main">
+            <a:r>
+              <a:t>Scope: selected QC-passing Longcycler assemblies only.</a:t>
+            </a:r>
+          </a:p>
+          <a:p xmlns:a="http://schemas.openxmlformats.org/drawingml/2006/main">
+            <a:r>
+              <a:t>Clinical phenotype: versioned operational UTI phenotype.</a:t>
+            </a:r>
+          </a:p>
+          <a:p xmlns:a="http://schemas.openxmlformats.org/drawingml/2006/main">
+            <a:r>
+              <a:t>Analytical anchors: 532 episodes; 893 direct pairs; 371 adjacent pairs; RQ01-RQ10.</a:t>
+            </a:r>
+          </a:p>
         </p:txBody>
       </p:sp>
       <p:sp>
@@ -569,7 +588,26 @@
         <p:txBody>
           <a:bodyPr xmlns:a="http://schemas.openxmlformats.org/drawingml/2006/main"/>
           <a:lstStyle xmlns:a="http://schemas.openxmlformats.org/drawingml/2006/main"/>
-          <a:p xmlns:a="http://schemas.openxmlformats.org/drawingml/2006/main"/>
+          <a:p xmlns:a="http://schemas.openxmlformats.org/drawingml/2006/main">
+            <a:r>
+              <a:t>Release source: /Users/Aamir/Desktop/rUTIs/results/pipeline/longcycler_release_claim_registry.json</a:t>
+            </a:r>
+          </a:p>
+          <a:p xmlns:a="http://schemas.openxmlformats.org/drawingml/2006/main">
+            <a:r>
+              <a:t>Scope: selected QC-passing Longcycler assemblies only.</a:t>
+            </a:r>
+          </a:p>
+          <a:p xmlns:a="http://schemas.openxmlformats.org/drawingml/2006/main">
+            <a:r>
+              <a:t>Clinical phenotype: versioned operational UTI phenotype.</a:t>
+            </a:r>
+          </a:p>
+          <a:p xmlns:a="http://schemas.openxmlformats.org/drawingml/2006/main">
+            <a:r>
+              <a:t>Analytical anchors: 532 episodes; 893 direct pairs; 371 adjacent pairs; RQ01-RQ10.</a:t>
+            </a:r>
+          </a:p>
         </p:txBody>
       </p:sp>
       <p:sp>
@@ -635,7 +673,26 @@
         <p:txBody>
           <a:bodyPr xmlns:a="http://schemas.openxmlformats.org/drawingml/2006/main"/>
           <a:lstStyle xmlns:a="http://schemas.openxmlformats.org/drawingml/2006/main"/>
-          <a:p xmlns:a="http://schemas.openxmlformats.org/drawingml/2006/main"/>
+          <a:p xmlns:a="http://schemas.openxmlformats.org/drawingml/2006/main">
+            <a:r>
+              <a:t>Release source: /Users/Aamir/Desktop/rUTIs/results/pipeline/longcycler_release_claim_registry.json</a:t>
+            </a:r>
+          </a:p>
+          <a:p xmlns:a="http://schemas.openxmlformats.org/drawingml/2006/main">
+            <a:r>
+              <a:t>Scope: selected QC-passing Longcycler assemblies only.</a:t>
+            </a:r>
+          </a:p>
+          <a:p xmlns:a="http://schemas.openxmlformats.org/drawingml/2006/main">
+            <a:r>
+              <a:t>Clinical phenotype: versioned operational UTI phenotype.</a:t>
+            </a:r>
+          </a:p>
+          <a:p xmlns:a="http://schemas.openxmlformats.org/drawingml/2006/main">
+            <a:r>
+              <a:t>Analytical anchors: 532 episodes; 893 direct pairs; 371 adjacent pairs; RQ01-RQ10.</a:t>
+            </a:r>
+          </a:p>
         </p:txBody>
       </p:sp>
       <p:sp>
@@ -701,7 +758,26 @@
         <p:txBody>
           <a:bodyPr xmlns:a="http://schemas.openxmlformats.org/drawingml/2006/main"/>
           <a:lstStyle xmlns:a="http://schemas.openxmlformats.org/drawingml/2006/main"/>
-          <a:p xmlns:a="http://schemas.openxmlformats.org/drawingml/2006/main"/>
+          <a:p xmlns:a="http://schemas.openxmlformats.org/drawingml/2006/main">
+            <a:r>
+              <a:t>Release source: /Users/Aamir/Desktop/rUTIs/results/pipeline/longcycler_release_claim_registry.json</a:t>
+            </a:r>
+          </a:p>
+          <a:p xmlns:a="http://schemas.openxmlformats.org/drawingml/2006/main">
+            <a:r>
+              <a:t>Scope: selected QC-passing Longcycler assemblies only.</a:t>
+            </a:r>
+          </a:p>
+          <a:p xmlns:a="http://schemas.openxmlformats.org/drawingml/2006/main">
+            <a:r>
+              <a:t>Clinical phenotype: versioned operational UTI phenotype.</a:t>
+            </a:r>
+          </a:p>
+          <a:p xmlns:a="http://schemas.openxmlformats.org/drawingml/2006/main">
+            <a:r>
+              <a:t>Analytical anchors: 532 episodes; 893 direct pairs; 371 adjacent pairs; RQ01-RQ10.</a:t>
+            </a:r>
+          </a:p>
         </p:txBody>
       </p:sp>
       <p:sp>
@@ -767,7 +843,26 @@
         <p:txBody>
           <a:bodyPr xmlns:a="http://schemas.openxmlformats.org/drawingml/2006/main"/>
           <a:lstStyle xmlns:a="http://schemas.openxmlformats.org/drawingml/2006/main"/>
-          <a:p xmlns:a="http://schemas.openxmlformats.org/drawingml/2006/main"/>
+          <a:p xmlns:a="http://schemas.openxmlformats.org/drawingml/2006/main">
+            <a:r>
+              <a:t>Release source: /Users/Aamir/Desktop/rUTIs/results/pipeline/longcycler_release_claim_registry.json</a:t>
+            </a:r>
+          </a:p>
+          <a:p xmlns:a="http://schemas.openxmlformats.org/drawingml/2006/main">
+            <a:r>
+              <a:t>Scope: selected QC-passing Longcycler assemblies only.</a:t>
+            </a:r>
+          </a:p>
+          <a:p xmlns:a="http://schemas.openxmlformats.org/drawingml/2006/main">
+            <a:r>
+              <a:t>Clinical phenotype: versioned operational UTI phenotype.</a:t>
+            </a:r>
+          </a:p>
+          <a:p xmlns:a="http://schemas.openxmlformats.org/drawingml/2006/main">
+            <a:r>
+              <a:t>Analytical anchors: 532 episodes; 893 direct pairs; 371 adjacent pairs; RQ01-RQ10.</a:t>
+            </a:r>
+          </a:p>
         </p:txBody>
       </p:sp>
       <p:sp>
@@ -833,7 +928,26 @@
         <p:txBody>
           <a:bodyPr xmlns:a="http://schemas.openxmlformats.org/drawingml/2006/main"/>
           <a:lstStyle xmlns:a="http://schemas.openxmlformats.org/drawingml/2006/main"/>
-          <a:p xmlns:a="http://schemas.openxmlformats.org/drawingml/2006/main"/>
+          <a:p xmlns:a="http://schemas.openxmlformats.org/drawingml/2006/main">
+            <a:r>
+              <a:t>Release source: /Users/Aamir/Desktop/rUTIs/results/pipeline/longcycler_release_claim_registry.json</a:t>
+            </a:r>
+          </a:p>
+          <a:p xmlns:a="http://schemas.openxmlformats.org/drawingml/2006/main">
+            <a:r>
+              <a:t>Scope: selected QC-passing Longcycler assemblies only.</a:t>
+            </a:r>
+          </a:p>
+          <a:p xmlns:a="http://schemas.openxmlformats.org/drawingml/2006/main">
+            <a:r>
+              <a:t>Clinical phenotype: versioned operational UTI phenotype.</a:t>
+            </a:r>
+          </a:p>
+          <a:p xmlns:a="http://schemas.openxmlformats.org/drawingml/2006/main">
+            <a:r>
+              <a:t>Analytical anchors: 532 episodes; 893 direct pairs; 371 adjacent pairs; RQ01-RQ10.</a:t>
+            </a:r>
+          </a:p>
         </p:txBody>
       </p:sp>
       <p:sp>
@@ -899,7 +1013,26 @@
         <p:txBody>
           <a:bodyPr xmlns:a="http://schemas.openxmlformats.org/drawingml/2006/main"/>
           <a:lstStyle xmlns:a="http://schemas.openxmlformats.org/drawingml/2006/main"/>
-          <a:p xmlns:a="http://schemas.openxmlformats.org/drawingml/2006/main"/>
+          <a:p xmlns:a="http://schemas.openxmlformats.org/drawingml/2006/main">
+            <a:r>
+              <a:t>Release source: /Users/Aamir/Desktop/rUTIs/results/pipeline/longcycler_release_claim_registry.json</a:t>
+            </a:r>
+          </a:p>
+          <a:p xmlns:a="http://schemas.openxmlformats.org/drawingml/2006/main">
+            <a:r>
+              <a:t>Scope: selected QC-passing Longcycler assemblies only.</a:t>
+            </a:r>
+          </a:p>
+          <a:p xmlns:a="http://schemas.openxmlformats.org/drawingml/2006/main">
+            <a:r>
+              <a:t>Clinical phenotype: versioned operational UTI phenotype.</a:t>
+            </a:r>
+          </a:p>
+          <a:p xmlns:a="http://schemas.openxmlformats.org/drawingml/2006/main">
+            <a:r>
+              <a:t>Analytical anchors: 532 episodes; 893 direct pairs; 371 adjacent pairs; RQ01-RQ10.</a:t>
+            </a:r>
+          </a:p>
         </p:txBody>
       </p:sp>
       <p:sp>
@@ -965,7 +1098,26 @@
         <p:txBody>
           <a:bodyPr xmlns:a="http://schemas.openxmlformats.org/drawingml/2006/main"/>
           <a:lstStyle xmlns:a="http://schemas.openxmlformats.org/drawingml/2006/main"/>
-          <a:p xmlns:a="http://schemas.openxmlformats.org/drawingml/2006/main"/>
+          <a:p xmlns:a="http://schemas.openxmlformats.org/drawingml/2006/main">
+            <a:r>
+              <a:t>Release source: /Users/Aamir/Desktop/rUTIs/results/pipeline/longcycler_release_claim_registry.json</a:t>
+            </a:r>
+          </a:p>
+          <a:p xmlns:a="http://schemas.openxmlformats.org/drawingml/2006/main">
+            <a:r>
+              <a:t>Scope: selected QC-passing Longcycler assemblies only.</a:t>
+            </a:r>
+          </a:p>
+          <a:p xmlns:a="http://schemas.openxmlformats.org/drawingml/2006/main">
+            <a:r>
+              <a:t>Clinical phenotype: versioned operational UTI phenotype.</a:t>
+            </a:r>
+          </a:p>
+          <a:p xmlns:a="http://schemas.openxmlformats.org/drawingml/2006/main">
+            <a:r>
+              <a:t>Analytical anchors: 532 episodes; 893 direct pairs; 371 adjacent pairs; RQ01-RQ10.</a:t>
+            </a:r>
+          </a:p>
         </p:txBody>
       </p:sp>
       <p:sp>
@@ -1031,7 +1183,26 @@
         <p:txBody>
           <a:bodyPr xmlns:a="http://schemas.openxmlformats.org/drawingml/2006/main"/>
           <a:lstStyle xmlns:a="http://schemas.openxmlformats.org/drawingml/2006/main"/>
-          <a:p xmlns:a="http://schemas.openxmlformats.org/drawingml/2006/main"/>
+          <a:p xmlns:a="http://schemas.openxmlformats.org/drawingml/2006/main">
+            <a:r>
+              <a:t>Release source: /Users/Aamir/Desktop/rUTIs/results/pipeline/longcycler_release_claim_registry.json</a:t>
+            </a:r>
+          </a:p>
+          <a:p xmlns:a="http://schemas.openxmlformats.org/drawingml/2006/main">
+            <a:r>
+              <a:t>Scope: selected QC-passing Longcycler assemblies only.</a:t>
+            </a:r>
+          </a:p>
+          <a:p xmlns:a="http://schemas.openxmlformats.org/drawingml/2006/main">
+            <a:r>
+              <a:t>Clinical phenotype: versioned operational UTI phenotype.</a:t>
+            </a:r>
+          </a:p>
+          <a:p xmlns:a="http://schemas.openxmlformats.org/drawingml/2006/main">
+            <a:r>
+              <a:t>Analytical anchors: 532 episodes; 893 direct pairs; 371 adjacent pairs; RQ01-RQ10.</a:t>
+            </a:r>
+          </a:p>
         </p:txBody>
       </p:sp>
       <p:sp>
@@ -1097,7 +1268,26 @@
         <p:txBody>
           <a:bodyPr xmlns:a="http://schemas.openxmlformats.org/drawingml/2006/main"/>
           <a:lstStyle xmlns:a="http://schemas.openxmlformats.org/drawingml/2006/main"/>
-          <a:p xmlns:a="http://schemas.openxmlformats.org/drawingml/2006/main"/>
+          <a:p xmlns:a="http://schemas.openxmlformats.org/drawingml/2006/main">
+            <a:r>
+              <a:t>Release source: /Users/Aamir/Desktop/rUTIs/results/pipeline/longcycler_release_claim_registry.json</a:t>
+            </a:r>
+          </a:p>
+          <a:p xmlns:a="http://schemas.openxmlformats.org/drawingml/2006/main">
+            <a:r>
+              <a:t>Scope: selected QC-passing Longcycler assemblies only.</a:t>
+            </a:r>
+          </a:p>
+          <a:p xmlns:a="http://schemas.openxmlformats.org/drawingml/2006/main">
+            <a:r>
+              <a:t>Clinical phenotype: versioned operational UTI phenotype.</a:t>
+            </a:r>
+          </a:p>
+          <a:p xmlns:a="http://schemas.openxmlformats.org/drawingml/2006/main">
+            <a:r>
+              <a:t>Analytical anchors: 532 episodes; 893 direct pairs; 371 adjacent pairs; RQ01-RQ10.</a:t>
+            </a:r>
+          </a:p>
         </p:txBody>
       </p:sp>
       <p:sp>
@@ -1163,7 +1353,26 @@
         <p:txBody>
           <a:bodyPr xmlns:a="http://schemas.openxmlformats.org/drawingml/2006/main"/>
           <a:lstStyle xmlns:a="http://schemas.openxmlformats.org/drawingml/2006/main"/>
-          <a:p xmlns:a="http://schemas.openxmlformats.org/drawingml/2006/main"/>
+          <a:p xmlns:a="http://schemas.openxmlformats.org/drawingml/2006/main">
+            <a:r>
+              <a:t>Release source: /Users/Aamir/Desktop/rUTIs/results/pipeline/longcycler_release_claim_registry.json</a:t>
+            </a:r>
+          </a:p>
+          <a:p xmlns:a="http://schemas.openxmlformats.org/drawingml/2006/main">
+            <a:r>
+              <a:t>Scope: selected QC-passing Longcycler assemblies only.</a:t>
+            </a:r>
+          </a:p>
+          <a:p xmlns:a="http://schemas.openxmlformats.org/drawingml/2006/main">
+            <a:r>
+              <a:t>Clinical phenotype: versioned operational UTI phenotype.</a:t>
+            </a:r>
+          </a:p>
+          <a:p xmlns:a="http://schemas.openxmlformats.org/drawingml/2006/main">
+            <a:r>
+              <a:t>Analytical anchors: 532 episodes; 893 direct pairs; 371 adjacent pairs; RQ01-RQ10.</a:t>
+            </a:r>
+          </a:p>
         </p:txBody>
       </p:sp>
       <p:sp>
@@ -1229,7 +1438,26 @@
         <p:txBody>
           <a:bodyPr xmlns:a="http://schemas.openxmlformats.org/drawingml/2006/main"/>
           <a:lstStyle xmlns:a="http://schemas.openxmlformats.org/drawingml/2006/main"/>
-          <a:p xmlns:a="http://schemas.openxmlformats.org/drawingml/2006/main"/>
+          <a:p xmlns:a="http://schemas.openxmlformats.org/drawingml/2006/main">
+            <a:r>
+              <a:t>Release source: /Users/Aamir/Desktop/rUTIs/results/pipeline/longcycler_release_claim_registry.json</a:t>
+            </a:r>
+          </a:p>
+          <a:p xmlns:a="http://schemas.openxmlformats.org/drawingml/2006/main">
+            <a:r>
+              <a:t>Scope: selected QC-passing Longcycler assemblies only.</a:t>
+            </a:r>
+          </a:p>
+          <a:p xmlns:a="http://schemas.openxmlformats.org/drawingml/2006/main">
+            <a:r>
+              <a:t>Clinical phenotype: versioned operational UTI phenotype.</a:t>
+            </a:r>
+          </a:p>
+          <a:p xmlns:a="http://schemas.openxmlformats.org/drawingml/2006/main">
+            <a:r>
+              <a:t>Analytical anchors: 532 episodes; 893 direct pairs; 371 adjacent pairs; RQ01-RQ10.</a:t>
+            </a:r>
+          </a:p>
         </p:txBody>
       </p:sp>
       <p:sp>
@@ -1295,7 +1523,26 @@
         <p:txBody>
           <a:bodyPr xmlns:a="http://schemas.openxmlformats.org/drawingml/2006/main"/>
           <a:lstStyle xmlns:a="http://schemas.openxmlformats.org/drawingml/2006/main"/>
-          <a:p xmlns:a="http://schemas.openxmlformats.org/drawingml/2006/main"/>
+          <a:p xmlns:a="http://schemas.openxmlformats.org/drawingml/2006/main">
+            <a:r>
+              <a:t>Release source: /Users/Aamir/Desktop/rUTIs/results/pipeline/longcycler_release_claim_registry.json</a:t>
+            </a:r>
+          </a:p>
+          <a:p xmlns:a="http://schemas.openxmlformats.org/drawingml/2006/main">
+            <a:r>
+              <a:t>Scope: selected QC-passing Longcycler assemblies only.</a:t>
+            </a:r>
+          </a:p>
+          <a:p xmlns:a="http://schemas.openxmlformats.org/drawingml/2006/main">
+            <a:r>
+              <a:t>Clinical phenotype: versioned operational UTI phenotype.</a:t>
+            </a:r>
+          </a:p>
+          <a:p xmlns:a="http://schemas.openxmlformats.org/drawingml/2006/main">
+            <a:r>
+              <a:t>Analytical anchors: 532 episodes; 893 direct pairs; 371 adjacent pairs; RQ01-RQ10.</a:t>
+            </a:r>
+          </a:p>
         </p:txBody>
       </p:sp>
       <p:sp>
@@ -1361,7 +1608,26 @@
         <p:txBody>
           <a:bodyPr xmlns:a="http://schemas.openxmlformats.org/drawingml/2006/main"/>
           <a:lstStyle xmlns:a="http://schemas.openxmlformats.org/drawingml/2006/main"/>
-          <a:p xmlns:a="http://schemas.openxmlformats.org/drawingml/2006/main"/>
+          <a:p xmlns:a="http://schemas.openxmlformats.org/drawingml/2006/main">
+            <a:r>
+              <a:t>Release source: /Users/Aamir/Desktop/rUTIs/results/pipeline/longcycler_release_claim_registry.json</a:t>
+            </a:r>
+          </a:p>
+          <a:p xmlns:a="http://schemas.openxmlformats.org/drawingml/2006/main">
+            <a:r>
+              <a:t>Scope: selected QC-passing Longcycler assemblies only.</a:t>
+            </a:r>
+          </a:p>
+          <a:p xmlns:a="http://schemas.openxmlformats.org/drawingml/2006/main">
+            <a:r>
+              <a:t>Clinical phenotype: versioned operational UTI phenotype.</a:t>
+            </a:r>
+          </a:p>
+          <a:p xmlns:a="http://schemas.openxmlformats.org/drawingml/2006/main">
+            <a:r>
+              <a:t>Analytical anchors: 532 episodes; 893 direct pairs; 371 adjacent pairs; RQ01-RQ10.</a:t>
+            </a:r>
+          </a:p>
         </p:txBody>
       </p:sp>
       <p:sp>
@@ -1427,7 +1693,26 @@
         <p:txBody>
           <a:bodyPr xmlns:a="http://schemas.openxmlformats.org/drawingml/2006/main"/>
           <a:lstStyle xmlns:a="http://schemas.openxmlformats.org/drawingml/2006/main"/>
-          <a:p xmlns:a="http://schemas.openxmlformats.org/drawingml/2006/main"/>
+          <a:p xmlns:a="http://schemas.openxmlformats.org/drawingml/2006/main">
+            <a:r>
+              <a:t>Release source: /Users/Aamir/Desktop/rUTIs/results/pipeline/longcycler_release_claim_registry.json</a:t>
+            </a:r>
+          </a:p>
+          <a:p xmlns:a="http://schemas.openxmlformats.org/drawingml/2006/main">
+            <a:r>
+              <a:t>Scope: selected QC-passing Longcycler assemblies only.</a:t>
+            </a:r>
+          </a:p>
+          <a:p xmlns:a="http://schemas.openxmlformats.org/drawingml/2006/main">
+            <a:r>
+              <a:t>Clinical phenotype: versioned operational UTI phenotype.</a:t>
+            </a:r>
+          </a:p>
+          <a:p xmlns:a="http://schemas.openxmlformats.org/drawingml/2006/main">
+            <a:r>
+              <a:t>Analytical anchors: 532 episodes; 893 direct pairs; 371 adjacent pairs; RQ01-RQ10.</a:t>
+            </a:r>
+          </a:p>
         </p:txBody>
       </p:sp>
       <p:sp>
@@ -1455,7 +1740,7 @@
 </p:notes>
 </file>
 
-<file path=ppt/slideLayouts/slideLayout2.xml><?xml version="1.0" encoding="utf-8"?>
+<file path=ppt/slideLayouts/slideLayout1.xml><?xml version="1.0" encoding="utf-8"?>
 <p:sldLayout xmlns:p="http://schemas.openxmlformats.org/presentationml/2006/main" type="title">
   <p:cSld name="Title Slide">
     <p:spTree>
@@ -1493,7 +1778,7 @@
   </p:cSld>
   <p:clrMap bg1="lt1" tx1="dk1" bg2="lt2" tx2="dk2" accent1="accent1" accent2="accent2" accent3="accent3" accent4="accent4" accent5="accent5" accent6="accent6" hlink="hlink" folHlink="folHlink"/>
   <p:sldLayoutIdLst>
-    <p:sldLayoutId xmlns:r="http://schemas.openxmlformats.org/officeDocument/2006/relationships" id="2147483649" r:id="R99e34b94b7dc44b9"/>
+    <p:sldLayoutId xmlns:r="http://schemas.openxmlformats.org/officeDocument/2006/relationships" id="2147483649" r:id="R631262bf0ca14a4c"/>
   </p:sldLayoutIdLst>
   <p:txStyles>
     <p:titleStyle>
@@ -1775,6 +2060,205 @@
 </p:sldMaster>
 </file>
 
+<file path=ppt/slideMasters/theme/theme2.xml><?xml version="1.0" encoding="utf-8"?>
+<a:theme xmlns:a="http://schemas.openxmlformats.org/drawingml/2006/main" name="ChatGPT">
+  <a:themeElements>
+    <a:clrScheme name="ChatGPT">
+      <a:dk1>
+        <a:srgbClr val="000000"/>
+      </a:dk1>
+      <a:lt1>
+        <a:srgbClr val="FFFFFF"/>
+      </a:lt1>
+      <a:dk2>
+        <a:srgbClr val="0E2841"/>
+      </a:dk2>
+      <a:lt2>
+        <a:srgbClr val="E8E8E8"/>
+      </a:lt2>
+      <a:accent1>
+        <a:srgbClr val="156082"/>
+      </a:accent1>
+      <a:accent2>
+        <a:srgbClr val="E97132"/>
+      </a:accent2>
+      <a:accent3>
+        <a:srgbClr val="196B24"/>
+      </a:accent3>
+      <a:accent4>
+        <a:srgbClr val="0F9ED5"/>
+      </a:accent4>
+      <a:accent5>
+        <a:srgbClr val="A02B93"/>
+      </a:accent5>
+      <a:accent6>
+        <a:srgbClr val="4EA72E"/>
+      </a:accent6>
+      <a:hlink>
+        <a:srgbClr val="467886"/>
+      </a:hlink>
+      <a:folHlink>
+        <a:srgbClr val="96607D"/>
+      </a:folHlink>
+    </a:clrScheme>
+    <a:fontScheme name="Office">
+      <a:majorFont>
+        <a:latin typeface="Calibri Light"/>
+        <a:ea typeface="Calibri Light"/>
+        <a:cs typeface="Calibri Light"/>
+      </a:majorFont>
+      <a:minorFont>
+        <a:latin typeface="Calibri"/>
+        <a:ea typeface="Calibri"/>
+        <a:cs typeface="Calibri"/>
+      </a:minorFont>
+    </a:fontScheme>
+    <a:fmtScheme name="ChatGPT">
+      <a:fillStyleLst>
+        <a:solidFill>
+          <a:schemeClr val="phClr"/>
+        </a:solidFill>
+        <a:solidFill>
+          <a:schemeClr val="dk1"/>
+        </a:solidFill>
+        <a:solidFill>
+          <a:schemeClr val="accent1"/>
+        </a:solidFill>
+      </a:fillStyleLst>
+      <a:lnStyleLst>
+        <a:ln w="12700">
+          <a:solidFill>
+            <a:schemeClr val="phClr"/>
+          </a:solidFill>
+          <a:prstDash val="solid"/>
+        </a:ln>
+        <a:ln w="19050">
+          <a:solidFill>
+            <a:schemeClr val="phClr"/>
+          </a:solidFill>
+          <a:prstDash val="solid"/>
+        </a:ln>
+        <a:ln w="25400">
+          <a:solidFill>
+            <a:schemeClr val="phClr"/>
+          </a:solidFill>
+          <a:prstDash val="solid"/>
+        </a:ln>
+      </a:lnStyleLst>
+      <a:effectStyleLst>
+        <a:effectStyle>
+          <a:effectLst/>
+        </a:effectStyle>
+        <a:effectStyle>
+          <a:effectLst/>
+        </a:effectStyle>
+        <a:effectStyle>
+          <a:effectLst>
+            <a:outerShdw blurRad="57150" dist="19050" dir="5400000">
+              <a:srgbClr val="000000">
+                <a:alpha val="16000"/>
+              </a:srgbClr>
+            </a:outerShdw>
+          </a:effectLst>
+        </a:effectStyle>
+        <a:effectStyle>
+          <a:effectLst>
+            <a:outerShdw blurRad="19050" dist="9525" dir="5400000">
+              <a:srgbClr val="000000">
+                <a:alpha val="6000"/>
+              </a:srgbClr>
+            </a:outerShdw>
+          </a:effectLst>
+        </a:effectStyle>
+        <a:effectStyle>
+          <a:effectLst>
+            <a:outerShdw blurRad="28575" dist="9525" dir="5400000">
+              <a:srgbClr val="000000">
+                <a:alpha val="8000"/>
+              </a:srgbClr>
+            </a:outerShdw>
+          </a:effectLst>
+        </a:effectStyle>
+        <a:effectStyle>
+          <a:effectLst>
+            <a:outerShdw blurRad="57150" dist="19050" dir="5400000">
+              <a:srgbClr val="000000">
+                <a:alpha val="10000"/>
+              </a:srgbClr>
+            </a:outerShdw>
+          </a:effectLst>
+        </a:effectStyle>
+        <a:effectStyle>
+          <a:effectLst>
+            <a:outerShdw blurRad="114300" dist="38100" dir="5400000">
+              <a:srgbClr val="000000">
+                <a:alpha val="12000"/>
+              </a:srgbClr>
+            </a:outerShdw>
+          </a:effectLst>
+        </a:effectStyle>
+        <a:effectStyle>
+          <a:effectLst>
+            <a:outerShdw blurRad="171450" dist="57150" dir="5400000">
+              <a:srgbClr val="000000">
+                <a:alpha val="16000"/>
+              </a:srgbClr>
+            </a:outerShdw>
+          </a:effectLst>
+        </a:effectStyle>
+        <a:effectStyle>
+          <a:effectLst>
+            <a:outerShdw blurRad="266700" dist="95250" dir="5400000">
+              <a:srgbClr val="000000">
+                <a:alpha val="24000"/>
+              </a:srgbClr>
+            </a:outerShdw>
+          </a:effectLst>
+        </a:effectStyle>
+      </a:effectStyleLst>
+      <a:bgFillStyleLst>
+        <a:solidFill>
+          <a:schemeClr val="phClr"/>
+        </a:solidFill>
+        <a:solidFill>
+          <a:schemeClr val="phClr">
+            <a:tint val="95000"/>
+            <a:satMod val="170000"/>
+          </a:schemeClr>
+        </a:solidFill>
+        <a:gradFill>
+          <a:gsLst>
+            <a:gs pos="0">
+              <a:schemeClr val="phClr">
+                <a:tint val="93000"/>
+                <a:shade val="98000"/>
+                <a:lumMod val="102000"/>
+                <a:satMod val="150000"/>
+              </a:schemeClr>
+            </a:gs>
+            <a:gs pos="50000">
+              <a:schemeClr val="phClr">
+                <a:tint val="98000"/>
+                <a:shade val="90000"/>
+                <a:lumMod val="103000"/>
+                <a:satMod val="130000"/>
+              </a:schemeClr>
+            </a:gs>
+            <a:gs pos="100000">
+              <a:schemeClr val="phClr">
+                <a:shade val="63000"/>
+                <a:satMod val="120000"/>
+              </a:schemeClr>
+            </a:gs>
+          </a:gsLst>
+          <a:lin ang="5400000" scaled="0"/>
+        </a:gradFill>
+      </a:bgFillStyleLst>
+    </a:fmtScheme>
+  </a:themeElements>
+</a:theme>
+</file>
+
 <file path=ppt/slides/slide1.xml><?xml version="1.0" encoding="utf-8"?>
 <p:sld xmlns:p="http://schemas.openxmlformats.org/presentationml/2006/main">
   <p:cSld>
@@ -1842,6 +2326,7 @@
           <a:lstStyle xmlns:a="http://schemas.openxmlformats.org/drawingml/2006/main"/>
           <a:p xmlns:a="http://schemas.openxmlformats.org/drawingml/2006/main">
             <a:pPr>
+              <a:buNone/>
               <a:defRPr sz="900" b="1">
                 <a:solidFill>
                   <a:srgbClr val="C95722"/>
@@ -1885,6 +2370,7 @@
           <a:lstStyle xmlns:a="http://schemas.openxmlformats.org/drawingml/2006/main"/>
           <a:p xmlns:a="http://schemas.openxmlformats.org/drawingml/2006/main">
             <a:pPr algn="l">
+              <a:buNone/>
               <a:defRPr sz="825" b="1">
                 <a:solidFill>
                   <a:srgbClr val="53636A"/>
@@ -1895,7 +2381,7 @@
               </a:defRPr>
             </a:pPr>
             <a:r>
-              <a:t>SCIENTIFIC ONBOARDING REVIEW</a:t>
+              <a:t>LONGCYCLER-ONLY SCIENTIFIC ONBOARDING</a:t>
             </a:r>
           </a:p>
         </p:txBody>
@@ -1928,6 +2414,7 @@
           <a:lstStyle xmlns:a="http://schemas.openxmlformats.org/drawingml/2006/main"/>
           <a:p xmlns:a="http://schemas.openxmlformats.org/drawingml/2006/main">
             <a:pPr>
+              <a:buNone/>
               <a:defRPr sz="3750" b="1">
                 <a:solidFill>
                   <a:srgbClr val="15252D"/>
@@ -1943,6 +2430,7 @@
           </a:p>
           <a:p xmlns:a="http://schemas.openxmlformats.org/drawingml/2006/main">
             <a:pPr>
+              <a:buNone/>
               <a:defRPr sz="3750" b="1">
                 <a:solidFill>
                   <a:srgbClr val="15252D"/>
@@ -1986,6 +2474,7 @@
           <a:lstStyle xmlns:a="http://schemas.openxmlformats.org/drawingml/2006/main"/>
           <a:p xmlns:a="http://schemas.openxmlformats.org/drawingml/2006/main">
             <a:pPr>
+              <a:buNone/>
               <a:defRPr sz="1500">
                 <a:solidFill>
                   <a:srgbClr val="53636A"/>
@@ -1996,7 +2485,7 @@
               </a:defRPr>
             </a:pPr>
             <a:r>
-              <a:t>Recurrent UTI clinical-to-genomic analysis in E. coli</a:t>
+              <a:t>Longcycler-only clinical-to-genomic analysis of the operational UTI phenotype</a:t>
             </a:r>
           </a:p>
         </p:txBody>
@@ -2058,6 +2547,7 @@
           <a:lstStyle xmlns:a="http://schemas.openxmlformats.org/drawingml/2006/main"/>
           <a:p xmlns:a="http://schemas.openxmlformats.org/drawingml/2006/main">
             <a:pPr algn="ctr">
+              <a:buNone/>
               <a:defRPr sz="675" b="1">
                 <a:solidFill>
                   <a:srgbClr val="176C96"/>
@@ -2130,6 +2620,7 @@
           <a:lstStyle xmlns:a="http://schemas.openxmlformats.org/drawingml/2006/main"/>
           <a:p xmlns:a="http://schemas.openxmlformats.org/drawingml/2006/main">
             <a:pPr algn="ctr">
+              <a:buNone/>
               <a:defRPr sz="675" b="1">
                 <a:solidFill>
                   <a:srgbClr val="2F8A61"/>
@@ -2140,7 +2631,7 @@
               </a:defRPr>
             </a:pPr>
             <a:r>
-              <a:t>CURRENT EVIDENCE</a:t>
+              <a:t>CURRENT RELEASE</a:t>
             </a:r>
           </a:p>
         </p:txBody>
@@ -2202,6 +2693,7 @@
           <a:lstStyle xmlns:a="http://schemas.openxmlformats.org/drawingml/2006/main"/>
           <a:p xmlns:a="http://schemas.openxmlformats.org/drawingml/2006/main">
             <a:pPr algn="ctr">
+              <a:buNone/>
               <a:defRPr sz="675" b="1">
                 <a:solidFill>
                   <a:srgbClr val="C95722"/>
@@ -2278,6 +2770,7 @@
           <a:lstStyle xmlns:a="http://schemas.openxmlformats.org/drawingml/2006/main"/>
           <a:p xmlns:a="http://schemas.openxmlformats.org/drawingml/2006/main">
             <a:pPr>
+              <a:buNone/>
               <a:defRPr sz="975" b="1">
                 <a:solidFill>
                   <a:srgbClr val="C95722"/>
@@ -2321,6 +2814,7 @@
           <a:lstStyle xmlns:a="http://schemas.openxmlformats.org/drawingml/2006/main"/>
           <a:p xmlns:a="http://schemas.openxmlformats.org/drawingml/2006/main">
             <a:pPr>
+              <a:buNone/>
               <a:defRPr sz="1275" b="1">
                 <a:solidFill>
                   <a:srgbClr val="15252D"/>
@@ -2364,6 +2858,7 @@
           <a:lstStyle xmlns:a="http://schemas.openxmlformats.org/drawingml/2006/main"/>
           <a:p xmlns:a="http://schemas.openxmlformats.org/drawingml/2006/main">
             <a:pPr>
+              <a:buNone/>
               <a:defRPr sz="1275" b="1">
                 <a:solidFill>
                   <a:srgbClr val="15252D"/>
@@ -2407,6 +2902,7 @@
           <a:lstStyle xmlns:a="http://schemas.openxmlformats.org/drawingml/2006/main"/>
           <a:p xmlns:a="http://schemas.openxmlformats.org/drawingml/2006/main">
             <a:pPr>
+              <a:buNone/>
               <a:defRPr sz="1275" b="1">
                 <a:solidFill>
                   <a:srgbClr val="15252D"/>
@@ -2450,6 +2946,7 @@
           <a:lstStyle xmlns:a="http://schemas.openxmlformats.org/drawingml/2006/main"/>
           <a:p xmlns:a="http://schemas.openxmlformats.org/drawingml/2006/main">
             <a:pPr>
+              <a:buNone/>
               <a:defRPr sz="2850" b="1">
                 <a:solidFill>
                   <a:srgbClr val="15252D"/>
@@ -2460,7 +2957,7 @@
               </a:defRPr>
             </a:pPr>
             <a:r>
-              <a:t>583</a:t>
+              <a:t>532</a:t>
             </a:r>
           </a:p>
         </p:txBody>
@@ -2493,6 +2990,7 @@
           <a:lstStyle xmlns:a="http://schemas.openxmlformats.org/drawingml/2006/main"/>
           <a:p xmlns:a="http://schemas.openxmlformats.org/drawingml/2006/main">
             <a:pPr>
+              <a:buNone/>
               <a:defRPr sz="975" b="1">
                 <a:solidFill>
                   <a:srgbClr val="15252D"/>
@@ -2503,7 +3001,7 @@
               </a:defRPr>
             </a:pPr>
             <a:r>
-              <a:t>Clinical episodes</a:t>
+              <a:t>Selected episodes</a:t>
             </a:r>
           </a:p>
         </p:txBody>
@@ -2536,6 +3034,7 @@
           <a:lstStyle xmlns:a="http://schemas.openxmlformats.org/drawingml/2006/main"/>
           <a:p xmlns:a="http://schemas.openxmlformats.org/drawingml/2006/main">
             <a:pPr>
+              <a:buNone/>
               <a:defRPr sz="825">
                 <a:solidFill>
                   <a:srgbClr val="53636A"/>
@@ -2546,7 +3045,7 @@
               </a:defRPr>
             </a:pPr>
             <a:r>
-              <a:t>Current primary denominator</a:t>
+              <a:t>161 residents</a:t>
             </a:r>
           </a:p>
         </p:txBody>
@@ -2579,6 +3078,7 @@
           <a:lstStyle xmlns:a="http://schemas.openxmlformats.org/drawingml/2006/main"/>
           <a:p xmlns:a="http://schemas.openxmlformats.org/drawingml/2006/main">
             <a:pPr>
+              <a:buNone/>
               <a:defRPr sz="2850" b="1">
                 <a:solidFill>
                   <a:srgbClr val="C95722"/>
@@ -2589,7 +3089,7 @@
               </a:defRPr>
             </a:pPr>
             <a:r>
-              <a:t>18</a:t>
+              <a:t>16</a:t>
             </a:r>
           </a:p>
         </p:txBody>
@@ -2622,6 +3122,7 @@
           <a:lstStyle xmlns:a="http://schemas.openxmlformats.org/drawingml/2006/main"/>
           <a:p xmlns:a="http://schemas.openxmlformats.org/drawingml/2006/main">
             <a:pPr>
+              <a:buNone/>
               <a:defRPr sz="975" b="1">
                 <a:solidFill>
                   <a:srgbClr val="15252D"/>
@@ -2632,7 +3133,7 @@
               </a:defRPr>
             </a:pPr>
             <a:r>
-              <a:t>Primary UTI</a:t>
+              <a:t>Operational UTI</a:t>
             </a:r>
           </a:p>
         </p:txBody>
@@ -2665,6 +3166,7 @@
           <a:lstStyle xmlns:a="http://schemas.openxmlformats.org/drawingml/2006/main"/>
           <a:p xmlns:a="http://schemas.openxmlformats.org/drawingml/2006/main">
             <a:pPr>
+              <a:buNone/>
               <a:defRPr sz="825">
                 <a:solidFill>
                   <a:srgbClr val="53636A"/>
@@ -2675,7 +3177,7 @@
               </a:defRPr>
             </a:pPr>
             <a:r>
-              <a:t>Clinical episodes</a:t>
+              <a:t>Selected episodes</a:t>
             </a:r>
           </a:p>
         </p:txBody>
@@ -2708,6 +3210,7 @@
           <a:lstStyle xmlns:a="http://schemas.openxmlformats.org/drawingml/2006/main"/>
           <a:p xmlns:a="http://schemas.openxmlformats.org/drawingml/2006/main">
             <a:pPr>
+              <a:buNone/>
               <a:defRPr sz="2850" b="1">
                 <a:solidFill>
                   <a:srgbClr val="2F8A61"/>
@@ -2718,7 +3221,7 @@
               </a:defRPr>
             </a:pPr>
             <a:r>
-              <a:t>11</a:t>
+              <a:t>9</a:t>
             </a:r>
           </a:p>
         </p:txBody>
@@ -2751,6 +3254,7 @@
           <a:lstStyle xmlns:a="http://schemas.openxmlformats.org/drawingml/2006/main"/>
           <a:p xmlns:a="http://schemas.openxmlformats.org/drawingml/2006/main">
             <a:pPr>
+              <a:buNone/>
               <a:defRPr sz="975" b="1">
                 <a:solidFill>
                   <a:srgbClr val="15252D"/>
@@ -2794,6 +3298,7 @@
           <a:lstStyle xmlns:a="http://schemas.openxmlformats.org/drawingml/2006/main"/>
           <a:p xmlns:a="http://schemas.openxmlformats.org/drawingml/2006/main">
             <a:pPr>
+              <a:buNone/>
               <a:defRPr sz="825">
                 <a:solidFill>
                   <a:srgbClr val="53636A"/>
@@ -2864,6 +3369,7 @@
           <a:lstStyle xmlns:a="http://schemas.openxmlformats.org/drawingml/2006/main"/>
           <a:p xmlns:a="http://schemas.openxmlformats.org/drawingml/2006/main">
             <a:pPr>
+              <a:buNone/>
               <a:defRPr sz="975">
                 <a:solidFill>
                   <a:srgbClr val="15252D"/>
@@ -2874,11 +3380,12 @@
               </a:defRPr>
             </a:pPr>
             <a:r>
-              <a:t>Current framing: UTI versus heterogeneous Not_UTI.</a:t>
-            </a:r>
-          </a:p>
-          <a:p xmlns:a="http://schemas.openxmlformats.org/drawingml/2006/main">
-            <a:pPr>
+              <a:t>Current framing: operational UTI versus heterogeneous Not_UTI.</a:t>
+            </a:r>
+          </a:p>
+          <a:p xmlns:a="http://schemas.openxmlformats.org/drawingml/2006/main">
+            <a:pPr>
+              <a:buNone/>
               <a:defRPr sz="975">
                 <a:solidFill>
                   <a:srgbClr val="15252D"/>
@@ -2889,7 +3396,7 @@
               </a:defRPr>
             </a:pPr>
             <a:r>
-              <a:t>Legacy ASB comparisons are not primary conclusions.</a:t>
+              <a:t>All analytical inputs are selected QC-passing Longcycler genomes.</a:t>
             </a:r>
           </a:p>
         </p:txBody>
@@ -2955,6 +3462,7 @@
           <a:lstStyle xmlns:a="http://schemas.openxmlformats.org/drawingml/2006/main"/>
           <a:p xmlns:a="http://schemas.openxmlformats.org/drawingml/2006/main">
             <a:pPr>
+              <a:buNone/>
               <a:defRPr sz="675">
                 <a:solidFill>
                   <a:srgbClr val="53636A"/>
@@ -2965,7 +3473,7 @@
               </a:defRPr>
             </a:pPr>
             <a:r>
-              <a:t>Current evidence pack: results/summary/final_key_results_summary.md</a:t>
+              <a:t>Current evidence pack: results/pipeline/longcycler_release_claim_registry.json</a:t>
             </a:r>
           </a:p>
         </p:txBody>
@@ -2998,6 +3506,7 @@
           <a:lstStyle xmlns:a="http://schemas.openxmlformats.org/drawingml/2006/main"/>
           <a:p xmlns:a="http://schemas.openxmlformats.org/drawingml/2006/main">
             <a:pPr algn="r">
+              <a:buNone/>
               <a:defRPr sz="750" b="1">
                 <a:solidFill>
                   <a:srgbClr val="53636A"/>
@@ -3090,6 +3599,7 @@
           <a:lstStyle xmlns:a="http://schemas.openxmlformats.org/drawingml/2006/main"/>
           <a:p xmlns:a="http://schemas.openxmlformats.org/drawingml/2006/main">
             <a:pPr>
+              <a:buNone/>
               <a:defRPr sz="900" b="1">
                 <a:solidFill>
                   <a:srgbClr val="C95722"/>
@@ -3133,6 +3643,7 @@
           <a:lstStyle xmlns:a="http://schemas.openxmlformats.org/drawingml/2006/main"/>
           <a:p xmlns:a="http://schemas.openxmlformats.org/drawingml/2006/main">
             <a:pPr algn="l">
+              <a:buNone/>
               <a:defRPr sz="825" b="1">
                 <a:solidFill>
                   <a:srgbClr val="53636A"/>
@@ -3176,6 +3687,7 @@
           <a:lstStyle xmlns:a="http://schemas.openxmlformats.org/drawingml/2006/main"/>
           <a:p xmlns:a="http://schemas.openxmlformats.org/drawingml/2006/main">
             <a:pPr>
+              <a:buNone/>
               <a:defRPr sz="2775" b="1">
                 <a:solidFill>
                   <a:srgbClr val="15252D"/>
@@ -3219,6 +3731,7 @@
           <a:lstStyle xmlns:a="http://schemas.openxmlformats.org/drawingml/2006/main"/>
           <a:p xmlns:a="http://schemas.openxmlformats.org/drawingml/2006/main">
             <a:pPr>
+              <a:buNone/>
               <a:defRPr sz="1125">
                 <a:solidFill>
                   <a:srgbClr val="53636A"/>
@@ -3229,7 +3742,7 @@
               </a:defRPr>
             </a:pPr>
             <a:r>
-              <a:t>Unadjusted patterns are contextual only: no association remains significant after FDR correction.</a:t>
+              <a:t>The 16-episode operational UTI group supports exploratory modelling only; no causal claim is made.</a:t>
             </a:r>
           </a:p>
         </p:txBody>
@@ -3263,18 +3776,18 @@
       </p:sp>
       <p:pic>
         <p:nvPicPr>
-          <p:cNvPr id="7" name=""/>
+          <p:cNvPr id="29" name=""/>
           <p:cNvPicPr>
             <a:picLocks xmlns:a="http://schemas.openxmlformats.org/drawingml/2006/main" noChangeAspect="1"/>
           </p:cNvPicPr>
           <p:nvPr/>
         </p:nvPicPr>
         <p:blipFill>
-          <a:blip xmlns:r="http://schemas.openxmlformats.org/officeDocument/2006/relationships" xmlns:a="http://schemas.openxmlformats.org/drawingml/2006/main" r:embed="R122730f1ab0f401e"/>
+          <a:blip xmlns:r="http://schemas.openxmlformats.org/officeDocument/2006/relationships" xmlns:a="http://schemas.openxmlformats.org/drawingml/2006/main" r:embed="R6bfd0a0abfa74713"/>
           <a:stretch xmlns:a="http://schemas.openxmlformats.org/drawingml/2006/main"/>
         </p:blipFill>
         <p:spPr>
-          <a:xfrm xmlns:a="http://schemas.openxmlformats.org/drawingml/2006/main">
+          <a:xfrm xmlns:a="http://schemas.openxmlformats.org/drawingml/2006/main" flipH="0" flipV="0">
             <a:off x="1206500" y="1518285"/>
             <a:ext cx="7016750" cy="4210050"/>
           </a:xfrm>
@@ -3311,6 +3824,7 @@
           <a:lstStyle xmlns:a="http://schemas.openxmlformats.org/drawingml/2006/main"/>
           <a:p xmlns:a="http://schemas.openxmlformats.org/drawingml/2006/main">
             <a:pPr>
+              <a:buNone/>
               <a:defRPr sz="1125" b="1">
                 <a:solidFill>
                   <a:srgbClr val="D99518"/>
@@ -3354,6 +3868,7 @@
           <a:lstStyle xmlns:a="http://schemas.openxmlformats.org/drawingml/2006/main"/>
           <a:p xmlns:a="http://schemas.openxmlformats.org/drawingml/2006/main">
             <a:pPr>
+              <a:buNone/>
               <a:defRPr sz="750" b="1">
                 <a:solidFill>
                   <a:srgbClr val="53636A"/>
@@ -3413,17 +3928,18 @@
         <p:spPr>
           <a:xfrm xmlns:a="http://schemas.openxmlformats.org/drawingml/2006/main">
             <a:off x="9220200" y="1899285"/>
-            <a:ext cx="313944" cy="537210"/>
-          </a:xfrm>
-          <a:prstGeom xmlns:a="http://schemas.openxmlformats.org/drawingml/2006/main" prst="rect">
-            <a:avLst/>
-          </a:prstGeom>
-        </p:spPr>
-        <p:txBody>
-          <a:bodyPr xmlns:a="http://schemas.openxmlformats.org/drawingml/2006/main" lIns="0" tIns="0" rIns="0" bIns="0"/>
-          <a:lstStyle xmlns:a="http://schemas.openxmlformats.org/drawingml/2006/main"/>
-          <a:p xmlns:a="http://schemas.openxmlformats.org/drawingml/2006/main">
-            <a:pPr>
+            <a:ext cx="952500" cy="552450"/>
+          </a:xfrm>
+          <a:prstGeom xmlns:a="http://schemas.openxmlformats.org/drawingml/2006/main" prst="rect">
+            <a:avLst/>
+          </a:prstGeom>
+        </p:spPr>
+        <p:txBody>
+          <a:bodyPr xmlns:a="http://schemas.openxmlformats.org/drawingml/2006/main" lIns="0" tIns="0" rIns="0" bIns="0"/>
+          <a:lstStyle xmlns:a="http://schemas.openxmlformats.org/drawingml/2006/main"/>
+          <a:p xmlns:a="http://schemas.openxmlformats.org/drawingml/2006/main">
+            <a:pPr>
+              <a:buNone/>
               <a:defRPr sz="3525" b="1">
                 <a:solidFill>
                   <a:srgbClr val="D99518"/>
@@ -3434,7 +3950,15 @@
               </a:defRPr>
             </a:pPr>
             <a:r>
-              <a:t>0</a:t>
+              <a:rPr sz="3225" b="1">
+                <a:solidFill>
+                  <a:srgbClr val="D99518"/>
+                </a:solidFill>
+                <a:latin typeface="Georgia"/>
+                <a:ea typeface="Georgia"/>
+                <a:cs typeface="Georgia"/>
+              </a:rPr>
+              <a:t>16</a:t>
             </a:r>
           </a:p>
         </p:txBody>
@@ -3467,6 +3991,7 @@
           <a:lstStyle xmlns:a="http://schemas.openxmlformats.org/drawingml/2006/main"/>
           <a:p xmlns:a="http://schemas.openxmlformats.org/drawingml/2006/main">
             <a:pPr>
+              <a:buNone/>
               <a:defRPr sz="900" b="1">
                 <a:solidFill>
                   <a:srgbClr val="15252D"/>
@@ -3477,11 +4002,12 @@
               </a:defRPr>
             </a:pPr>
             <a:r>
-              <a:t>FDR-significant global</a:t>
-            </a:r>
-          </a:p>
-          <a:p xmlns:a="http://schemas.openxmlformats.org/drawingml/2006/main">
-            <a:pPr>
+              <a:t>operational UTI episodes</a:t>
+            </a:r>
+          </a:p>
+          <a:p xmlns:a="http://schemas.openxmlformats.org/drawingml/2006/main">
+            <a:pPr>
+              <a:buNone/>
               <a:defRPr sz="900" b="1">
                 <a:solidFill>
                   <a:srgbClr val="15252D"/>
@@ -3492,7 +4018,7 @@
               </a:defRPr>
             </a:pPr>
             <a:r>
-              <a:t>VF associations</a:t>
+              <a:t>in the selected cohort</a:t>
             </a:r>
           </a:p>
         </p:txBody>
@@ -3541,17 +4067,18 @@
         <p:spPr>
           <a:xfrm xmlns:a="http://schemas.openxmlformats.org/drawingml/2006/main">
             <a:off x="9220200" y="3137535"/>
-            <a:ext cx="278416" cy="320040"/>
-          </a:xfrm>
-          <a:prstGeom xmlns:a="http://schemas.openxmlformats.org/drawingml/2006/main" prst="rect">
-            <a:avLst/>
-          </a:prstGeom>
-        </p:spPr>
-        <p:txBody>
-          <a:bodyPr xmlns:a="http://schemas.openxmlformats.org/drawingml/2006/main" lIns="0" tIns="0" rIns="0" bIns="0"/>
-          <a:lstStyle xmlns:a="http://schemas.openxmlformats.org/drawingml/2006/main"/>
-          <a:p xmlns:a="http://schemas.openxmlformats.org/drawingml/2006/main">
-            <a:pPr>
+            <a:ext cx="952500" cy="320040"/>
+          </a:xfrm>
+          <a:prstGeom xmlns:a="http://schemas.openxmlformats.org/drawingml/2006/main" prst="rect">
+            <a:avLst/>
+          </a:prstGeom>
+        </p:spPr>
+        <p:txBody>
+          <a:bodyPr xmlns:a="http://schemas.openxmlformats.org/drawingml/2006/main" lIns="0" tIns="0" rIns="0" bIns="0"/>
+          <a:lstStyle xmlns:a="http://schemas.openxmlformats.org/drawingml/2006/main"/>
+          <a:p xmlns:a="http://schemas.openxmlformats.org/drawingml/2006/main">
+            <a:pPr>
+              <a:buNone/>
               <a:defRPr sz="2100" b="1">
                 <a:solidFill>
                   <a:srgbClr val="C95722"/>
@@ -3562,7 +4089,7 @@
               </a:defRPr>
             </a:pPr>
             <a:r>
-              <a:t>17</a:t>
+              <a:t>532</a:t>
             </a:r>
           </a:p>
         </p:txBody>
@@ -3595,6 +4122,7 @@
           <a:lstStyle xmlns:a="http://schemas.openxmlformats.org/drawingml/2006/main"/>
           <a:p xmlns:a="http://schemas.openxmlformats.org/drawingml/2006/main">
             <a:pPr>
+              <a:buNone/>
               <a:defRPr sz="900" b="1">
                 <a:solidFill>
                   <a:srgbClr val="15252D"/>
@@ -3605,7 +4133,7 @@
               </a:defRPr>
             </a:pPr>
             <a:r>
-              <a:t>VF-ready UTI episodes</a:t>
+              <a:t>selected Longcycler-linked episodes</a:t>
             </a:r>
           </a:p>
         </p:txBody>
@@ -3665,6 +4193,7 @@
           <a:lstStyle xmlns:a="http://schemas.openxmlformats.org/drawingml/2006/main"/>
           <a:p xmlns:a="http://schemas.openxmlformats.org/drawingml/2006/main">
             <a:pPr>
+              <a:buNone/>
               <a:defRPr sz="1050" b="1">
                 <a:solidFill>
                   <a:srgbClr val="78889A"/>
@@ -3708,6 +4237,7 @@
           <a:lstStyle xmlns:a="http://schemas.openxmlformats.org/drawingml/2006/main"/>
           <a:p xmlns:a="http://schemas.openxmlformats.org/drawingml/2006/main">
             <a:pPr>
+              <a:buNone/>
               <a:defRPr sz="900">
                 <a:solidFill>
                   <a:srgbClr val="15252D"/>
@@ -3718,7 +4248,7 @@
               </a:defRPr>
             </a:pPr>
             <a:r>
-              <a:t>Do not revive older ASB/UTI or significant lpf narratives as current conclusions.</a:t>
+              <a:t>Do not promote exploratory VF screens, named mutations or AMR context to causal conclusions.</a:t>
             </a:r>
           </a:p>
         </p:txBody>
@@ -3784,6 +4314,7 @@
           <a:lstStyle xmlns:a="http://schemas.openxmlformats.org/drawingml/2006/main"/>
           <a:p xmlns:a="http://schemas.openxmlformats.org/drawingml/2006/main">
             <a:pPr>
+              <a:buNone/>
               <a:defRPr sz="675">
                 <a:solidFill>
                   <a:srgbClr val="53636A"/>
@@ -3794,7 +4325,7 @@
               </a:defRPr>
             </a:pPr>
             <a:r>
-              <a:t>Source: Main Figure 4; final_figure_captions.md (exploratory; sparse UTI denominator)</a:t>
+              <a:t>Source: current final-run VF robustness figure; operational phenotype</a:t>
             </a:r>
           </a:p>
         </p:txBody>
@@ -3827,6 +4358,7 @@
           <a:lstStyle xmlns:a="http://schemas.openxmlformats.org/drawingml/2006/main"/>
           <a:p xmlns:a="http://schemas.openxmlformats.org/drawingml/2006/main">
             <a:pPr algn="r">
+              <a:buNone/>
               <a:defRPr sz="750" b="1">
                 <a:solidFill>
                   <a:srgbClr val="53636A"/>
@@ -3919,6 +4451,7 @@
           <a:lstStyle xmlns:a="http://schemas.openxmlformats.org/drawingml/2006/main"/>
           <a:p xmlns:a="http://schemas.openxmlformats.org/drawingml/2006/main">
             <a:pPr>
+              <a:buNone/>
               <a:defRPr sz="900" b="1">
                 <a:solidFill>
                   <a:srgbClr val="C95722"/>
@@ -3962,6 +4495,7 @@
           <a:lstStyle xmlns:a="http://schemas.openxmlformats.org/drawingml/2006/main"/>
           <a:p xmlns:a="http://schemas.openxmlformats.org/drawingml/2006/main">
             <a:pPr algn="l">
+              <a:buNone/>
               <a:defRPr sz="825" b="1">
                 <a:solidFill>
                   <a:srgbClr val="53636A"/>
@@ -4005,6 +4539,7 @@
           <a:lstStyle xmlns:a="http://schemas.openxmlformats.org/drawingml/2006/main"/>
           <a:p xmlns:a="http://schemas.openxmlformats.org/drawingml/2006/main">
             <a:pPr>
+              <a:buNone/>
               <a:defRPr sz="2775" b="1">
                 <a:solidFill>
                   <a:srgbClr val="15252D"/>
@@ -4015,7 +4550,7 @@
               </a:defRPr>
             </a:pPr>
             <a:r>
-              <a:t>Five output families locate the evidence; five scripts regenerate it.</a:t>
+              <a:t>One claim registry locates the evidence; the complete runner regenerates RQ01-RQ10.</a:t>
             </a:r>
           </a:p>
         </p:txBody>
@@ -4048,6 +4583,7 @@
           <a:lstStyle xmlns:a="http://schemas.openxmlformats.org/drawingml/2006/main"/>
           <a:p xmlns:a="http://schemas.openxmlformats.org/drawingml/2006/main">
             <a:pPr>
+              <a:buNone/>
               <a:defRPr sz="1125">
                 <a:solidFill>
                   <a:srgbClr val="53636A"/>
@@ -4058,7 +4594,7 @@
               </a:defRPr>
             </a:pPr>
             <a:r>
-              <a:t>A new colleague can start with the interpretation, then trace every figure to its data product.</a:t>
+              <a:t>532 episodes | 893 direct pairs | 371 adjacent pairs from 139 residents | 17 near-miss rows</a:t>
             </a:r>
           </a:p>
         </p:txBody>
@@ -4120,6 +4656,7 @@
           <a:lstStyle xmlns:a="http://schemas.openxmlformats.org/drawingml/2006/main"/>
           <a:p xmlns:a="http://schemas.openxmlformats.org/drawingml/2006/main">
             <a:pPr algn="ctr">
+              <a:buNone/>
               <a:defRPr sz="675" b="1">
                 <a:solidFill>
                   <a:srgbClr val="FFFFFF"/>
@@ -4163,6 +4700,7 @@
           <a:lstStyle xmlns:a="http://schemas.openxmlformats.org/drawingml/2006/main"/>
           <a:p xmlns:a="http://schemas.openxmlformats.org/drawingml/2006/main">
             <a:pPr>
+              <a:buNone/>
               <a:defRPr sz="1725" b="1">
                 <a:solidFill>
                   <a:srgbClr val="C95722"/>
@@ -4206,6 +4744,7 @@
           <a:lstStyle xmlns:a="http://schemas.openxmlformats.org/drawingml/2006/main"/>
           <a:p xmlns:a="http://schemas.openxmlformats.org/drawingml/2006/main">
             <a:pPr>
+              <a:buNone/>
               <a:defRPr sz="900" b="1">
                 <a:solidFill>
                   <a:srgbClr val="15252D"/>
@@ -4249,6 +4788,7 @@
           <a:lstStyle xmlns:a="http://schemas.openxmlformats.org/drawingml/2006/main"/>
           <a:p xmlns:a="http://schemas.openxmlformats.org/drawingml/2006/main">
             <a:pPr>
+              <a:buNone/>
               <a:defRPr sz="675">
                 <a:solidFill>
                   <a:srgbClr val="53636A"/>
@@ -4259,7 +4799,7 @@
               </a:defRPr>
             </a:pPr>
             <a:r>
-              <a:t>results/summary/final_key_results_summary.md</a:t>
+              <a:t>results/pipeline/longcycler_release_claim_registry.json</a:t>
             </a:r>
           </a:p>
         </p:txBody>
@@ -4292,6 +4832,7 @@
           <a:lstStyle xmlns:a="http://schemas.openxmlformats.org/drawingml/2006/main"/>
           <a:p xmlns:a="http://schemas.openxmlformats.org/drawingml/2006/main">
             <a:pPr>
+              <a:buNone/>
               <a:defRPr sz="1725" b="1">
                 <a:solidFill>
                   <a:srgbClr val="C95722"/>
@@ -4335,6 +4876,7 @@
           <a:lstStyle xmlns:a="http://schemas.openxmlformats.org/drawingml/2006/main"/>
           <a:p xmlns:a="http://schemas.openxmlformats.org/drawingml/2006/main">
             <a:pPr>
+              <a:buNone/>
               <a:defRPr sz="900" b="1">
                 <a:solidFill>
                   <a:srgbClr val="15252D"/>
@@ -4345,7 +4887,7 @@
               </a:defRPr>
             </a:pPr>
             <a:r>
-              <a:t>Figure captions + limits</a:t>
+              <a:t>RQ release marker</a:t>
             </a:r>
           </a:p>
         </p:txBody>
@@ -4378,6 +4920,7 @@
           <a:lstStyle xmlns:a="http://schemas.openxmlformats.org/drawingml/2006/main"/>
           <a:p xmlns:a="http://schemas.openxmlformats.org/drawingml/2006/main">
             <a:pPr>
+              <a:buNone/>
               <a:defRPr sz="675">
                 <a:solidFill>
                   <a:srgbClr val="53636A"/>
@@ -4388,7 +4931,7 @@
               </a:defRPr>
             </a:pPr>
             <a:r>
-              <a:t>results/final_figures/final_figure_captions.md</a:t>
+              <a:t>results/research_questions/RUN_COMPLETE.txt</a:t>
             </a:r>
           </a:p>
         </p:txBody>
@@ -4421,6 +4964,7 @@
           <a:lstStyle xmlns:a="http://schemas.openxmlformats.org/drawingml/2006/main"/>
           <a:p xmlns:a="http://schemas.openxmlformats.org/drawingml/2006/main">
             <a:pPr>
+              <a:buNone/>
               <a:defRPr sz="1725" b="1">
                 <a:solidFill>
                   <a:srgbClr val="C95722"/>
@@ -4464,6 +5008,7 @@
           <a:lstStyle xmlns:a="http://schemas.openxmlformats.org/drawingml/2006/main"/>
           <a:p xmlns:a="http://schemas.openxmlformats.org/drawingml/2006/main">
             <a:pPr>
+              <a:buNone/>
               <a:defRPr sz="900" b="1">
                 <a:solidFill>
                   <a:srgbClr val="15252D"/>
@@ -4474,7 +5019,7 @@
               </a:defRPr>
             </a:pPr>
             <a:r>
-              <a:t>Validated figure inventory</a:t>
+              <a:t>Direct-pair evidence</a:t>
             </a:r>
           </a:p>
         </p:txBody>
@@ -4507,6 +5052,7 @@
           <a:lstStyle xmlns:a="http://schemas.openxmlformats.org/drawingml/2006/main"/>
           <a:p xmlns:a="http://schemas.openxmlformats.org/drawingml/2006/main">
             <a:pPr>
+              <a:buNone/>
               <a:defRPr sz="675">
                 <a:solidFill>
                   <a:srgbClr val="53636A"/>
@@ -4517,7 +5063,7 @@
               </a:defRPr>
             </a:pPr>
             <a:r>
-              <a:t>results/final_figures/final_figure_manifest.csv</a:t>
+              <a:t>results/strain_compare/pairwise_metrics.csv</a:t>
             </a:r>
           </a:p>
         </p:txBody>
@@ -4550,6 +5096,7 @@
           <a:lstStyle xmlns:a="http://schemas.openxmlformats.org/drawingml/2006/main"/>
           <a:p xmlns:a="http://schemas.openxmlformats.org/drawingml/2006/main">
             <a:pPr>
+              <a:buNone/>
               <a:defRPr sz="1725" b="1">
                 <a:solidFill>
                   <a:srgbClr val="2F8A61"/>
@@ -4593,6 +5140,7 @@
           <a:lstStyle xmlns:a="http://schemas.openxmlformats.org/drawingml/2006/main"/>
           <a:p xmlns:a="http://schemas.openxmlformats.org/drawingml/2006/main">
             <a:pPr>
+              <a:buNone/>
               <a:defRPr sz="900" b="1">
                 <a:solidFill>
                   <a:srgbClr val="15252D"/>
@@ -4636,6 +5184,7 @@
           <a:lstStyle xmlns:a="http://schemas.openxmlformats.org/drawingml/2006/main"/>
           <a:p xmlns:a="http://schemas.openxmlformats.org/drawingml/2006/main">
             <a:pPr>
+              <a:buNone/>
               <a:defRPr sz="675">
                 <a:solidFill>
                   <a:srgbClr val="53636A"/>
@@ -4646,7 +5195,7 @@
               </a:defRPr>
             </a:pPr>
             <a:r>
-              <a:t>results/mechanism/not_uti_to_uti_casebook.md</a:t>
+              <a:t>results/mechanism/not_uti_to_uti_casebook.csv</a:t>
             </a:r>
           </a:p>
         </p:txBody>
@@ -4708,6 +5257,7 @@
           <a:lstStyle xmlns:a="http://schemas.openxmlformats.org/drawingml/2006/main"/>
           <a:p xmlns:a="http://schemas.openxmlformats.org/drawingml/2006/main">
             <a:pPr algn="ctr">
+              <a:buNone/>
               <a:defRPr sz="675" b="1">
                 <a:solidFill>
                   <a:srgbClr val="FFFFFF"/>
@@ -4751,6 +5301,7 @@
           <a:lstStyle xmlns:a="http://schemas.openxmlformats.org/drawingml/2006/main"/>
           <a:p xmlns:a="http://schemas.openxmlformats.org/drawingml/2006/main">
             <a:pPr>
+              <a:buNone/>
               <a:defRPr sz="1725" b="1">
                 <a:solidFill>
                   <a:srgbClr val="176C96"/>
@@ -4794,6 +5345,7 @@
           <a:lstStyle xmlns:a="http://schemas.openxmlformats.org/drawingml/2006/main"/>
           <a:p xmlns:a="http://schemas.openxmlformats.org/drawingml/2006/main">
             <a:pPr>
+              <a:buNone/>
               <a:defRPr sz="900" b="1">
                 <a:solidFill>
                   <a:srgbClr val="15252D"/>
@@ -4837,6 +5389,7 @@
           <a:lstStyle xmlns:a="http://schemas.openxmlformats.org/drawingml/2006/main"/>
           <a:p xmlns:a="http://schemas.openxmlformats.org/drawingml/2006/main">
             <a:pPr>
+              <a:buNone/>
               <a:defRPr sz="675">
                 <a:solidFill>
                   <a:srgbClr val="53636A"/>
@@ -4847,7 +5400,7 @@
               </a:defRPr>
             </a:pPr>
             <a:r>
-              <a:t>results/clinical/status_map.csv</a:t>
+              <a:t>results/clinical/analysis_cohort_longcycler.csv</a:t>
             </a:r>
           </a:p>
         </p:txBody>
@@ -4880,6 +5433,7 @@
           <a:lstStyle xmlns:a="http://schemas.openxmlformats.org/drawingml/2006/main"/>
           <a:p xmlns:a="http://schemas.openxmlformats.org/drawingml/2006/main">
             <a:pPr>
+              <a:buNone/>
               <a:defRPr sz="1725" b="1">
                 <a:solidFill>
                   <a:srgbClr val="176C96"/>
@@ -4923,6 +5477,7 @@
           <a:lstStyle xmlns:a="http://schemas.openxmlformats.org/drawingml/2006/main"/>
           <a:p xmlns:a="http://schemas.openxmlformats.org/drawingml/2006/main">
             <a:pPr>
+              <a:buNone/>
               <a:defRPr sz="900" b="1">
                 <a:solidFill>
                   <a:srgbClr val="15252D"/>
@@ -4933,7 +5488,7 @@
               </a:defRPr>
             </a:pPr>
             <a:r>
-              <a:t>VF analysis cohort</a:t>
+              <a:t>Genome manifest</a:t>
             </a:r>
           </a:p>
         </p:txBody>
@@ -4966,6 +5521,7 @@
           <a:lstStyle xmlns:a="http://schemas.openxmlformats.org/drawingml/2006/main"/>
           <a:p xmlns:a="http://schemas.openxmlformats.org/drawingml/2006/main">
             <a:pPr>
+              <a:buNone/>
               <a:defRPr sz="675">
                 <a:solidFill>
                   <a:srgbClr val="53636A"/>
@@ -4976,7 +5532,7 @@
               </a:defRPr>
             </a:pPr>
             <a:r>
-              <a:t>results/vf/vf_analysis_ready.csv</a:t>
+              <a:t>results/qc/analysis_assembly_manifest.csv</a:t>
             </a:r>
           </a:p>
         </p:txBody>
@@ -5009,6 +5565,7 @@
           <a:lstStyle xmlns:a="http://schemas.openxmlformats.org/drawingml/2006/main"/>
           <a:p xmlns:a="http://schemas.openxmlformats.org/drawingml/2006/main">
             <a:pPr>
+              <a:buNone/>
               <a:defRPr sz="1725" b="1">
                 <a:solidFill>
                   <a:srgbClr val="176C96"/>
@@ -5052,6 +5609,7 @@
           <a:lstStyle xmlns:a="http://schemas.openxmlformats.org/drawingml/2006/main"/>
           <a:p xmlns:a="http://schemas.openxmlformats.org/drawingml/2006/main">
             <a:pPr>
+              <a:buNone/>
               <a:defRPr sz="900" b="1">
                 <a:solidFill>
                   <a:srgbClr val="15252D"/>
@@ -5062,7 +5620,7 @@
               </a:defRPr>
             </a:pPr>
             <a:r>
-              <a:t>Pipeline explanation</a:t>
+              <a:t>Complete runner</a:t>
             </a:r>
           </a:p>
         </p:txBody>
@@ -5095,6 +5653,7 @@
           <a:lstStyle xmlns:a="http://schemas.openxmlformats.org/drawingml/2006/main"/>
           <a:p xmlns:a="http://schemas.openxmlformats.org/drawingml/2006/main">
             <a:pPr>
+              <a:buNone/>
               <a:defRPr sz="675">
                 <a:solidFill>
                   <a:srgbClr val="53636A"/>
@@ -5105,7 +5664,7 @@
               </a:defRPr>
             </a:pPr>
             <a:r>
-              <a:t>docs/pipeline_architecture.md</a:t>
+              <a:t>RUN_COMPLETE_ANALYSIS.sh</a:t>
             </a:r>
           </a:p>
         </p:txBody>
@@ -5138,6 +5697,7 @@
           <a:lstStyle xmlns:a="http://schemas.openxmlformats.org/drawingml/2006/main"/>
           <a:p xmlns:a="http://schemas.openxmlformats.org/drawingml/2006/main">
             <a:pPr>
+              <a:buNone/>
               <a:defRPr sz="1725" b="1">
                 <a:solidFill>
                   <a:srgbClr val="2F8A61"/>
@@ -5181,6 +5741,7 @@
           <a:lstStyle xmlns:a="http://schemas.openxmlformats.org/drawingml/2006/main"/>
           <a:p xmlns:a="http://schemas.openxmlformats.org/drawingml/2006/main">
             <a:pPr>
+              <a:buNone/>
               <a:defRPr sz="900" b="1">
                 <a:solidFill>
                   <a:srgbClr val="15252D"/>
@@ -5191,7 +5752,7 @@
               </a:defRPr>
             </a:pPr>
             <a:r>
-              <a:t>Final figure script</a:t>
+              <a:t>RQ01-RQ10 runner</a:t>
             </a:r>
           </a:p>
         </p:txBody>
@@ -5224,6 +5785,7 @@
           <a:lstStyle xmlns:a="http://schemas.openxmlformats.org/drawingml/2006/main"/>
           <a:p xmlns:a="http://schemas.openxmlformats.org/drawingml/2006/main">
             <a:pPr>
+              <a:buNone/>
               <a:defRPr sz="675">
                 <a:solidFill>
                   <a:srgbClr val="53636A"/>
@@ -5234,7 +5796,7 @@
               </a:defRPr>
             </a:pPr>
             <a:r>
-              <a:t>35_final_figure_pack.R</a:t>
+              <a:t>scripts/research_questions/run_all.R</a:t>
             </a:r>
           </a:p>
         </p:txBody>
@@ -5267,6 +5829,7 @@
           <a:lstStyle xmlns:a="http://schemas.openxmlformats.org/drawingml/2006/main"/>
           <a:p xmlns:a="http://schemas.openxmlformats.org/drawingml/2006/main">
             <a:pPr>
+              <a:buNone/>
               <a:defRPr sz="750" b="1">
                 <a:solidFill>
                   <a:srgbClr val="C95722"/>
@@ -5370,6 +5933,7 @@
           <a:lstStyle xmlns:a="http://schemas.openxmlformats.org/drawingml/2006/main"/>
           <a:p xmlns:a="http://schemas.openxmlformats.org/drawingml/2006/main">
             <a:pPr>
+              <a:buNone/>
               <a:defRPr sz="675" b="1">
                 <a:solidFill>
                   <a:srgbClr val="53636A"/>
@@ -5380,7 +5944,7 @@
               </a:defRPr>
             </a:pPr>
             <a:r>
-              <a:t>CLASSIFY</a:t>
+              <a:t>SELECT COHORT</a:t>
             </a:r>
           </a:p>
         </p:txBody>
@@ -5413,6 +5977,7 @@
           <a:lstStyle xmlns:a="http://schemas.openxmlformats.org/drawingml/2006/main"/>
           <a:p xmlns:a="http://schemas.openxmlformats.org/drawingml/2006/main">
             <a:pPr>
+              <a:buNone/>
               <a:defRPr sz="600">
                 <a:solidFill>
                   <a:srgbClr val="15252D"/>
@@ -5423,7 +5988,7 @@
               </a:defRPr>
             </a:pPr>
             <a:r>
-              <a:t>00b_classify_episodes.R</a:t>
+              <a:t>analysis_cohort_longcycler.csv</a:t>
             </a:r>
           </a:p>
         </p:txBody>
@@ -5456,6 +6021,7 @@
           <a:lstStyle xmlns:a="http://schemas.openxmlformats.org/drawingml/2006/main"/>
           <a:p xmlns:a="http://schemas.openxmlformats.org/drawingml/2006/main">
             <a:pPr algn="ctr">
+              <a:buNone/>
               <a:defRPr sz="1575" b="1">
                 <a:solidFill>
                   <a:srgbClr val="53636A"/>
@@ -5526,6 +6092,7 @@
           <a:lstStyle xmlns:a="http://schemas.openxmlformats.org/drawingml/2006/main"/>
           <a:p xmlns:a="http://schemas.openxmlformats.org/drawingml/2006/main">
             <a:pPr>
+              <a:buNone/>
               <a:defRPr sz="675" b="1">
                 <a:solidFill>
                   <a:srgbClr val="53636A"/>
@@ -5536,7 +6103,7 @@
               </a:defRPr>
             </a:pPr>
             <a:r>
-              <a:t>BUILD VF COHORT</a:t>
+              <a:t>DIRECT EVIDENCE</a:t>
             </a:r>
           </a:p>
         </p:txBody>
@@ -5569,6 +6136,7 @@
           <a:lstStyle xmlns:a="http://schemas.openxmlformats.org/drawingml/2006/main"/>
           <a:p xmlns:a="http://schemas.openxmlformats.org/drawingml/2006/main">
             <a:pPr>
+              <a:buNone/>
               <a:defRPr sz="600">
                 <a:solidFill>
                   <a:srgbClr val="15252D"/>
@@ -5579,7 +6147,7 @@
               </a:defRPr>
             </a:pPr>
             <a:r>
-              <a:t>22_vf_build_analysis_dataset.R</a:t>
+              <a:t>pairwise_metrics.csv</a:t>
             </a:r>
           </a:p>
         </p:txBody>
@@ -5612,6 +6180,7 @@
           <a:lstStyle xmlns:a="http://schemas.openxmlformats.org/drawingml/2006/main"/>
           <a:p xmlns:a="http://schemas.openxmlformats.org/drawingml/2006/main">
             <a:pPr algn="ctr">
+              <a:buNone/>
               <a:defRPr sz="1575" b="1">
                 <a:solidFill>
                   <a:srgbClr val="53636A"/>
@@ -5682,6 +6251,7 @@
           <a:lstStyle xmlns:a="http://schemas.openxmlformats.org/drawingml/2006/main"/>
           <a:p xmlns:a="http://schemas.openxmlformats.org/drawingml/2006/main">
             <a:pPr>
+              <a:buNone/>
               <a:defRPr sz="675" b="1">
                 <a:solidFill>
                   <a:srgbClr val="53636A"/>
@@ -5692,7 +6262,7 @@
               </a:defRPr>
             </a:pPr>
             <a:r>
-              <a:t>MECHANISMS</a:t>
+              <a:t>TRANSITIONS</a:t>
             </a:r>
           </a:p>
         </p:txBody>
@@ -5725,6 +6295,7 @@
           <a:lstStyle xmlns:a="http://schemas.openxmlformats.org/drawingml/2006/main"/>
           <a:p xmlns:a="http://schemas.openxmlformats.org/drawingml/2006/main">
             <a:pPr>
+              <a:buNone/>
               <a:defRPr sz="600">
                 <a:solidFill>
                   <a:srgbClr val="15252D"/>
@@ -5735,7 +6306,7 @@
               </a:defRPr>
             </a:pPr>
             <a:r>
-              <a:t>33_mechanism_first_addon.R</a:t>
+              <a:t>longcycler_transitions.csv</a:t>
             </a:r>
           </a:p>
         </p:txBody>
@@ -5768,6 +6339,7 @@
           <a:lstStyle xmlns:a="http://schemas.openxmlformats.org/drawingml/2006/main"/>
           <a:p xmlns:a="http://schemas.openxmlformats.org/drawingml/2006/main">
             <a:pPr algn="ctr">
+              <a:buNone/>
               <a:defRPr sz="1575" b="1">
                 <a:solidFill>
                   <a:srgbClr val="53636A"/>
@@ -5838,6 +6410,7 @@
           <a:lstStyle xmlns:a="http://schemas.openxmlformats.org/drawingml/2006/main"/>
           <a:p xmlns:a="http://schemas.openxmlformats.org/drawingml/2006/main">
             <a:pPr>
+              <a:buNone/>
               <a:defRPr sz="675" b="1">
                 <a:solidFill>
                   <a:srgbClr val="53636A"/>
@@ -5848,7 +6421,7 @@
               </a:defRPr>
             </a:pPr>
             <a:r>
-              <a:t>ROBUSTNESS</a:t>
+              <a:t>RQ01-RQ10</a:t>
             </a:r>
           </a:p>
         </p:txBody>
@@ -5881,6 +6454,7 @@
           <a:lstStyle xmlns:a="http://schemas.openxmlformats.org/drawingml/2006/main"/>
           <a:p xmlns:a="http://schemas.openxmlformats.org/drawingml/2006/main">
             <a:pPr>
+              <a:buNone/>
               <a:defRPr sz="600">
                 <a:solidFill>
                   <a:srgbClr val="15252D"/>
@@ -5891,7 +6465,7 @@
               </a:defRPr>
             </a:pPr>
             <a:r>
-              <a:t>34_robustness_first_addon.R</a:t>
+              <a:t>scripts/research_questions/run_all.R</a:t>
             </a:r>
           </a:p>
         </p:txBody>
@@ -5924,6 +6498,7 @@
           <a:lstStyle xmlns:a="http://schemas.openxmlformats.org/drawingml/2006/main"/>
           <a:p xmlns:a="http://schemas.openxmlformats.org/drawingml/2006/main">
             <a:pPr algn="ctr">
+              <a:buNone/>
               <a:defRPr sz="1575" b="1">
                 <a:solidFill>
                   <a:srgbClr val="53636A"/>
@@ -5994,6 +6569,7 @@
           <a:lstStyle xmlns:a="http://schemas.openxmlformats.org/drawingml/2006/main"/>
           <a:p xmlns:a="http://schemas.openxmlformats.org/drawingml/2006/main">
             <a:pPr>
+              <a:buNone/>
               <a:defRPr sz="675" b="1">
                 <a:solidFill>
                   <a:srgbClr val="53636A"/>
@@ -6004,7 +6580,7 @@
               </a:defRPr>
             </a:pPr>
             <a:r>
-              <a:t>FIGURES</a:t>
+              <a:t>RELEASE</a:t>
             </a:r>
           </a:p>
         </p:txBody>
@@ -6037,6 +6613,7 @@
           <a:lstStyle xmlns:a="http://schemas.openxmlformats.org/drawingml/2006/main"/>
           <a:p xmlns:a="http://schemas.openxmlformats.org/drawingml/2006/main">
             <a:pPr>
+              <a:buNone/>
               <a:defRPr sz="600">
                 <a:solidFill>
                   <a:srgbClr val="15252D"/>
@@ -6047,7 +6624,7 @@
               </a:defRPr>
             </a:pPr>
             <a:r>
-              <a:t>35_final_figure_pack.R</a:t>
+              <a:t>RUN_COMPLETE_ANALYSIS.sh</a:t>
             </a:r>
           </a:p>
         </p:txBody>
@@ -6113,6 +6690,7 @@
           <a:lstStyle xmlns:a="http://schemas.openxmlformats.org/drawingml/2006/main"/>
           <a:p xmlns:a="http://schemas.openxmlformats.org/drawingml/2006/main">
             <a:pPr>
+              <a:buNone/>
               <a:defRPr sz="675">
                 <a:solidFill>
                   <a:srgbClr val="53636A"/>
@@ -6123,7 +6701,7 @@
               </a:defRPr>
             </a:pPr>
             <a:r>
-              <a:t>Canonical paths verified in workspace on 26 May 2026</a:t>
+              <a:t>Canonical release paths are verified before deck generation</a:t>
             </a:r>
           </a:p>
         </p:txBody>
@@ -6156,6 +6734,7 @@
           <a:lstStyle xmlns:a="http://schemas.openxmlformats.org/drawingml/2006/main"/>
           <a:p xmlns:a="http://schemas.openxmlformats.org/drawingml/2006/main">
             <a:pPr algn="r">
+              <a:buNone/>
               <a:defRPr sz="750" b="1">
                 <a:solidFill>
                   <a:srgbClr val="53636A"/>
@@ -6248,6 +6827,7 @@
           <a:lstStyle xmlns:a="http://schemas.openxmlformats.org/drawingml/2006/main"/>
           <a:p xmlns:a="http://schemas.openxmlformats.org/drawingml/2006/main">
             <a:pPr>
+              <a:buNone/>
               <a:defRPr sz="900" b="1">
                 <a:solidFill>
                   <a:srgbClr val="C95722"/>
@@ -6291,6 +6871,7 @@
           <a:lstStyle xmlns:a="http://schemas.openxmlformats.org/drawingml/2006/main"/>
           <a:p xmlns:a="http://schemas.openxmlformats.org/drawingml/2006/main">
             <a:pPr algn="l">
+              <a:buNone/>
               <a:defRPr sz="825" b="1">
                 <a:solidFill>
                   <a:srgbClr val="D8D2C8"/>
@@ -6334,6 +6915,7 @@
           <a:lstStyle xmlns:a="http://schemas.openxmlformats.org/drawingml/2006/main"/>
           <a:p xmlns:a="http://schemas.openxmlformats.org/drawingml/2006/main">
             <a:pPr>
+              <a:buNone/>
               <a:defRPr sz="2775" b="1">
                 <a:solidFill>
                   <a:srgbClr val="FFFFFF"/>
@@ -6344,7 +6926,7 @@
               </a:defRPr>
             </a:pPr>
             <a:r>
-              <a:t>The next question is what triggers symptoms in a persisting strain.</a:t>
+              <a:t>The next question is what distinguishes close direct pairs from clinical symptom emergence.</a:t>
             </a:r>
           </a:p>
         </p:txBody>
@@ -6377,6 +6959,7 @@
           <a:lstStyle xmlns:a="http://schemas.openxmlformats.org/drawingml/2006/main"/>
           <a:p xmlns:a="http://schemas.openxmlformats.org/drawingml/2006/main">
             <a:pPr>
+              <a:buNone/>
               <a:defRPr sz="1125">
                 <a:solidFill>
                   <a:srgbClr val="C7CFD0"/>
@@ -6476,6 +7059,7 @@
           <a:lstStyle xmlns:a="http://schemas.openxmlformats.org/drawingml/2006/main"/>
           <a:p xmlns:a="http://schemas.openxmlformats.org/drawingml/2006/main">
             <a:pPr algn="ctr">
+              <a:buNone/>
               <a:defRPr sz="675" b="1">
                 <a:solidFill>
                   <a:srgbClr val="FFFFFF"/>
@@ -6519,6 +7103,7 @@
           <a:lstStyle xmlns:a="http://schemas.openxmlformats.org/drawingml/2006/main"/>
           <a:p xmlns:a="http://schemas.openxmlformats.org/drawingml/2006/main">
             <a:pPr>
+              <a:buNone/>
               <a:defRPr sz="2025" b="1">
                 <a:solidFill>
                   <a:srgbClr val="15252D"/>
@@ -6529,7 +7114,7 @@
               </a:defRPr>
             </a:pPr>
             <a:r>
-              <a:t>4 stable-profile transitions</a:t>
+              <a:t>5 focused pairs &lt;=25 SNPs</a:t>
             </a:r>
           </a:p>
         </p:txBody>
@@ -6562,6 +7147,7 @@
           <a:lstStyle xmlns:a="http://schemas.openxmlformats.org/drawingml/2006/main"/>
           <a:p xmlns:a="http://schemas.openxmlformats.org/drawingml/2006/main">
             <a:pPr>
+              <a:buNone/>
               <a:defRPr sz="975">
                 <a:solidFill>
                   <a:srgbClr val="15252D"/>
@@ -6572,7 +7158,7 @@
               </a:defRPr>
             </a:pPr>
             <a:r>
-              <a:t>Same-strain evidence makes symptom emergence without measured acquisition a real, testable pattern.</a:t>
+              <a:t>Close direct pairs make host-state and regulation hypotheses testable without proving mechanism.</a:t>
             </a:r>
           </a:p>
         </p:txBody>
@@ -6661,6 +7247,7 @@
           <a:lstStyle xmlns:a="http://schemas.openxmlformats.org/drawingml/2006/main"/>
           <a:p xmlns:a="http://schemas.openxmlformats.org/drawingml/2006/main">
             <a:pPr algn="ctr">
+              <a:buNone/>
               <a:defRPr sz="675" b="1">
                 <a:solidFill>
                   <a:srgbClr val="FFFFFF"/>
@@ -6704,6 +7291,7 @@
           <a:lstStyle xmlns:a="http://schemas.openxmlformats.org/drawingml/2006/main"/>
           <a:p xmlns:a="http://schemas.openxmlformats.org/drawingml/2006/main">
             <a:pPr>
+              <a:buNone/>
               <a:defRPr sz="2025" b="1">
                 <a:solidFill>
                   <a:srgbClr val="15252D"/>
@@ -6714,7 +7302,7 @@
               </a:defRPr>
             </a:pPr>
             <a:r>
-              <a:t>17 UTI genomic episodes</a:t>
+              <a:t>16 operational UTI episodes</a:t>
             </a:r>
           </a:p>
         </p:txBody>
@@ -6747,6 +7335,7 @@
           <a:lstStyle xmlns:a="http://schemas.openxmlformats.org/drawingml/2006/main"/>
           <a:p xmlns:a="http://schemas.openxmlformats.org/drawingml/2006/main">
             <a:pPr>
+              <a:buNone/>
               <a:defRPr sz="975">
                 <a:solidFill>
                   <a:srgbClr val="15252D"/>
@@ -6846,6 +7435,7 @@
           <a:lstStyle xmlns:a="http://schemas.openxmlformats.org/drawingml/2006/main"/>
           <a:p xmlns:a="http://schemas.openxmlformats.org/drawingml/2006/main">
             <a:pPr algn="ctr">
+              <a:buNone/>
               <a:defRPr sz="675" b="1">
                 <a:solidFill>
                   <a:srgbClr val="FFFFFF"/>
@@ -6889,6 +7479,7 @@
           <a:lstStyle xmlns:a="http://schemas.openxmlformats.org/drawingml/2006/main"/>
           <a:p xmlns:a="http://schemas.openxmlformats.org/drawingml/2006/main">
             <a:pPr>
+              <a:buNone/>
               <a:defRPr sz="2025" b="1">
                 <a:solidFill>
                   <a:srgbClr val="15252D"/>
@@ -6932,6 +7523,7 @@
           <a:lstStyle xmlns:a="http://schemas.openxmlformats.org/drawingml/2006/main"/>
           <a:p xmlns:a="http://schemas.openxmlformats.org/drawingml/2006/main">
             <a:pPr>
+              <a:buNone/>
               <a:defRPr sz="975">
                 <a:solidFill>
                   <a:srgbClr val="15252D"/>
@@ -7002,6 +7594,7 @@
           <a:lstStyle xmlns:a="http://schemas.openxmlformats.org/drawingml/2006/main"/>
           <a:p xmlns:a="http://schemas.openxmlformats.org/drawingml/2006/main">
             <a:pPr>
+              <a:buNone/>
               <a:defRPr sz="900" b="1">
                 <a:solidFill>
                   <a:srgbClr val="F1D18A"/>
@@ -7045,6 +7638,7 @@
           <a:lstStyle xmlns:a="http://schemas.openxmlformats.org/drawingml/2006/main"/>
           <a:p xmlns:a="http://schemas.openxmlformats.org/drawingml/2006/main">
             <a:pPr>
+              <a:buNone/>
               <a:defRPr sz="1200" b="1">
                 <a:solidFill>
                   <a:srgbClr val="FFFFFF"/>
@@ -7055,7 +7649,7 @@
               </a:defRPr>
             </a:pPr>
             <a:r>
-              <a:t>Which transition deserves deeper follow-up?</a:t>
+              <a:t>Which of the 9 linked transitions deserves deeper follow-up?</a:t>
             </a:r>
           </a:p>
         </p:txBody>
@@ -7088,6 +7682,7 @@
           <a:lstStyle xmlns:a="http://schemas.openxmlformats.org/drawingml/2006/main"/>
           <a:p xmlns:a="http://schemas.openxmlformats.org/drawingml/2006/main">
             <a:pPr>
+              <a:buNone/>
               <a:defRPr sz="1050">
                 <a:solidFill>
                   <a:srgbClr val="D5DCDE"/>
@@ -7164,6 +7759,7 @@
           <a:lstStyle xmlns:a="http://schemas.openxmlformats.org/drawingml/2006/main"/>
           <a:p xmlns:a="http://schemas.openxmlformats.org/drawingml/2006/main">
             <a:pPr>
+              <a:buNone/>
               <a:defRPr sz="675">
                 <a:solidFill>
                   <a:srgbClr val="B8C0C2"/>
@@ -7174,7 +7770,7 @@
               </a:defRPr>
             </a:pPr>
             <a:r>
-              <a:t>Primary story: UTI versus Not_UTI | 22 min review + 8 min discussion</a:t>
+              <a:t>Primary story: operational UTI versus Not_UTI | Longcycler-only release</a:t>
             </a:r>
           </a:p>
         </p:txBody>
@@ -7207,6 +7803,7 @@
           <a:lstStyle xmlns:a="http://schemas.openxmlformats.org/drawingml/2006/main"/>
           <a:p xmlns:a="http://schemas.openxmlformats.org/drawingml/2006/main">
             <a:pPr algn="r">
+              <a:buNone/>
               <a:defRPr sz="750" b="1">
                 <a:solidFill>
                   <a:srgbClr val="D8D2C8"/>
@@ -7299,6 +7896,7 @@
           <a:lstStyle xmlns:a="http://schemas.openxmlformats.org/drawingml/2006/main"/>
           <a:p xmlns:a="http://schemas.openxmlformats.org/drawingml/2006/main">
             <a:pPr>
+              <a:buNone/>
               <a:defRPr sz="900" b="1">
                 <a:solidFill>
                   <a:srgbClr val="C95722"/>
@@ -7342,6 +7940,7 @@
           <a:lstStyle xmlns:a="http://schemas.openxmlformats.org/drawingml/2006/main"/>
           <a:p xmlns:a="http://schemas.openxmlformats.org/drawingml/2006/main">
             <a:pPr algn="l">
+              <a:buNone/>
               <a:defRPr sz="825" b="1">
                 <a:solidFill>
                   <a:srgbClr val="53636A"/>
@@ -7385,6 +7984,7 @@
           <a:lstStyle xmlns:a="http://schemas.openxmlformats.org/drawingml/2006/main"/>
           <a:p xmlns:a="http://schemas.openxmlformats.org/drawingml/2006/main">
             <a:pPr>
+              <a:buNone/>
               <a:defRPr sz="2775" b="1">
                 <a:solidFill>
                   <a:srgbClr val="15252D"/>
@@ -7428,6 +8028,7 @@
           <a:lstStyle xmlns:a="http://schemas.openxmlformats.org/drawingml/2006/main"/>
           <a:p xmlns:a="http://schemas.openxmlformats.org/drawingml/2006/main">
             <a:pPr>
+              <a:buNone/>
               <a:defRPr sz="1125">
                 <a:solidFill>
                   <a:srgbClr val="53636A"/>
@@ -7472,18 +8073,18 @@
       </p:sp>
       <p:pic>
         <p:nvPicPr>
-          <p:cNvPr id="7" name=""/>
+          <p:cNvPr id="27" name=""/>
           <p:cNvPicPr>
             <a:picLocks xmlns:a="http://schemas.openxmlformats.org/drawingml/2006/main" noChangeAspect="1"/>
           </p:cNvPicPr>
           <p:nvPr/>
         </p:nvPicPr>
         <p:blipFill>
-          <a:blip xmlns:r="http://schemas.openxmlformats.org/officeDocument/2006/relationships" xmlns:a="http://schemas.openxmlformats.org/drawingml/2006/main" r:embed="R786e7a498e854359"/>
+          <a:blip xmlns:r="http://schemas.openxmlformats.org/officeDocument/2006/relationships" xmlns:a="http://schemas.openxmlformats.org/drawingml/2006/main" r:embed="Rb180a6d88223417b"/>
           <a:stretch xmlns:a="http://schemas.openxmlformats.org/drawingml/2006/main"/>
         </p:blipFill>
         <p:spPr>
-          <a:xfrm xmlns:a="http://schemas.openxmlformats.org/drawingml/2006/main">
+          <a:xfrm xmlns:a="http://schemas.openxmlformats.org/drawingml/2006/main" flipH="0" flipV="0">
             <a:off x="1034823" y="1950720"/>
             <a:ext cx="7483929" cy="4191000"/>
           </a:xfrm>
@@ -7520,6 +8121,7 @@
           <a:lstStyle xmlns:a="http://schemas.openxmlformats.org/drawingml/2006/main"/>
           <a:p xmlns:a="http://schemas.openxmlformats.org/drawingml/2006/main">
             <a:pPr>
+              <a:buNone/>
               <a:defRPr sz="1125" b="1">
                 <a:solidFill>
                   <a:srgbClr val="D99518"/>
@@ -7563,6 +8165,7 @@
           <a:lstStyle xmlns:a="http://schemas.openxmlformats.org/drawingml/2006/main"/>
           <a:p xmlns:a="http://schemas.openxmlformats.org/drawingml/2006/main">
             <a:pPr>
+              <a:buNone/>
               <a:defRPr sz="750" b="1">
                 <a:solidFill>
                   <a:srgbClr val="53636A"/>
@@ -7635,6 +8238,7 @@
           <a:lstStyle xmlns:a="http://schemas.openxmlformats.org/drawingml/2006/main"/>
           <a:p xmlns:a="http://schemas.openxmlformats.org/drawingml/2006/main">
             <a:pPr algn="ctr">
+              <a:buNone/>
               <a:defRPr sz="675" b="1">
                 <a:solidFill>
                   <a:srgbClr val="FFFFFF"/>
@@ -7705,6 +8309,7 @@
           <a:lstStyle xmlns:a="http://schemas.openxmlformats.org/drawingml/2006/main"/>
           <a:p xmlns:a="http://schemas.openxmlformats.org/drawingml/2006/main">
             <a:pPr>
+              <a:buNone/>
               <a:defRPr sz="1050" b="1">
                 <a:solidFill>
                   <a:srgbClr val="2F8A61"/>
@@ -7748,6 +8353,7 @@
           <a:lstStyle xmlns:a="http://schemas.openxmlformats.org/drawingml/2006/main"/>
           <a:p xmlns:a="http://schemas.openxmlformats.org/drawingml/2006/main">
             <a:pPr>
+              <a:buNone/>
               <a:defRPr sz="900">
                 <a:solidFill>
                   <a:srgbClr val="15252D"/>
@@ -7758,7 +8364,7 @@
               </a:defRPr>
             </a:pPr>
             <a:r>
-              <a:t>Cached ResFinder screening supports the mechanism supplement at transition level.</a:t>
+              <a:t>Current screening provides exploratory accessory, plasmid and AMR context for linked transitions.</a:t>
             </a:r>
           </a:p>
         </p:txBody>
@@ -7818,6 +8424,7 @@
           <a:lstStyle xmlns:a="http://schemas.openxmlformats.org/drawingml/2006/main"/>
           <a:p xmlns:a="http://schemas.openxmlformats.org/drawingml/2006/main">
             <a:pPr>
+              <a:buNone/>
               <a:defRPr sz="1125" b="1">
                 <a:solidFill>
                   <a:srgbClr val="B7532E"/>
@@ -7833,6 +8440,7 @@
           </a:p>
           <a:p xmlns:a="http://schemas.openxmlformats.org/drawingml/2006/main">
             <a:pPr>
+              <a:buNone/>
               <a:defRPr sz="1125" b="1">
                 <a:solidFill>
                   <a:srgbClr val="B7532E"/>
@@ -7909,6 +8517,7 @@
           <a:lstStyle xmlns:a="http://schemas.openxmlformats.org/drawingml/2006/main"/>
           <a:p xmlns:a="http://schemas.openxmlformats.org/drawingml/2006/main">
             <a:pPr>
+              <a:buNone/>
               <a:defRPr sz="675">
                 <a:solidFill>
                   <a:srgbClr val="53636A"/>
@@ -7952,6 +8561,7 @@
           <a:lstStyle xmlns:a="http://schemas.openxmlformats.org/drawingml/2006/main"/>
           <a:p xmlns:a="http://schemas.openxmlformats.org/drawingml/2006/main">
             <a:pPr algn="r">
+              <a:buNone/>
               <a:defRPr sz="750" b="1">
                 <a:solidFill>
                   <a:srgbClr val="53636A"/>
@@ -8044,6 +8654,7 @@
           <a:lstStyle xmlns:a="http://schemas.openxmlformats.org/drawingml/2006/main"/>
           <a:p xmlns:a="http://schemas.openxmlformats.org/drawingml/2006/main">
             <a:pPr>
+              <a:buNone/>
               <a:defRPr sz="900" b="1">
                 <a:solidFill>
                   <a:srgbClr val="C95722"/>
@@ -8087,6 +8698,7 @@
           <a:lstStyle xmlns:a="http://schemas.openxmlformats.org/drawingml/2006/main"/>
           <a:p xmlns:a="http://schemas.openxmlformats.org/drawingml/2006/main">
             <a:pPr algn="l">
+              <a:buNone/>
               <a:defRPr sz="825" b="1">
                 <a:solidFill>
                   <a:srgbClr val="53636A"/>
@@ -8130,6 +8742,7 @@
           <a:lstStyle xmlns:a="http://schemas.openxmlformats.org/drawingml/2006/main"/>
           <a:p xmlns:a="http://schemas.openxmlformats.org/drawingml/2006/main">
             <a:pPr>
+              <a:buNone/>
               <a:defRPr sz="2775" b="1">
                 <a:solidFill>
                   <a:srgbClr val="15252D"/>
@@ -8173,6 +8786,7 @@
           <a:lstStyle xmlns:a="http://schemas.openxmlformats.org/drawingml/2006/main"/>
           <a:p xmlns:a="http://schemas.openxmlformats.org/drawingml/2006/main">
             <a:pPr>
+              <a:buNone/>
               <a:defRPr sz="1125">
                 <a:solidFill>
                   <a:srgbClr val="53636A"/>
@@ -8217,18 +8831,18 @@
       </p:sp>
       <p:pic>
         <p:nvPicPr>
-          <p:cNvPr id="7" name=""/>
+          <p:cNvPr id="27" name=""/>
           <p:cNvPicPr>
             <a:picLocks xmlns:a="http://schemas.openxmlformats.org/drawingml/2006/main" noChangeAspect="1"/>
           </p:cNvPicPr>
           <p:nvPr/>
         </p:nvPicPr>
         <p:blipFill>
-          <a:blip xmlns:r="http://schemas.openxmlformats.org/officeDocument/2006/relationships" xmlns:a="http://schemas.openxmlformats.org/drawingml/2006/main" r:embed="R48123421c63a4414"/>
+          <a:blip xmlns:r="http://schemas.openxmlformats.org/officeDocument/2006/relationships" xmlns:a="http://schemas.openxmlformats.org/drawingml/2006/main" r:embed="R5f585e33708d4bf2"/>
           <a:stretch xmlns:a="http://schemas.openxmlformats.org/drawingml/2006/main"/>
         </p:blipFill>
         <p:spPr>
-          <a:xfrm xmlns:a="http://schemas.openxmlformats.org/drawingml/2006/main">
+          <a:xfrm xmlns:a="http://schemas.openxmlformats.org/drawingml/2006/main" flipH="0" flipV="0">
             <a:off x="856410" y="1950720"/>
             <a:ext cx="8012206" cy="4191000"/>
           </a:xfrm>
@@ -8265,6 +8879,7 @@
           <a:lstStyle xmlns:a="http://schemas.openxmlformats.org/drawingml/2006/main"/>
           <a:p xmlns:a="http://schemas.openxmlformats.org/drawingml/2006/main">
             <a:pPr>
+              <a:buNone/>
               <a:defRPr sz="1125" b="1">
                 <a:solidFill>
                   <a:srgbClr val="78889A"/>
@@ -8308,6 +8923,7 @@
           <a:lstStyle xmlns:a="http://schemas.openxmlformats.org/drawingml/2006/main"/>
           <a:p xmlns:a="http://schemas.openxmlformats.org/drawingml/2006/main">
             <a:pPr>
+              <a:buNone/>
               <a:defRPr sz="750" b="1">
                 <a:solidFill>
                   <a:srgbClr val="53636A"/>
@@ -8380,6 +8996,7 @@
           <a:lstStyle xmlns:a="http://schemas.openxmlformats.org/drawingml/2006/main"/>
           <a:p xmlns:a="http://schemas.openxmlformats.org/drawingml/2006/main">
             <a:pPr algn="ctr">
+              <a:buNone/>
               <a:defRPr sz="675" b="1">
                 <a:solidFill>
                   <a:srgbClr val="FFFFFF"/>
@@ -8450,6 +9067,7 @@
           <a:lstStyle xmlns:a="http://schemas.openxmlformats.org/drawingml/2006/main"/>
           <a:p xmlns:a="http://schemas.openxmlformats.org/drawingml/2006/main">
             <a:pPr>
+              <a:buNone/>
               <a:defRPr sz="1050" b="1">
                 <a:solidFill>
                   <a:srgbClr val="176C96"/>
@@ -8493,6 +9111,7 @@
           <a:lstStyle xmlns:a="http://schemas.openxmlformats.org/drawingml/2006/main"/>
           <a:p xmlns:a="http://schemas.openxmlformats.org/drawingml/2006/main">
             <a:pPr>
+              <a:buNone/>
               <a:defRPr sz="900">
                 <a:solidFill>
                   <a:srgbClr val="15252D"/>
@@ -8563,6 +9182,7 @@
           <a:lstStyle xmlns:a="http://schemas.openxmlformats.org/drawingml/2006/main"/>
           <a:p xmlns:a="http://schemas.openxmlformats.org/drawingml/2006/main">
             <a:pPr>
+              <a:buNone/>
               <a:defRPr sz="1050" b="1">
                 <a:solidFill>
                   <a:srgbClr val="15252D"/>
@@ -8639,6 +9259,7 @@
           <a:lstStyle xmlns:a="http://schemas.openxmlformats.org/drawingml/2006/main"/>
           <a:p xmlns:a="http://schemas.openxmlformats.org/drawingml/2006/main">
             <a:pPr>
+              <a:buNone/>
               <a:defRPr sz="675">
                 <a:solidFill>
                   <a:srgbClr val="53636A"/>
@@ -8682,6 +9303,7 @@
           <a:lstStyle xmlns:a="http://schemas.openxmlformats.org/drawingml/2006/main"/>
           <a:p xmlns:a="http://schemas.openxmlformats.org/drawingml/2006/main">
             <a:pPr algn="r">
+              <a:buNone/>
               <a:defRPr sz="750" b="1">
                 <a:solidFill>
                   <a:srgbClr val="53636A"/>
@@ -8774,6 +9396,7 @@
           <a:lstStyle xmlns:a="http://schemas.openxmlformats.org/drawingml/2006/main"/>
           <a:p xmlns:a="http://schemas.openxmlformats.org/drawingml/2006/main">
             <a:pPr>
+              <a:buNone/>
               <a:defRPr sz="900" b="1">
                 <a:solidFill>
                   <a:srgbClr val="C95722"/>
@@ -8817,6 +9440,7 @@
           <a:lstStyle xmlns:a="http://schemas.openxmlformats.org/drawingml/2006/main"/>
           <a:p xmlns:a="http://schemas.openxmlformats.org/drawingml/2006/main">
             <a:pPr algn="l">
+              <a:buNone/>
               <a:defRPr sz="825" b="1">
                 <a:solidFill>
                   <a:srgbClr val="D8D2C8"/>
@@ -8860,6 +9484,7 @@
           <a:lstStyle xmlns:a="http://schemas.openxmlformats.org/drawingml/2006/main"/>
           <a:p xmlns:a="http://schemas.openxmlformats.org/drawingml/2006/main">
             <a:pPr>
+              <a:buNone/>
               <a:defRPr sz="2775" b="1">
                 <a:solidFill>
                   <a:srgbClr val="FFFFFF"/>
@@ -8903,6 +9528,7 @@
           <a:lstStyle xmlns:a="http://schemas.openxmlformats.org/drawingml/2006/main"/>
           <a:p xmlns:a="http://schemas.openxmlformats.org/drawingml/2006/main">
             <a:pPr>
+              <a:buNone/>
               <a:defRPr sz="1125">
                 <a:solidFill>
                   <a:srgbClr val="C7CFD0"/>
@@ -8947,18 +9573,18 @@
       </p:sp>
       <p:pic>
         <p:nvPicPr>
-          <p:cNvPr id="7" name=""/>
+          <p:cNvPr id="24" name=""/>
           <p:cNvPicPr>
             <a:picLocks xmlns:a="http://schemas.openxmlformats.org/drawingml/2006/main" noChangeAspect="1"/>
           </p:cNvPicPr>
           <p:nvPr/>
         </p:nvPicPr>
         <p:blipFill>
-          <a:blip xmlns:r="http://schemas.openxmlformats.org/officeDocument/2006/relationships" xmlns:a="http://schemas.openxmlformats.org/drawingml/2006/main" r:embed="Rceac2309726c40ce"/>
+          <a:blip xmlns:r="http://schemas.openxmlformats.org/officeDocument/2006/relationships" xmlns:a="http://schemas.openxmlformats.org/drawingml/2006/main" r:embed="R3f0a810c550f4c3b"/>
           <a:stretch xmlns:a="http://schemas.openxmlformats.org/drawingml/2006/main"/>
         </p:blipFill>
         <p:spPr>
-          <a:xfrm xmlns:a="http://schemas.openxmlformats.org/drawingml/2006/main">
+          <a:xfrm xmlns:a="http://schemas.openxmlformats.org/drawingml/2006/main" flipH="0" flipV="0">
             <a:off x="3285331" y="1941195"/>
             <a:ext cx="3563938" cy="4276725"/>
           </a:xfrm>
@@ -9024,6 +9650,7 @@
           <a:lstStyle xmlns:a="http://schemas.openxmlformats.org/drawingml/2006/main"/>
           <a:p xmlns:a="http://schemas.openxmlformats.org/drawingml/2006/main">
             <a:pPr algn="ctr">
+              <a:buNone/>
               <a:defRPr sz="675" b="1">
                 <a:solidFill>
                   <a:srgbClr val="FFFFFF"/>
@@ -9094,6 +9721,7 @@
           <a:lstStyle xmlns:a="http://schemas.openxmlformats.org/drawingml/2006/main"/>
           <a:p xmlns:a="http://schemas.openxmlformats.org/drawingml/2006/main">
             <a:pPr>
+              <a:buNone/>
               <a:defRPr sz="1050" b="1">
                 <a:solidFill>
                   <a:srgbClr val="FFFFFF"/>
@@ -9109,6 +9737,7 @@
           </a:p>
           <a:p xmlns:a="http://schemas.openxmlformats.org/drawingml/2006/main">
             <a:pPr>
+              <a:buNone/>
               <a:defRPr sz="1050" b="1">
                 <a:solidFill>
                   <a:srgbClr val="FFFFFF"/>
@@ -9179,6 +9808,7 @@
           <a:lstStyle xmlns:a="http://schemas.openxmlformats.org/drawingml/2006/main"/>
           <a:p xmlns:a="http://schemas.openxmlformats.org/drawingml/2006/main">
             <a:pPr>
+              <a:buNone/>
               <a:defRPr sz="1050" b="1">
                 <a:solidFill>
                   <a:srgbClr val="15252D"/>
@@ -9255,6 +9885,7 @@
           <a:lstStyle xmlns:a="http://schemas.openxmlformats.org/drawingml/2006/main"/>
           <a:p xmlns:a="http://schemas.openxmlformats.org/drawingml/2006/main">
             <a:pPr>
+              <a:buNone/>
               <a:defRPr sz="675">
                 <a:solidFill>
                   <a:srgbClr val="B8C0C2"/>
@@ -9265,7 +9896,7 @@
               </a:defRPr>
             </a:pPr>
             <a:r>
-              <a:t>Source: results/longitudinal/swimmer_plot.png | contextual lookup only</a:t>
+              <a:t>Source: plots/publication/Fig1_Swimmer_Plot.png | contextual lookup only</a:t>
             </a:r>
           </a:p>
         </p:txBody>
@@ -9298,6 +9929,7 @@
           <a:lstStyle xmlns:a="http://schemas.openxmlformats.org/drawingml/2006/main"/>
           <a:p xmlns:a="http://schemas.openxmlformats.org/drawingml/2006/main">
             <a:pPr algn="r">
+              <a:buNone/>
               <a:defRPr sz="750" b="1">
                 <a:solidFill>
                   <a:srgbClr val="D8D2C8"/>
@@ -9390,6 +10022,7 @@
           <a:lstStyle xmlns:a="http://schemas.openxmlformats.org/drawingml/2006/main"/>
           <a:p xmlns:a="http://schemas.openxmlformats.org/drawingml/2006/main">
             <a:pPr>
+              <a:buNone/>
               <a:defRPr sz="900" b="1">
                 <a:solidFill>
                   <a:srgbClr val="C95722"/>
@@ -9433,6 +10066,7 @@
           <a:lstStyle xmlns:a="http://schemas.openxmlformats.org/drawingml/2006/main"/>
           <a:p xmlns:a="http://schemas.openxmlformats.org/drawingml/2006/main">
             <a:pPr algn="l">
+              <a:buNone/>
               <a:defRPr sz="825" b="1">
                 <a:solidFill>
                   <a:srgbClr val="53636A"/>
@@ -9476,6 +10110,7 @@
           <a:lstStyle xmlns:a="http://schemas.openxmlformats.org/drawingml/2006/main"/>
           <a:p xmlns:a="http://schemas.openxmlformats.org/drawingml/2006/main">
             <a:pPr>
+              <a:buNone/>
               <a:defRPr sz="2775" b="1">
                 <a:solidFill>
                   <a:srgbClr val="15252D"/>
@@ -9519,6 +10154,7 @@
           <a:lstStyle xmlns:a="http://schemas.openxmlformats.org/drawingml/2006/main"/>
           <a:p xmlns:a="http://schemas.openxmlformats.org/drawingml/2006/main">
             <a:pPr>
+              <a:buNone/>
               <a:defRPr sz="1125">
                 <a:solidFill>
                   <a:srgbClr val="53636A"/>
@@ -9529,7 +10165,7 @@
               </a:defRPr>
             </a:pPr>
             <a:r>
-              <a:t>The primary contrast asks which episodes fulfil a clinical UTI rule, not whether E. coli is present.</a:t>
+              <a:t>The primary contrast uses a versioned operational UTI rule; it does not equate bacterial presence with infection.</a:t>
             </a:r>
           </a:p>
         </p:txBody>
@@ -9618,6 +10254,7 @@
           <a:lstStyle xmlns:a="http://schemas.openxmlformats.org/drawingml/2006/main"/>
           <a:p xmlns:a="http://schemas.openxmlformats.org/drawingml/2006/main">
             <a:pPr algn="ctr">
+              <a:buNone/>
               <a:defRPr sz="675" b="1">
                 <a:solidFill>
                   <a:srgbClr val="FFFFFF"/>
@@ -9661,6 +10298,7 @@
           <a:lstStyle xmlns:a="http://schemas.openxmlformats.org/drawingml/2006/main"/>
           <a:p xmlns:a="http://schemas.openxmlformats.org/drawingml/2006/main">
             <a:pPr>
+              <a:buNone/>
               <a:defRPr sz="1650" b="1">
                 <a:solidFill>
                   <a:srgbClr val="15252D"/>
@@ -9676,6 +10314,7 @@
           </a:p>
           <a:p xmlns:a="http://schemas.openxmlformats.org/drawingml/2006/main">
             <a:pPr>
+              <a:buNone/>
               <a:defRPr sz="1650" b="1">
                 <a:solidFill>
                   <a:srgbClr val="15252D"/>
@@ -9719,6 +10358,7 @@
           <a:lstStyle xmlns:a="http://schemas.openxmlformats.org/drawingml/2006/main"/>
           <a:p xmlns:a="http://schemas.openxmlformats.org/drawingml/2006/main">
             <a:pPr>
+              <a:buNone/>
               <a:defRPr sz="975" b="1">
                 <a:solidFill>
                   <a:srgbClr val="C95722"/>
@@ -9729,7 +10369,7 @@
               </a:defRPr>
             </a:pPr>
             <a:r>
-              <a:t>18 current primary clinical episodes</a:t>
+              <a:t>16 operational UTI episodes</a:t>
             </a:r>
           </a:p>
         </p:txBody>
@@ -9818,6 +10458,7 @@
           <a:lstStyle xmlns:a="http://schemas.openxmlformats.org/drawingml/2006/main"/>
           <a:p xmlns:a="http://schemas.openxmlformats.org/drawingml/2006/main">
             <a:pPr algn="ctr">
+              <a:buNone/>
               <a:defRPr sz="675" b="1">
                 <a:solidFill>
                   <a:srgbClr val="FFFFFF"/>
@@ -9861,6 +10502,7 @@
           <a:lstStyle xmlns:a="http://schemas.openxmlformats.org/drawingml/2006/main"/>
           <a:p xmlns:a="http://schemas.openxmlformats.org/drawingml/2006/main">
             <a:pPr>
+              <a:buNone/>
               <a:defRPr sz="1650" b="1">
                 <a:solidFill>
                   <a:srgbClr val="15252D"/>
@@ -9876,6 +10518,7 @@
           </a:p>
           <a:p xmlns:a="http://schemas.openxmlformats.org/drawingml/2006/main">
             <a:pPr>
+              <a:buNone/>
               <a:defRPr sz="1650" b="1">
                 <a:solidFill>
                   <a:srgbClr val="15252D"/>
@@ -9919,6 +10562,7 @@
           <a:lstStyle xmlns:a="http://schemas.openxmlformats.org/drawingml/2006/main"/>
           <a:p xmlns:a="http://schemas.openxmlformats.org/drawingml/2006/main">
             <a:pPr>
+              <a:buNone/>
               <a:defRPr sz="975" b="1">
                 <a:solidFill>
                   <a:srgbClr val="176C96"/>
@@ -9929,7 +10573,7 @@
               </a:defRPr>
             </a:pPr>
             <a:r>
-              <a:t>565 episodes; clinically heterogeneous</a:t>
+              <a:t>516 selected episodes; clinically heterogeneous</a:t>
             </a:r>
           </a:p>
         </p:txBody>
@@ -9962,6 +10606,7 @@
           <a:lstStyle xmlns:a="http://schemas.openxmlformats.org/drawingml/2006/main"/>
           <a:p xmlns:a="http://schemas.openxmlformats.org/drawingml/2006/main">
             <a:pPr>
+              <a:buNone/>
               <a:defRPr sz="900" b="1">
                 <a:solidFill>
                   <a:srgbClr val="C95722"/>
@@ -10005,6 +10650,7 @@
           <a:lstStyle xmlns:a="http://schemas.openxmlformats.org/drawingml/2006/main"/>
           <a:p xmlns:a="http://schemas.openxmlformats.org/drawingml/2006/main">
             <a:pPr>
+              <a:buNone/>
               <a:defRPr sz="1275" b="1">
                 <a:solidFill>
                   <a:srgbClr val="15252D"/>
@@ -10048,6 +10694,7 @@
           <a:lstStyle xmlns:a="http://schemas.openxmlformats.org/drawingml/2006/main"/>
           <a:p xmlns:a="http://schemas.openxmlformats.org/drawingml/2006/main">
             <a:pPr>
+              <a:buNone/>
               <a:defRPr sz="1125">
                 <a:solidFill>
                   <a:srgbClr val="53636A"/>
@@ -10063,6 +10710,7 @@
           </a:p>
           <a:p xmlns:a="http://schemas.openxmlformats.org/drawingml/2006/main">
             <a:pPr>
+              <a:buNone/>
               <a:defRPr sz="1125">
                 <a:solidFill>
                   <a:srgbClr val="53636A"/>
@@ -10078,6 +10726,7 @@
           </a:p>
           <a:p xmlns:a="http://schemas.openxmlformats.org/drawingml/2006/main">
             <a:pPr>
+              <a:buNone/>
               <a:defRPr sz="1125">
                 <a:solidFill>
                   <a:srgbClr val="53636A"/>
@@ -10121,6 +10770,7 @@
           <a:lstStyle xmlns:a="http://schemas.openxmlformats.org/drawingml/2006/main"/>
           <a:p xmlns:a="http://schemas.openxmlformats.org/drawingml/2006/main">
             <a:pPr>
+              <a:buNone/>
               <a:defRPr sz="975" b="1">
                 <a:solidFill>
                   <a:srgbClr val="53636A"/>
@@ -10191,6 +10841,7 @@
           <a:lstStyle xmlns:a="http://schemas.openxmlformats.org/drawingml/2006/main"/>
           <a:p xmlns:a="http://schemas.openxmlformats.org/drawingml/2006/main">
             <a:pPr>
+              <a:buNone/>
               <a:defRPr sz="1050" b="1">
                 <a:solidFill>
                   <a:srgbClr val="176C96"/>
@@ -10234,6 +10885,7 @@
           <a:lstStyle xmlns:a="http://schemas.openxmlformats.org/drawingml/2006/main"/>
           <a:p xmlns:a="http://schemas.openxmlformats.org/drawingml/2006/main">
             <a:pPr>
+              <a:buNone/>
               <a:defRPr sz="825">
                 <a:solidFill>
                   <a:srgbClr val="15252D"/>
@@ -10249,6 +10901,7 @@
           </a:p>
           <a:p xmlns:a="http://schemas.openxmlformats.org/drawingml/2006/main">
             <a:pPr>
+              <a:buNone/>
               <a:defRPr sz="825">
                 <a:solidFill>
                   <a:srgbClr val="15252D"/>
@@ -10292,6 +10945,7 @@
           <a:lstStyle xmlns:a="http://schemas.openxmlformats.org/drawingml/2006/main"/>
           <a:p xmlns:a="http://schemas.openxmlformats.org/drawingml/2006/main">
             <a:pPr algn="ctr">
+              <a:buNone/>
               <a:defRPr sz="1575" b="1">
                 <a:solidFill>
                   <a:srgbClr val="53636A"/>
@@ -10362,6 +11016,7 @@
           <a:lstStyle xmlns:a="http://schemas.openxmlformats.org/drawingml/2006/main"/>
           <a:p xmlns:a="http://schemas.openxmlformats.org/drawingml/2006/main">
             <a:pPr>
+              <a:buNone/>
               <a:defRPr sz="1050" b="1">
                 <a:solidFill>
                   <a:srgbClr val="176C96"/>
@@ -10405,6 +11060,7 @@
           <a:lstStyle xmlns:a="http://schemas.openxmlformats.org/drawingml/2006/main"/>
           <a:p xmlns:a="http://schemas.openxmlformats.org/drawingml/2006/main">
             <a:pPr>
+              <a:buNone/>
               <a:defRPr sz="825">
                 <a:solidFill>
                   <a:srgbClr val="15252D"/>
@@ -10420,6 +11076,7 @@
           </a:p>
           <a:p xmlns:a="http://schemas.openxmlformats.org/drawingml/2006/main">
             <a:pPr>
+              <a:buNone/>
               <a:defRPr sz="825">
                 <a:solidFill>
                   <a:srgbClr val="15252D"/>
@@ -10463,6 +11120,7 @@
           <a:lstStyle xmlns:a="http://schemas.openxmlformats.org/drawingml/2006/main"/>
           <a:p xmlns:a="http://schemas.openxmlformats.org/drawingml/2006/main">
             <a:pPr algn="ctr">
+              <a:buNone/>
               <a:defRPr sz="1575" b="1">
                 <a:solidFill>
                   <a:srgbClr val="C95722"/>
@@ -10533,6 +11191,7 @@
           <a:lstStyle xmlns:a="http://schemas.openxmlformats.org/drawingml/2006/main"/>
           <a:p xmlns:a="http://schemas.openxmlformats.org/drawingml/2006/main">
             <a:pPr>
+              <a:buNone/>
               <a:defRPr sz="1050" b="1">
                 <a:solidFill>
                   <a:srgbClr val="C95722"/>
@@ -10576,6 +11235,7 @@
           <a:lstStyle xmlns:a="http://schemas.openxmlformats.org/drawingml/2006/main"/>
           <a:p xmlns:a="http://schemas.openxmlformats.org/drawingml/2006/main">
             <a:pPr>
+              <a:buNone/>
               <a:defRPr sz="825">
                 <a:solidFill>
                   <a:srgbClr val="15252D"/>
@@ -10591,6 +11251,7 @@
           </a:p>
           <a:p xmlns:a="http://schemas.openxmlformats.org/drawingml/2006/main">
             <a:pPr>
+              <a:buNone/>
               <a:defRPr sz="825">
                 <a:solidFill>
                   <a:srgbClr val="15252D"/>
@@ -10661,6 +11322,7 @@
           <a:lstStyle xmlns:a="http://schemas.openxmlformats.org/drawingml/2006/main"/>
           <a:p xmlns:a="http://schemas.openxmlformats.org/drawingml/2006/main">
             <a:pPr>
+              <a:buNone/>
               <a:defRPr sz="1050" b="1">
                 <a:solidFill>
                   <a:srgbClr val="15252D"/>
@@ -10676,6 +11338,7 @@
           </a:p>
           <a:p xmlns:a="http://schemas.openxmlformats.org/drawingml/2006/main">
             <a:pPr>
+              <a:buNone/>
               <a:defRPr sz="1050" b="1">
                 <a:solidFill>
                   <a:srgbClr val="15252D"/>
@@ -10752,6 +11415,7 @@
           <a:lstStyle xmlns:a="http://schemas.openxmlformats.org/drawingml/2006/main"/>
           <a:p xmlns:a="http://schemas.openxmlformats.org/drawingml/2006/main">
             <a:pPr>
+              <a:buNone/>
               <a:defRPr sz="675">
                 <a:solidFill>
                   <a:srgbClr val="53636A"/>
@@ -10762,7 +11426,7 @@
               </a:defRPr>
             </a:pPr>
             <a:r>
-              <a:t>Source: current primary UTI_Status definition; validation checks (18 UTI / 565 Not_UTI)</a:t>
+              <a:t>Source: operational UTI phenotype; selected cohort (16 UTI / 516 Not_UTI)</a:t>
             </a:r>
           </a:p>
         </p:txBody>
@@ -10795,6 +11459,7 @@
           <a:lstStyle xmlns:a="http://schemas.openxmlformats.org/drawingml/2006/main"/>
           <a:p xmlns:a="http://schemas.openxmlformats.org/drawingml/2006/main">
             <a:pPr algn="r">
+              <a:buNone/>
               <a:defRPr sz="750" b="1">
                 <a:solidFill>
                   <a:srgbClr val="53636A"/>
@@ -10887,6 +11552,7 @@
           <a:lstStyle xmlns:a="http://schemas.openxmlformats.org/drawingml/2006/main"/>
           <a:p xmlns:a="http://schemas.openxmlformats.org/drawingml/2006/main">
             <a:pPr>
+              <a:buNone/>
               <a:defRPr sz="900" b="1">
                 <a:solidFill>
                   <a:srgbClr val="C95722"/>
@@ -10930,6 +11596,7 @@
           <a:lstStyle xmlns:a="http://schemas.openxmlformats.org/drawingml/2006/main"/>
           <a:p xmlns:a="http://schemas.openxmlformats.org/drawingml/2006/main">
             <a:pPr algn="l">
+              <a:buNone/>
               <a:defRPr sz="825" b="1">
                 <a:solidFill>
                   <a:srgbClr val="53636A"/>
@@ -10973,6 +11640,7 @@
           <a:lstStyle xmlns:a="http://schemas.openxmlformats.org/drawingml/2006/main"/>
           <a:p xmlns:a="http://schemas.openxmlformats.org/drawingml/2006/main">
             <a:pPr>
+              <a:buNone/>
               <a:defRPr sz="2775" b="1">
                 <a:solidFill>
                   <a:srgbClr val="15252D"/>
@@ -11016,6 +11684,7 @@
           <a:lstStyle xmlns:a="http://schemas.openxmlformats.org/drawingml/2006/main"/>
           <a:p xmlns:a="http://schemas.openxmlformats.org/drawingml/2006/main">
             <a:pPr>
+              <a:buNone/>
               <a:defRPr sz="1125">
                 <a:solidFill>
                   <a:srgbClr val="53636A"/>
@@ -11059,6 +11728,7 @@
           <a:lstStyle xmlns:a="http://schemas.openxmlformats.org/drawingml/2006/main"/>
           <a:p xmlns:a="http://schemas.openxmlformats.org/drawingml/2006/main">
             <a:pPr>
+              <a:buNone/>
               <a:defRPr sz="2850" b="1">
                 <a:solidFill>
                   <a:srgbClr val="15252D"/>
@@ -11069,7 +11739,7 @@
               </a:defRPr>
             </a:pPr>
             <a:r>
-              <a:t>583</a:t>
+              <a:t>532</a:t>
             </a:r>
           </a:p>
         </p:txBody>
@@ -11102,6 +11772,7 @@
           <a:lstStyle xmlns:a="http://schemas.openxmlformats.org/drawingml/2006/main"/>
           <a:p xmlns:a="http://schemas.openxmlformats.org/drawingml/2006/main">
             <a:pPr>
+              <a:buNone/>
               <a:defRPr sz="975" b="1">
                 <a:solidFill>
                   <a:srgbClr val="15252D"/>
@@ -11112,7 +11783,7 @@
               </a:defRPr>
             </a:pPr>
             <a:r>
-              <a:t>Clinical episodes</a:t>
+              <a:t>Selected episodes</a:t>
             </a:r>
           </a:p>
         </p:txBody>
@@ -11145,6 +11816,7 @@
           <a:lstStyle xmlns:a="http://schemas.openxmlformats.org/drawingml/2006/main"/>
           <a:p xmlns:a="http://schemas.openxmlformats.org/drawingml/2006/main">
             <a:pPr>
+              <a:buNone/>
               <a:defRPr sz="825">
                 <a:solidFill>
                   <a:srgbClr val="53636A"/>
@@ -11155,7 +11827,7 @@
               </a:defRPr>
             </a:pPr>
             <a:r>
-              <a:t>167 participants</a:t>
+              <a:t>161 residents</a:t>
             </a:r>
           </a:p>
         </p:txBody>
@@ -11188,6 +11860,7 @@
           <a:lstStyle xmlns:a="http://schemas.openxmlformats.org/drawingml/2006/main"/>
           <a:p xmlns:a="http://schemas.openxmlformats.org/drawingml/2006/main">
             <a:pPr>
+              <a:buNone/>
               <a:defRPr sz="2850" b="1">
                 <a:solidFill>
                   <a:srgbClr val="2F8A61"/>
@@ -11198,7 +11871,7 @@
               </a:defRPr>
             </a:pPr>
             <a:r>
-              <a:t>556</a:t>
+              <a:t>532</a:t>
             </a:r>
           </a:p>
         </p:txBody>
@@ -11231,6 +11904,7 @@
           <a:lstStyle xmlns:a="http://schemas.openxmlformats.org/drawingml/2006/main"/>
           <a:p xmlns:a="http://schemas.openxmlformats.org/drawingml/2006/main">
             <a:pPr>
+              <a:buNone/>
               <a:defRPr sz="975" b="1">
                 <a:solidFill>
                   <a:srgbClr val="15252D"/>
@@ -11241,7 +11915,7 @@
               </a:defRPr>
             </a:pPr>
             <a:r>
-              <a:t>VF/WGS-ready</a:t>
+              <a:t>QC-passing genomes</a:t>
             </a:r>
           </a:p>
         </p:txBody>
@@ -11274,6 +11948,7 @@
           <a:lstStyle xmlns:a="http://schemas.openxmlformats.org/drawingml/2006/main"/>
           <a:p xmlns:a="http://schemas.openxmlformats.org/drawingml/2006/main">
             <a:pPr>
+              <a:buNone/>
               <a:defRPr sz="825">
                 <a:solidFill>
                   <a:srgbClr val="53636A"/>
@@ -11284,7 +11959,7 @@
               </a:defRPr>
             </a:pPr>
             <a:r>
-              <a:t>Linked genomic episodes</a:t>
+              <a:t>one selected per episode</a:t>
             </a:r>
           </a:p>
         </p:txBody>
@@ -11317,6 +11992,7 @@
           <a:lstStyle xmlns:a="http://schemas.openxmlformats.org/drawingml/2006/main"/>
           <a:p xmlns:a="http://schemas.openxmlformats.org/drawingml/2006/main">
             <a:pPr>
+              <a:buNone/>
               <a:defRPr sz="2850" b="1">
                 <a:solidFill>
                   <a:srgbClr val="176C96"/>
@@ -11360,6 +12036,7 @@
           <a:lstStyle xmlns:a="http://schemas.openxmlformats.org/drawingml/2006/main"/>
           <a:p xmlns:a="http://schemas.openxmlformats.org/drawingml/2006/main">
             <a:pPr>
+              <a:buNone/>
               <a:defRPr sz="975" b="1">
                 <a:solidFill>
                   <a:srgbClr val="15252D"/>
@@ -11370,7 +12047,7 @@
               </a:defRPr>
             </a:pPr>
             <a:r>
-              <a:t>VF gene columns</a:t>
+              <a:t>VFDB features</a:t>
             </a:r>
           </a:p>
         </p:txBody>
@@ -11403,6 +12080,7 @@
           <a:lstStyle xmlns:a="http://schemas.openxmlformats.org/drawingml/2006/main"/>
           <a:p xmlns:a="http://schemas.openxmlformats.org/drawingml/2006/main">
             <a:pPr>
+              <a:buNone/>
               <a:defRPr sz="825">
                 <a:solidFill>
                   <a:srgbClr val="53636A"/>
@@ -11446,6 +12124,7 @@
           <a:lstStyle xmlns:a="http://schemas.openxmlformats.org/drawingml/2006/main"/>
           <a:p xmlns:a="http://schemas.openxmlformats.org/drawingml/2006/main">
             <a:pPr>
+              <a:buNone/>
               <a:defRPr sz="2850" b="1">
                 <a:solidFill>
                   <a:srgbClr val="C95722"/>
@@ -11456,7 +12135,7 @@
               </a:defRPr>
             </a:pPr>
             <a:r>
-              <a:t>11</a:t>
+              <a:t>371</a:t>
             </a:r>
           </a:p>
         </p:txBody>
@@ -11489,6 +12168,7 @@
           <a:lstStyle xmlns:a="http://schemas.openxmlformats.org/drawingml/2006/main"/>
           <a:p xmlns:a="http://schemas.openxmlformats.org/drawingml/2006/main">
             <a:pPr>
+              <a:buNone/>
               <a:defRPr sz="975" b="1">
                 <a:solidFill>
                   <a:srgbClr val="15252D"/>
@@ -11499,7 +12179,7 @@
               </a:defRPr>
             </a:pPr>
             <a:r>
-              <a:t>Transitions</a:t>
+              <a:t>Adjacent pairs</a:t>
             </a:r>
           </a:p>
         </p:txBody>
@@ -11532,6 +12212,7 @@
           <a:lstStyle xmlns:a="http://schemas.openxmlformats.org/drawingml/2006/main"/>
           <a:p xmlns:a="http://schemas.openxmlformats.org/drawingml/2006/main">
             <a:pPr>
+              <a:buNone/>
               <a:defRPr sz="825">
                 <a:solidFill>
                   <a:srgbClr val="53636A"/>
@@ -11542,7 +12223,7 @@
               </a:defRPr>
             </a:pPr>
             <a:r>
-              <a:t>Not_UTI to UTI</a:t>
+              <a:t>139 residents; 9 to UTI</a:t>
             </a:r>
           </a:p>
         </p:txBody>
@@ -11635,6 +12316,7 @@
           <a:lstStyle xmlns:a="http://schemas.openxmlformats.org/drawingml/2006/main"/>
           <a:p xmlns:a="http://schemas.openxmlformats.org/drawingml/2006/main">
             <a:pPr>
+              <a:buNone/>
               <a:defRPr sz="825" b="1">
                 <a:solidFill>
                   <a:srgbClr val="53636A"/>
@@ -11678,6 +12360,7 @@
           <a:lstStyle xmlns:a="http://schemas.openxmlformats.org/drawingml/2006/main"/>
           <a:p xmlns:a="http://schemas.openxmlformats.org/drawingml/2006/main">
             <a:pPr>
+              <a:buNone/>
               <a:defRPr sz="1500" b="1">
                 <a:solidFill>
                   <a:srgbClr val="15252D"/>
@@ -11721,6 +12404,7 @@
           <a:lstStyle xmlns:a="http://schemas.openxmlformats.org/drawingml/2006/main"/>
           <a:p xmlns:a="http://schemas.openxmlformats.org/drawingml/2006/main">
             <a:pPr>
+              <a:buNone/>
               <a:defRPr sz="900">
                 <a:solidFill>
                   <a:srgbClr val="53636A"/>
@@ -11736,6 +12420,7 @@
           </a:p>
           <a:p xmlns:a="http://schemas.openxmlformats.org/drawingml/2006/main">
             <a:pPr>
+              <a:buNone/>
               <a:defRPr sz="900">
                 <a:solidFill>
                   <a:srgbClr val="53636A"/>
@@ -11779,6 +12464,7 @@
           <a:lstStyle xmlns:a="http://schemas.openxmlformats.org/drawingml/2006/main"/>
           <a:p xmlns:a="http://schemas.openxmlformats.org/drawingml/2006/main">
             <a:pPr algn="ctr">
+              <a:buNone/>
               <a:defRPr sz="1575" b="1">
                 <a:solidFill>
                   <a:srgbClr val="53636A"/>
@@ -11849,6 +12535,7 @@
           <a:lstStyle xmlns:a="http://schemas.openxmlformats.org/drawingml/2006/main"/>
           <a:p xmlns:a="http://schemas.openxmlformats.org/drawingml/2006/main">
             <a:pPr>
+              <a:buNone/>
               <a:defRPr sz="825" b="1">
                 <a:solidFill>
                   <a:srgbClr val="53636A"/>
@@ -11892,6 +12579,7 @@
           <a:lstStyle xmlns:a="http://schemas.openxmlformats.org/drawingml/2006/main"/>
           <a:p xmlns:a="http://schemas.openxmlformats.org/drawingml/2006/main">
             <a:pPr>
+              <a:buNone/>
               <a:defRPr sz="1500" b="1">
                 <a:solidFill>
                   <a:srgbClr val="15252D"/>
@@ -11935,6 +12623,7 @@
           <a:lstStyle xmlns:a="http://schemas.openxmlformats.org/drawingml/2006/main"/>
           <a:p xmlns:a="http://schemas.openxmlformats.org/drawingml/2006/main">
             <a:pPr>
+              <a:buNone/>
               <a:defRPr sz="900">
                 <a:solidFill>
                   <a:srgbClr val="53636A"/>
@@ -11950,6 +12639,7 @@
           </a:p>
           <a:p xmlns:a="http://schemas.openxmlformats.org/drawingml/2006/main">
             <a:pPr>
+              <a:buNone/>
               <a:defRPr sz="900">
                 <a:solidFill>
                   <a:srgbClr val="53636A"/>
@@ -11993,6 +12683,7 @@
           <a:lstStyle xmlns:a="http://schemas.openxmlformats.org/drawingml/2006/main"/>
           <a:p xmlns:a="http://schemas.openxmlformats.org/drawingml/2006/main">
             <a:pPr algn="ctr">
+              <a:buNone/>
               <a:defRPr sz="1575" b="1">
                 <a:solidFill>
                   <a:srgbClr val="53636A"/>
@@ -12063,6 +12754,7 @@
           <a:lstStyle xmlns:a="http://schemas.openxmlformats.org/drawingml/2006/main"/>
           <a:p xmlns:a="http://schemas.openxmlformats.org/drawingml/2006/main">
             <a:pPr>
+              <a:buNone/>
               <a:defRPr sz="825" b="1">
                 <a:solidFill>
                   <a:srgbClr val="53636A"/>
@@ -12106,6 +12798,7 @@
           <a:lstStyle xmlns:a="http://schemas.openxmlformats.org/drawingml/2006/main"/>
           <a:p xmlns:a="http://schemas.openxmlformats.org/drawingml/2006/main">
             <a:pPr>
+              <a:buNone/>
               <a:defRPr sz="1500" b="1">
                 <a:solidFill>
                   <a:srgbClr val="15252D"/>
@@ -12149,6 +12842,7 @@
           <a:lstStyle xmlns:a="http://schemas.openxmlformats.org/drawingml/2006/main"/>
           <a:p xmlns:a="http://schemas.openxmlformats.org/drawingml/2006/main">
             <a:pPr>
+              <a:buNone/>
               <a:defRPr sz="900">
                 <a:solidFill>
                   <a:srgbClr val="53636A"/>
@@ -12164,6 +12858,7 @@
           </a:p>
           <a:p xmlns:a="http://schemas.openxmlformats.org/drawingml/2006/main">
             <a:pPr>
+              <a:buNone/>
               <a:defRPr sz="900">
                 <a:solidFill>
                   <a:srgbClr val="53636A"/>
@@ -12207,6 +12902,7 @@
           <a:lstStyle xmlns:a="http://schemas.openxmlformats.org/drawingml/2006/main"/>
           <a:p xmlns:a="http://schemas.openxmlformats.org/drawingml/2006/main">
             <a:pPr algn="ctr">
+              <a:buNone/>
               <a:defRPr sz="1575" b="1">
                 <a:solidFill>
                   <a:srgbClr val="53636A"/>
@@ -12277,6 +12973,7 @@
           <a:lstStyle xmlns:a="http://schemas.openxmlformats.org/drawingml/2006/main"/>
           <a:p xmlns:a="http://schemas.openxmlformats.org/drawingml/2006/main">
             <a:pPr>
+              <a:buNone/>
               <a:defRPr sz="825" b="1">
                 <a:solidFill>
                   <a:srgbClr val="53636A"/>
@@ -12320,6 +13017,7 @@
           <a:lstStyle xmlns:a="http://schemas.openxmlformats.org/drawingml/2006/main"/>
           <a:p xmlns:a="http://schemas.openxmlformats.org/drawingml/2006/main">
             <a:pPr>
+              <a:buNone/>
               <a:defRPr sz="1500" b="1">
                 <a:solidFill>
                   <a:srgbClr val="15252D"/>
@@ -12363,6 +13061,7 @@
           <a:lstStyle xmlns:a="http://schemas.openxmlformats.org/drawingml/2006/main"/>
           <a:p xmlns:a="http://schemas.openxmlformats.org/drawingml/2006/main">
             <a:pPr>
+              <a:buNone/>
               <a:defRPr sz="900">
                 <a:solidFill>
                   <a:srgbClr val="53636A"/>
@@ -12378,6 +13077,7 @@
           </a:p>
           <a:p xmlns:a="http://schemas.openxmlformats.org/drawingml/2006/main">
             <a:pPr>
+              <a:buNone/>
               <a:defRPr sz="900">
                 <a:solidFill>
                   <a:srgbClr val="53636A"/>
@@ -12450,6 +13150,7 @@
           <a:lstStyle xmlns:a="http://schemas.openxmlformats.org/drawingml/2006/main"/>
           <a:p xmlns:a="http://schemas.openxmlformats.org/drawingml/2006/main">
             <a:pPr algn="ctr">
+              <a:buNone/>
               <a:defRPr sz="675" b="1">
                 <a:solidFill>
                   <a:srgbClr val="176C96"/>
@@ -12493,6 +13194,7 @@
           <a:lstStyle xmlns:a="http://schemas.openxmlformats.org/drawingml/2006/main"/>
           <a:p xmlns:a="http://schemas.openxmlformats.org/drawingml/2006/main">
             <a:pPr>
+              <a:buNone/>
               <a:defRPr sz="1050">
                 <a:solidFill>
                   <a:srgbClr val="53636A"/>
@@ -12565,6 +13267,7 @@
           <a:lstStyle xmlns:a="http://schemas.openxmlformats.org/drawingml/2006/main"/>
           <a:p xmlns:a="http://schemas.openxmlformats.org/drawingml/2006/main">
             <a:pPr algn="ctr">
+              <a:buNone/>
               <a:defRPr sz="675" b="1">
                 <a:solidFill>
                   <a:srgbClr val="2F8A61"/>
@@ -12608,6 +13311,7 @@
           <a:lstStyle xmlns:a="http://schemas.openxmlformats.org/drawingml/2006/main"/>
           <a:p xmlns:a="http://schemas.openxmlformats.org/drawingml/2006/main">
             <a:pPr>
+              <a:buNone/>
               <a:defRPr sz="1050">
                 <a:solidFill>
                   <a:srgbClr val="53636A"/>
@@ -12684,6 +13388,7 @@
           <a:lstStyle xmlns:a="http://schemas.openxmlformats.org/drawingml/2006/main"/>
           <a:p xmlns:a="http://schemas.openxmlformats.org/drawingml/2006/main">
             <a:pPr>
+              <a:buNone/>
               <a:defRPr sz="675">
                 <a:solidFill>
                   <a:srgbClr val="53636A"/>
@@ -12694,7 +13399,7 @@
               </a:defRPr>
             </a:pPr>
             <a:r>
-              <a:t>Sources: final_key_results_summary.md; final_figure_validation_checks.csv</a:t>
+              <a:t>Source: results/pipeline/longcycler_release_claim_registry.json</a:t>
             </a:r>
           </a:p>
         </p:txBody>
@@ -12727,6 +13432,7 @@
           <a:lstStyle xmlns:a="http://schemas.openxmlformats.org/drawingml/2006/main"/>
           <a:p xmlns:a="http://schemas.openxmlformats.org/drawingml/2006/main">
             <a:pPr algn="r">
+              <a:buNone/>
               <a:defRPr sz="750" b="1">
                 <a:solidFill>
                   <a:srgbClr val="53636A"/>
@@ -12819,6 +13525,7 @@
           <a:lstStyle xmlns:a="http://schemas.openxmlformats.org/drawingml/2006/main"/>
           <a:p xmlns:a="http://schemas.openxmlformats.org/drawingml/2006/main">
             <a:pPr>
+              <a:buNone/>
               <a:defRPr sz="900" b="1">
                 <a:solidFill>
                   <a:srgbClr val="C95722"/>
@@ -12862,6 +13569,7 @@
           <a:lstStyle xmlns:a="http://schemas.openxmlformats.org/drawingml/2006/main"/>
           <a:p xmlns:a="http://schemas.openxmlformats.org/drawingml/2006/main">
             <a:pPr algn="l">
+              <a:buNone/>
               <a:defRPr sz="825" b="1">
                 <a:solidFill>
                   <a:srgbClr val="53636A"/>
@@ -12905,6 +13613,7 @@
           <a:lstStyle xmlns:a="http://schemas.openxmlformats.org/drawingml/2006/main"/>
           <a:p xmlns:a="http://schemas.openxmlformats.org/drawingml/2006/main">
             <a:pPr>
+              <a:buNone/>
               <a:defRPr sz="2775" b="1">
                 <a:solidFill>
                   <a:srgbClr val="15252D"/>
@@ -12915,7 +13624,15 @@
               </a:defRPr>
             </a:pPr>
             <a:r>
-              <a:t>A UTI episode must satisfy two clinical conditions.</a:t>
+              <a:rPr sz="2400" b="1">
+                <a:solidFill>
+                  <a:srgbClr val="15252D"/>
+                </a:solidFill>
+                <a:latin typeface="Georgia"/>
+                <a:ea typeface="Georgia"/>
+                <a:cs typeface="Georgia"/>
+              </a:rPr>
+              <a:t>Operational UTI requires culture and compatible symptoms.</a:t>
             </a:r>
           </a:p>
         </p:txBody>
@@ -12948,6 +13665,7 @@
           <a:lstStyle xmlns:a="http://schemas.openxmlformats.org/drawingml/2006/main"/>
           <a:p xmlns:a="http://schemas.openxmlformats.org/drawingml/2006/main">
             <a:pPr>
+              <a:buNone/>
               <a:defRPr sz="1125">
                 <a:solidFill>
                   <a:srgbClr val="53636A"/>
@@ -13018,6 +13736,7 @@
           <a:lstStyle xmlns:a="http://schemas.openxmlformats.org/drawingml/2006/main"/>
           <a:p xmlns:a="http://schemas.openxmlformats.org/drawingml/2006/main">
             <a:pPr>
+              <a:buNone/>
               <a:defRPr sz="2325" b="1">
                 <a:solidFill>
                   <a:srgbClr val="15252D"/>
@@ -13028,7 +13747,7 @@
               </a:defRPr>
             </a:pPr>
             <a:r>
-              <a:t>583</a:t>
+              <a:t>532</a:t>
             </a:r>
           </a:p>
         </p:txBody>
@@ -13061,6 +13780,7 @@
           <a:lstStyle xmlns:a="http://schemas.openxmlformats.org/drawingml/2006/main"/>
           <a:p xmlns:a="http://schemas.openxmlformats.org/drawingml/2006/main">
             <a:pPr>
+              <a:buNone/>
               <a:defRPr sz="1125" b="1">
                 <a:solidFill>
                   <a:srgbClr val="15252D"/>
@@ -13071,7 +13791,7 @@
               </a:defRPr>
             </a:pPr>
             <a:r>
-              <a:t>primary clinical episodes assessed</a:t>
+              <a:t>selected Longcycler-linked episodes assessed</a:t>
             </a:r>
           </a:p>
         </p:txBody>
@@ -13104,6 +13824,7 @@
           <a:lstStyle xmlns:a="http://schemas.openxmlformats.org/drawingml/2006/main"/>
           <a:p xmlns:a="http://schemas.openxmlformats.org/drawingml/2006/main">
             <a:pPr>
+              <a:buNone/>
               <a:defRPr sz="1425" b="1">
                 <a:solidFill>
                   <a:srgbClr val="53636A"/>
@@ -13114,7 +13835,7 @@
               </a:defRPr>
             </a:pPr>
             <a:r>
-              <a:t>v</a:t>
+              <a:t>↓</a:t>
             </a:r>
           </a:p>
         </p:txBody>
@@ -13174,6 +13895,7 @@
           <a:lstStyle xmlns:a="http://schemas.openxmlformats.org/drawingml/2006/main"/>
           <a:p xmlns:a="http://schemas.openxmlformats.org/drawingml/2006/main">
             <a:pPr>
+              <a:buNone/>
               <a:defRPr sz="750" b="1">
                 <a:solidFill>
                   <a:srgbClr val="53636A"/>
@@ -13217,6 +13939,7 @@
           <a:lstStyle xmlns:a="http://schemas.openxmlformats.org/drawingml/2006/main"/>
           <a:p xmlns:a="http://schemas.openxmlformats.org/drawingml/2006/main">
             <a:pPr>
+              <a:buNone/>
               <a:defRPr sz="1575" b="1">
                 <a:solidFill>
                   <a:srgbClr val="15252D"/>
@@ -13232,6 +13955,7 @@
           </a:p>
           <a:p xmlns:a="http://schemas.openxmlformats.org/drawingml/2006/main">
             <a:pPr>
+              <a:buNone/>
               <a:defRPr sz="1575" b="1">
                 <a:solidFill>
                   <a:srgbClr val="15252D"/>
@@ -13275,6 +13999,7 @@
           <a:lstStyle xmlns:a="http://schemas.openxmlformats.org/drawingml/2006/main"/>
           <a:p xmlns:a="http://schemas.openxmlformats.org/drawingml/2006/main">
             <a:pPr algn="ctr">
+              <a:buNone/>
               <a:defRPr sz="2625" b="1">
                 <a:solidFill>
                   <a:srgbClr val="C95722"/>
@@ -13345,6 +14070,7 @@
           <a:lstStyle xmlns:a="http://schemas.openxmlformats.org/drawingml/2006/main"/>
           <a:p xmlns:a="http://schemas.openxmlformats.org/drawingml/2006/main">
             <a:pPr>
+              <a:buNone/>
               <a:defRPr sz="750" b="1">
                 <a:solidFill>
                   <a:srgbClr val="53636A"/>
@@ -13388,6 +14114,7 @@
           <a:lstStyle xmlns:a="http://schemas.openxmlformats.org/drawingml/2006/main"/>
           <a:p xmlns:a="http://schemas.openxmlformats.org/drawingml/2006/main">
             <a:pPr>
+              <a:buNone/>
               <a:defRPr sz="1575" b="1">
                 <a:solidFill>
                   <a:srgbClr val="15252D"/>
@@ -13403,6 +14130,7 @@
           </a:p>
           <a:p xmlns:a="http://schemas.openxmlformats.org/drawingml/2006/main">
             <a:pPr>
+              <a:buNone/>
               <a:defRPr sz="1575" b="1">
                 <a:solidFill>
                   <a:srgbClr val="15252D"/>
@@ -13446,6 +14174,7 @@
           <a:lstStyle xmlns:a="http://schemas.openxmlformats.org/drawingml/2006/main"/>
           <a:p xmlns:a="http://schemas.openxmlformats.org/drawingml/2006/main">
             <a:pPr>
+              <a:buNone/>
               <a:defRPr sz="900" b="1">
                 <a:solidFill>
                   <a:srgbClr val="53636A"/>
@@ -13516,6 +14245,7 @@
           <a:lstStyle xmlns:a="http://schemas.openxmlformats.org/drawingml/2006/main"/>
           <a:p xmlns:a="http://schemas.openxmlformats.org/drawingml/2006/main">
             <a:pPr>
+              <a:buNone/>
               <a:defRPr sz="1950" b="1">
                 <a:solidFill>
                   <a:srgbClr val="FFFFFF"/>
@@ -13526,7 +14256,7 @@
               </a:defRPr>
             </a:pPr>
             <a:r>
-              <a:t>UTI  |  18 episodes</a:t>
+              <a:t>UTI  |  16 episodes</a:t>
             </a:r>
           </a:p>
         </p:txBody>
@@ -13559,6 +14289,7 @@
           <a:lstStyle xmlns:a="http://schemas.openxmlformats.org/drawingml/2006/main"/>
           <a:p xmlns:a="http://schemas.openxmlformats.org/drawingml/2006/main">
             <a:pPr>
+              <a:buNone/>
               <a:defRPr sz="900">
                 <a:solidFill>
                   <a:srgbClr val="FFFFFF"/>
@@ -13629,6 +14360,7 @@
           <a:lstStyle xmlns:a="http://schemas.openxmlformats.org/drawingml/2006/main"/>
           <a:p xmlns:a="http://schemas.openxmlformats.org/drawingml/2006/main">
             <a:pPr>
+              <a:buNone/>
               <a:defRPr sz="1950" b="1">
                 <a:solidFill>
                   <a:srgbClr val="FFFFFF"/>
@@ -13639,7 +14371,7 @@
               </a:defRPr>
             </a:pPr>
             <a:r>
-              <a:t>Not_UTI  |  565 episodes</a:t>
+              <a:t>Not_UTI  |  516 episodes</a:t>
             </a:r>
           </a:p>
         </p:txBody>
@@ -13672,6 +14404,7 @@
           <a:lstStyle xmlns:a="http://schemas.openxmlformats.org/drawingml/2006/main"/>
           <a:p xmlns:a="http://schemas.openxmlformats.org/drawingml/2006/main">
             <a:pPr>
+              <a:buNone/>
               <a:defRPr sz="900">
                 <a:solidFill>
                   <a:srgbClr val="FFFFFF"/>
@@ -13744,6 +14477,7 @@
           <a:lstStyle xmlns:a="http://schemas.openxmlformats.org/drawingml/2006/main"/>
           <a:p xmlns:a="http://schemas.openxmlformats.org/drawingml/2006/main">
             <a:pPr algn="ctr">
+              <a:buNone/>
               <a:defRPr sz="675" b="1">
                 <a:solidFill>
                   <a:srgbClr val="15252D"/>
@@ -13787,6 +14521,7 @@
           <a:lstStyle xmlns:a="http://schemas.openxmlformats.org/drawingml/2006/main"/>
           <a:p xmlns:a="http://schemas.openxmlformats.org/drawingml/2006/main">
             <a:pPr>
+              <a:buNone/>
               <a:defRPr sz="975" b="1">
                 <a:solidFill>
                   <a:srgbClr val="15252D"/>
@@ -13797,7 +14532,7 @@
               </a:defRPr>
             </a:pPr>
             <a:r>
-              <a:t>This definition sets the evidence boundary for every genomic result that follows.</a:t>
+              <a:t>This versioned operational definition sets the boundary for every genomic result that follows.</a:t>
             </a:r>
           </a:p>
         </p:txBody>
@@ -13863,6 +14598,7 @@
           <a:lstStyle xmlns:a="http://schemas.openxmlformats.org/drawingml/2006/main"/>
           <a:p xmlns:a="http://schemas.openxmlformats.org/drawingml/2006/main">
             <a:pPr>
+              <a:buNone/>
               <a:defRPr sz="675">
                 <a:solidFill>
                   <a:srgbClr val="53636A"/>
@@ -13873,7 +14609,7 @@
               </a:defRPr>
             </a:pPr>
             <a:r>
-              <a:t>Source: current primary rule; final_figure_validation_checks.csv (n=583, UTI=18, Not_UTI=565)</a:t>
+              <a:t>Source: selected cohort (n=532, UTI=16, Not_UTI=516)</a:t>
             </a:r>
           </a:p>
         </p:txBody>
@@ -13906,6 +14642,7 @@
           <a:lstStyle xmlns:a="http://schemas.openxmlformats.org/drawingml/2006/main"/>
           <a:p xmlns:a="http://schemas.openxmlformats.org/drawingml/2006/main">
             <a:pPr algn="r">
+              <a:buNone/>
               <a:defRPr sz="750" b="1">
                 <a:solidFill>
                   <a:srgbClr val="53636A"/>
@@ -13998,6 +14735,7 @@
           <a:lstStyle xmlns:a="http://schemas.openxmlformats.org/drawingml/2006/main"/>
           <a:p xmlns:a="http://schemas.openxmlformats.org/drawingml/2006/main">
             <a:pPr>
+              <a:buNone/>
               <a:defRPr sz="900" b="1">
                 <a:solidFill>
                   <a:srgbClr val="C95722"/>
@@ -14041,6 +14779,7 @@
           <a:lstStyle xmlns:a="http://schemas.openxmlformats.org/drawingml/2006/main"/>
           <a:p xmlns:a="http://schemas.openxmlformats.org/drawingml/2006/main">
             <a:pPr algn="l">
+              <a:buNone/>
               <a:defRPr sz="825" b="1">
                 <a:solidFill>
                   <a:srgbClr val="53636A"/>
@@ -14084,6 +14823,7 @@
           <a:lstStyle xmlns:a="http://schemas.openxmlformats.org/drawingml/2006/main"/>
           <a:p xmlns:a="http://schemas.openxmlformats.org/drawingml/2006/main">
             <a:pPr>
+              <a:buNone/>
               <a:defRPr sz="2775" b="1">
                 <a:solidFill>
                   <a:srgbClr val="15252D"/>
@@ -14127,6 +14867,7 @@
           <a:lstStyle xmlns:a="http://schemas.openxmlformats.org/drawingml/2006/main"/>
           <a:p xmlns:a="http://schemas.openxmlformats.org/drawingml/2006/main">
             <a:pPr>
+              <a:buNone/>
               <a:defRPr sz="1125">
                 <a:solidFill>
                   <a:srgbClr val="53636A"/>
@@ -14199,6 +14940,7 @@
           <a:lstStyle xmlns:a="http://schemas.openxmlformats.org/drawingml/2006/main"/>
           <a:p xmlns:a="http://schemas.openxmlformats.org/drawingml/2006/main">
             <a:pPr algn="ctr">
+              <a:buNone/>
               <a:defRPr sz="675" b="1">
                 <a:solidFill>
                   <a:srgbClr val="176C96"/>
@@ -14302,6 +15044,7 @@
           <a:lstStyle xmlns:a="http://schemas.openxmlformats.org/drawingml/2006/main"/>
           <a:p xmlns:a="http://schemas.openxmlformats.org/drawingml/2006/main">
             <a:pPr>
+              <a:buNone/>
               <a:defRPr sz="1050" b="1">
                 <a:solidFill>
                   <a:srgbClr val="15252D"/>
@@ -14312,7 +15055,7 @@
               </a:defRPr>
             </a:pPr>
             <a:r>
-              <a:t>Input batches</a:t>
+              <a:t>Operational phenotype</a:t>
             </a:r>
           </a:p>
         </p:txBody>
@@ -14345,6 +15088,7 @@
           <a:lstStyle xmlns:a="http://schemas.openxmlformats.org/drawingml/2006/main"/>
           <a:p xmlns:a="http://schemas.openxmlformats.org/drawingml/2006/main">
             <a:pPr>
+              <a:buNone/>
               <a:defRPr sz="675">
                 <a:solidFill>
                   <a:srgbClr val="53636A"/>
@@ -14355,7 +15099,7 @@
               </a:defRPr>
             </a:pPr>
             <a:r>
-              <a:t>00a_load_clean_clinical.R</a:t>
+              <a:t>00a / 00b clinical classification</a:t>
             </a:r>
           </a:p>
         </p:txBody>
@@ -14388,6 +15132,7 @@
           <a:lstStyle xmlns:a="http://schemas.openxmlformats.org/drawingml/2006/main"/>
           <a:p xmlns:a="http://schemas.openxmlformats.org/drawingml/2006/main">
             <a:pPr algn="ctr">
+              <a:buNone/>
               <a:defRPr sz="1575" b="1">
                 <a:solidFill>
                   <a:srgbClr val="176C96"/>
@@ -14458,6 +15203,7 @@
           <a:lstStyle xmlns:a="http://schemas.openxmlformats.org/drawingml/2006/main"/>
           <a:p xmlns:a="http://schemas.openxmlformats.org/drawingml/2006/main">
             <a:pPr>
+              <a:buNone/>
               <a:defRPr sz="1050" b="1">
                 <a:solidFill>
                   <a:srgbClr val="15252D"/>
@@ -14468,7 +15214,7 @@
               </a:defRPr>
             </a:pPr>
             <a:r>
-              <a:t>Primary status</a:t>
+              <a:t>Selected cohort</a:t>
             </a:r>
           </a:p>
         </p:txBody>
@@ -14501,6 +15247,7 @@
           <a:lstStyle xmlns:a="http://schemas.openxmlformats.org/drawingml/2006/main"/>
           <a:p xmlns:a="http://schemas.openxmlformats.org/drawingml/2006/main">
             <a:pPr>
+              <a:buNone/>
               <a:defRPr sz="675">
                 <a:solidFill>
                   <a:srgbClr val="53636A"/>
@@ -14511,7 +15258,7 @@
               </a:defRPr>
             </a:pPr>
             <a:r>
-              <a:t>00b_classify_episodes.R</a:t>
+              <a:t>analysis_cohort_longcycler.csv</a:t>
             </a:r>
           </a:p>
         </p:txBody>
@@ -14544,6 +15291,7 @@
           <a:lstStyle xmlns:a="http://schemas.openxmlformats.org/drawingml/2006/main"/>
           <a:p xmlns:a="http://schemas.openxmlformats.org/drawingml/2006/main">
             <a:pPr algn="ctr">
+              <a:buNone/>
               <a:defRPr sz="1575" b="1">
                 <a:solidFill>
                   <a:srgbClr val="176C96"/>
@@ -14614,6 +15362,7 @@
           <a:lstStyle xmlns:a="http://schemas.openxmlformats.org/drawingml/2006/main"/>
           <a:p xmlns:a="http://schemas.openxmlformats.org/drawingml/2006/main">
             <a:pPr>
+              <a:buNone/>
               <a:defRPr sz="1050" b="1">
                 <a:solidFill>
                   <a:srgbClr val="15252D"/>
@@ -14657,6 +15406,7 @@
           <a:lstStyle xmlns:a="http://schemas.openxmlformats.org/drawingml/2006/main"/>
           <a:p xmlns:a="http://schemas.openxmlformats.org/drawingml/2006/main">
             <a:pPr>
+              <a:buNone/>
               <a:defRPr sz="675">
                 <a:solidFill>
                   <a:srgbClr val="53636A"/>
@@ -14667,7 +15417,7 @@
               </a:defRPr>
             </a:pPr>
             <a:r>
-              <a:t>status_map.csv</a:t>
+              <a:t>Participant_id + tp_lab</a:t>
             </a:r>
           </a:p>
         </p:txBody>
@@ -14700,6 +15450,7 @@
           <a:lstStyle xmlns:a="http://schemas.openxmlformats.org/drawingml/2006/main"/>
           <a:p xmlns:a="http://schemas.openxmlformats.org/drawingml/2006/main">
             <a:pPr algn="ctr">
+              <a:buNone/>
               <a:defRPr sz="1575" b="1">
                 <a:solidFill>
                   <a:srgbClr val="15252D"/>
@@ -14770,6 +15521,7 @@
           <a:lstStyle xmlns:a="http://schemas.openxmlformats.org/drawingml/2006/main"/>
           <a:p xmlns:a="http://schemas.openxmlformats.org/drawingml/2006/main">
             <a:pPr>
+              <a:buNone/>
               <a:defRPr sz="1125" b="1">
                 <a:solidFill>
                   <a:srgbClr val="FFFFFF"/>
@@ -14813,6 +15565,7 @@
           <a:lstStyle xmlns:a="http://schemas.openxmlformats.org/drawingml/2006/main"/>
           <a:p xmlns:a="http://schemas.openxmlformats.org/drawingml/2006/main">
             <a:pPr>
+              <a:buNone/>
               <a:defRPr sz="750">
                 <a:solidFill>
                   <a:srgbClr val="D9DDDC"/>
@@ -14885,6 +15638,7 @@
           <a:lstStyle xmlns:a="http://schemas.openxmlformats.org/drawingml/2006/main"/>
           <a:p xmlns:a="http://schemas.openxmlformats.org/drawingml/2006/main">
             <a:pPr algn="ctr">
+              <a:buNone/>
               <a:defRPr sz="675" b="1">
                 <a:solidFill>
                   <a:srgbClr val="2F8A61"/>
@@ -14988,6 +15742,7 @@
           <a:lstStyle xmlns:a="http://schemas.openxmlformats.org/drawingml/2006/main"/>
           <a:p xmlns:a="http://schemas.openxmlformats.org/drawingml/2006/main">
             <a:pPr>
+              <a:buNone/>
               <a:defRPr sz="1050" b="1">
                 <a:solidFill>
                   <a:srgbClr val="15252D"/>
@@ -14998,7 +15753,7 @@
               </a:defRPr>
             </a:pPr>
             <a:r>
-              <a:t>Assemblies</a:t>
+              <a:t>Selected assemblies</a:t>
             </a:r>
           </a:p>
         </p:txBody>
@@ -15031,6 +15786,7 @@
           <a:lstStyle xmlns:a="http://schemas.openxmlformats.org/drawingml/2006/main"/>
           <a:p xmlns:a="http://schemas.openxmlformats.org/drawingml/2006/main">
             <a:pPr>
+              <a:buNone/>
               <a:defRPr sz="675">
                 <a:solidFill>
                   <a:srgbClr val="53636A"/>
@@ -15041,7 +15797,7 @@
               </a:defRPr>
             </a:pPr>
             <a:r>
-              <a:t>FASTA / GFF inputs</a:t>
+              <a:t>QC-passing Longcycler only</a:t>
             </a:r>
           </a:p>
         </p:txBody>
@@ -15074,6 +15830,7 @@
           <a:lstStyle xmlns:a="http://schemas.openxmlformats.org/drawingml/2006/main"/>
           <a:p xmlns:a="http://schemas.openxmlformats.org/drawingml/2006/main">
             <a:pPr algn="ctr">
+              <a:buNone/>
               <a:defRPr sz="1575" b="1">
                 <a:solidFill>
                   <a:srgbClr val="2F8A61"/>
@@ -15144,6 +15901,7 @@
           <a:lstStyle xmlns:a="http://schemas.openxmlformats.org/drawingml/2006/main"/>
           <a:p xmlns:a="http://schemas.openxmlformats.org/drawingml/2006/main">
             <a:pPr>
+              <a:buNone/>
               <a:defRPr sz="1050" b="1">
                 <a:solidFill>
                   <a:srgbClr val="15252D"/>
@@ -15154,7 +15912,7 @@
               </a:defRPr>
             </a:pPr>
             <a:r>
-              <a:t>Genomic profile</a:t>
+              <a:t>Genome evidence</a:t>
             </a:r>
           </a:p>
         </p:txBody>
@@ -15187,6 +15945,7 @@
           <a:lstStyle xmlns:a="http://schemas.openxmlformats.org/drawingml/2006/main"/>
           <a:p xmlns:a="http://schemas.openxmlformats.org/drawingml/2006/main">
             <a:pPr>
+              <a:buNone/>
               <a:defRPr sz="675">
                 <a:solidFill>
                   <a:srgbClr val="53636A"/>
@@ -15197,7 +15956,7 @@
               </a:defRPr>
             </a:pPr>
             <a:r>
-              <a:t>VF + ST + SNPs</a:t>
+              <a:t>VF + ST + direct SNP pairs</a:t>
             </a:r>
           </a:p>
         </p:txBody>
@@ -15230,6 +15989,7 @@
           <a:lstStyle xmlns:a="http://schemas.openxmlformats.org/drawingml/2006/main"/>
           <a:p xmlns:a="http://schemas.openxmlformats.org/drawingml/2006/main">
             <a:pPr algn="ctr">
+              <a:buNone/>
               <a:defRPr sz="1575" b="1">
                 <a:solidFill>
                   <a:srgbClr val="2F8A61"/>
@@ -15300,6 +16060,7 @@
           <a:lstStyle xmlns:a="http://schemas.openxmlformats.org/drawingml/2006/main"/>
           <a:p xmlns:a="http://schemas.openxmlformats.org/drawingml/2006/main">
             <a:pPr>
+              <a:buNone/>
               <a:defRPr sz="1050" b="1">
                 <a:solidFill>
                   <a:srgbClr val="15252D"/>
@@ -15343,6 +16104,7 @@
           <a:lstStyle xmlns:a="http://schemas.openxmlformats.org/drawingml/2006/main"/>
           <a:p xmlns:a="http://schemas.openxmlformats.org/drawingml/2006/main">
             <a:pPr>
+              <a:buNone/>
               <a:defRPr sz="675">
                 <a:solidFill>
                   <a:srgbClr val="53636A"/>
@@ -15353,7 +16115,7 @@
               </a:defRPr>
             </a:pPr>
             <a:r>
-              <a:t>strain_compare</a:t>
+              <a:t>pairwise_metrics.csv</a:t>
             </a:r>
           </a:p>
         </p:txBody>
@@ -15386,6 +16148,7 @@
           <a:lstStyle xmlns:a="http://schemas.openxmlformats.org/drawingml/2006/main"/>
           <a:p xmlns:a="http://schemas.openxmlformats.org/drawingml/2006/main">
             <a:pPr algn="ctr">
+              <a:buNone/>
               <a:defRPr sz="1575" b="1">
                 <a:solidFill>
                   <a:srgbClr val="15252D"/>
@@ -15456,6 +16219,7 @@
           <a:lstStyle xmlns:a="http://schemas.openxmlformats.org/drawingml/2006/main"/>
           <a:p xmlns:a="http://schemas.openxmlformats.org/drawingml/2006/main">
             <a:pPr>
+              <a:buNone/>
               <a:defRPr sz="1125" b="1">
                 <a:solidFill>
                   <a:srgbClr val="FFFFFF"/>
@@ -15488,17 +16252,18 @@
         <p:spPr>
           <a:xfrm xmlns:a="http://schemas.openxmlformats.org/drawingml/2006/main">
             <a:off x="7553325" y="3794760"/>
-            <a:ext cx="1393888" cy="205740"/>
-          </a:xfrm>
-          <a:prstGeom xmlns:a="http://schemas.openxmlformats.org/drawingml/2006/main" prst="rect">
-            <a:avLst/>
-          </a:prstGeom>
-        </p:spPr>
-        <p:txBody>
-          <a:bodyPr xmlns:a="http://schemas.openxmlformats.org/drawingml/2006/main" lIns="0" tIns="0" rIns="0" bIns="0"/>
-          <a:lstStyle xmlns:a="http://schemas.openxmlformats.org/drawingml/2006/main"/>
-          <a:p xmlns:a="http://schemas.openxmlformats.org/drawingml/2006/main">
-            <a:pPr>
+            <a:ext cx="1809750" cy="205740"/>
+          </a:xfrm>
+          <a:prstGeom xmlns:a="http://schemas.openxmlformats.org/drawingml/2006/main" prst="rect">
+            <a:avLst/>
+          </a:prstGeom>
+        </p:spPr>
+        <p:txBody>
+          <a:bodyPr xmlns:a="http://schemas.openxmlformats.org/drawingml/2006/main" lIns="0" tIns="0" rIns="0" bIns="0"/>
+          <a:lstStyle xmlns:a="http://schemas.openxmlformats.org/drawingml/2006/main"/>
+          <a:p xmlns:a="http://schemas.openxmlformats.org/drawingml/2006/main">
+            <a:pPr>
+              <a:buNone/>
               <a:defRPr sz="675">
                 <a:solidFill>
                   <a:srgbClr val="D9DDDC"/>
@@ -15509,6 +16274,14 @@
               </a:defRPr>
             </a:pPr>
             <a:r>
+              <a:rPr sz="600">
+                <a:solidFill>
+                  <a:srgbClr val="D9DDDC"/>
+                </a:solidFill>
+                <a:latin typeface="Menlo"/>
+                <a:ea typeface="Menlo"/>
+                <a:cs typeface="Menlo"/>
+              </a:rPr>
               <a:t>not_uti_to_uti_casebook.csv</a:t>
             </a:r>
           </a:p>
@@ -15569,6 +16342,7 @@
           <a:lstStyle xmlns:a="http://schemas.openxmlformats.org/drawingml/2006/main"/>
           <a:p xmlns:a="http://schemas.openxmlformats.org/drawingml/2006/main">
             <a:pPr>
+              <a:buNone/>
               <a:defRPr sz="750" b="1">
                 <a:solidFill>
                   <a:srgbClr val="C95722"/>
@@ -15612,6 +16386,7 @@
           <a:lstStyle xmlns:a="http://schemas.openxmlformats.org/drawingml/2006/main"/>
           <a:p xmlns:a="http://schemas.openxmlformats.org/drawingml/2006/main">
             <a:pPr>
+              <a:buNone/>
               <a:defRPr sz="1200" b="1">
                 <a:solidFill>
                   <a:srgbClr val="15252D"/>
@@ -15622,7 +16397,7 @@
               </a:defRPr>
             </a:pPr>
             <a:r>
-              <a:t>Final figure pack: denominator -&gt; transitions -&gt; host context -&gt; robustness</a:t>
+              <a:t>Release layer: denominator -&gt; direct pairs -&gt; transitions -&gt; RQ01-RQ10</a:t>
             </a:r>
           </a:p>
         </p:txBody>
@@ -15644,17 +16419,18 @@
         <p:spPr>
           <a:xfrm xmlns:a="http://schemas.openxmlformats.org/drawingml/2006/main">
             <a:off x="8991600" y="4652010"/>
-            <a:ext cx="1261491" cy="228600"/>
-          </a:xfrm>
-          <a:prstGeom xmlns:a="http://schemas.openxmlformats.org/drawingml/2006/main" prst="rect">
-            <a:avLst/>
-          </a:prstGeom>
-        </p:spPr>
-        <p:txBody>
-          <a:bodyPr xmlns:a="http://schemas.openxmlformats.org/drawingml/2006/main" lIns="0" tIns="0" rIns="0" bIns="0"/>
-          <a:lstStyle xmlns:a="http://schemas.openxmlformats.org/drawingml/2006/main"/>
-          <a:p xmlns:a="http://schemas.openxmlformats.org/drawingml/2006/main">
-            <a:pPr>
+            <a:ext cx="2095500" cy="228600"/>
+          </a:xfrm>
+          <a:prstGeom xmlns:a="http://schemas.openxmlformats.org/drawingml/2006/main" prst="rect">
+            <a:avLst/>
+          </a:prstGeom>
+        </p:spPr>
+        <p:txBody>
+          <a:bodyPr xmlns:a="http://schemas.openxmlformats.org/drawingml/2006/main" lIns="0" tIns="0" rIns="0" bIns="0"/>
+          <a:lstStyle xmlns:a="http://schemas.openxmlformats.org/drawingml/2006/main"/>
+          <a:p xmlns:a="http://schemas.openxmlformats.org/drawingml/2006/main">
+            <a:pPr>
+              <a:buNone/>
               <a:defRPr sz="750">
                 <a:solidFill>
                   <a:srgbClr val="53636A"/>
@@ -15665,7 +16441,15 @@
               </a:defRPr>
             </a:pPr>
             <a:r>
-              <a:t>35_final_figure_pack.R</a:t>
+              <a:rPr sz="600">
+                <a:solidFill>
+                  <a:srgbClr val="53636A"/>
+                </a:solidFill>
+                <a:latin typeface="Menlo"/>
+                <a:ea typeface="Menlo"/>
+                <a:cs typeface="Menlo"/>
+              </a:rPr>
+              <a:t>RUN_COMPLETE_ANALYSIS.sh</a:t>
             </a:r>
           </a:p>
         </p:txBody>
@@ -15731,6 +16515,7 @@
           <a:lstStyle xmlns:a="http://schemas.openxmlformats.org/drawingml/2006/main"/>
           <a:p xmlns:a="http://schemas.openxmlformats.org/drawingml/2006/main">
             <a:pPr>
+              <a:buNone/>
               <a:defRPr sz="675">
                 <a:solidFill>
                   <a:srgbClr val="53636A"/>
@@ -15741,7 +16526,7 @@
               </a:defRPr>
             </a:pPr>
             <a:r>
-              <a:t>Source: docs/pipeline_architecture.md; canonical outputs and scripts named on slide</a:t>
+              <a:t>Source: central selected cohort, claim registry and final-run evidence products</a:t>
             </a:r>
           </a:p>
         </p:txBody>
@@ -15774,6 +16559,7 @@
           <a:lstStyle xmlns:a="http://schemas.openxmlformats.org/drawingml/2006/main"/>
           <a:p xmlns:a="http://schemas.openxmlformats.org/drawingml/2006/main">
             <a:pPr algn="r">
+              <a:buNone/>
               <a:defRPr sz="750" b="1">
                 <a:solidFill>
                   <a:srgbClr val="53636A"/>
@@ -15866,6 +16652,7 @@
           <a:lstStyle xmlns:a="http://schemas.openxmlformats.org/drawingml/2006/main"/>
           <a:p xmlns:a="http://schemas.openxmlformats.org/drawingml/2006/main">
             <a:pPr>
+              <a:buNone/>
               <a:defRPr sz="900" b="1">
                 <a:solidFill>
                   <a:srgbClr val="C95722"/>
@@ -15909,6 +16696,7 @@
           <a:lstStyle xmlns:a="http://schemas.openxmlformats.org/drawingml/2006/main"/>
           <a:p xmlns:a="http://schemas.openxmlformats.org/drawingml/2006/main">
             <a:pPr algn="l">
+              <a:buNone/>
               <a:defRPr sz="825" b="1">
                 <a:solidFill>
                   <a:srgbClr val="53636A"/>
@@ -15952,6 +16740,7 @@
           <a:lstStyle xmlns:a="http://schemas.openxmlformats.org/drawingml/2006/main"/>
           <a:p xmlns:a="http://schemas.openxmlformats.org/drawingml/2006/main">
             <a:pPr>
+              <a:buNone/>
               <a:defRPr sz="2775" b="1">
                 <a:solidFill>
                   <a:srgbClr val="15252D"/>
@@ -15962,7 +16751,7 @@
               </a:defRPr>
             </a:pPr>
             <a:r>
-              <a:t>The dataset is rich; the UTI denominator is small.</a:t>
+              <a:t>Rich dataset; sparse operational UTI outcome.</a:t>
             </a:r>
           </a:p>
         </p:txBody>
@@ -15995,6 +16784,7 @@
           <a:lstStyle xmlns:a="http://schemas.openxmlformats.org/drawingml/2006/main"/>
           <a:p xmlns:a="http://schemas.openxmlformats.org/drawingml/2006/main">
             <a:pPr>
+              <a:buNone/>
               <a:defRPr sz="1125">
                 <a:solidFill>
                   <a:srgbClr val="53636A"/>
@@ -16039,18 +16829,18 @@
       </p:sp>
       <p:pic>
         <p:nvPicPr>
-          <p:cNvPr id="7" name=""/>
+          <p:cNvPr id="31" name=""/>
           <p:cNvPicPr>
             <a:picLocks xmlns:a="http://schemas.openxmlformats.org/drawingml/2006/main" noChangeAspect="1"/>
           </p:cNvPicPr>
           <p:nvPr/>
         </p:nvPicPr>
         <p:blipFill>
-          <a:blip xmlns:r="http://schemas.openxmlformats.org/officeDocument/2006/relationships" xmlns:a="http://schemas.openxmlformats.org/drawingml/2006/main" r:embed="Re44aa18da4f1480b"/>
+          <a:blip xmlns:r="http://schemas.openxmlformats.org/officeDocument/2006/relationships" xmlns:a="http://schemas.openxmlformats.org/drawingml/2006/main" r:embed="R459e2d15a45f40ca"/>
           <a:stretch xmlns:a="http://schemas.openxmlformats.org/drawingml/2006/main"/>
         </p:blipFill>
         <p:spPr>
-          <a:xfrm xmlns:a="http://schemas.openxmlformats.org/drawingml/2006/main">
+          <a:xfrm xmlns:a="http://schemas.openxmlformats.org/drawingml/2006/main" flipH="0" flipV="0">
             <a:off x="628650" y="2128647"/>
             <a:ext cx="7829550" cy="3027426"/>
           </a:xfrm>
@@ -16087,6 +16877,7 @@
           <a:lstStyle xmlns:a="http://schemas.openxmlformats.org/drawingml/2006/main"/>
           <a:p xmlns:a="http://schemas.openxmlformats.org/drawingml/2006/main">
             <a:pPr>
+              <a:buNone/>
               <a:defRPr sz="1125" b="1">
                 <a:solidFill>
                   <a:srgbClr val="176C96"/>
@@ -16130,6 +16921,7 @@
           <a:lstStyle xmlns:a="http://schemas.openxmlformats.org/drawingml/2006/main"/>
           <a:p xmlns:a="http://schemas.openxmlformats.org/drawingml/2006/main">
             <a:pPr>
+              <a:buNone/>
               <a:defRPr sz="750" b="1">
                 <a:solidFill>
                   <a:srgbClr val="53636A"/>
@@ -16189,17 +16981,18 @@
         <p:spPr>
           <a:xfrm xmlns:a="http://schemas.openxmlformats.org/drawingml/2006/main">
             <a:off x="8877300" y="1927860"/>
-            <a:ext cx="467392" cy="537210"/>
-          </a:xfrm>
-          <a:prstGeom xmlns:a="http://schemas.openxmlformats.org/drawingml/2006/main" prst="rect">
-            <a:avLst/>
-          </a:prstGeom>
-        </p:spPr>
-        <p:txBody>
-          <a:bodyPr xmlns:a="http://schemas.openxmlformats.org/drawingml/2006/main" lIns="0" tIns="0" rIns="0" bIns="0"/>
-          <a:lstStyle xmlns:a="http://schemas.openxmlformats.org/drawingml/2006/main"/>
-          <a:p xmlns:a="http://schemas.openxmlformats.org/drawingml/2006/main">
-            <a:pPr>
+            <a:ext cx="952500" cy="552450"/>
+          </a:xfrm>
+          <a:prstGeom xmlns:a="http://schemas.openxmlformats.org/drawingml/2006/main" prst="rect">
+            <a:avLst/>
+          </a:prstGeom>
+        </p:spPr>
+        <p:txBody>
+          <a:bodyPr xmlns:a="http://schemas.openxmlformats.org/drawingml/2006/main" lIns="0" tIns="0" rIns="0" bIns="0"/>
+          <a:lstStyle xmlns:a="http://schemas.openxmlformats.org/drawingml/2006/main"/>
+          <a:p xmlns:a="http://schemas.openxmlformats.org/drawingml/2006/main">
+            <a:pPr>
+              <a:buNone/>
               <a:defRPr sz="3525" b="1">
                 <a:solidFill>
                   <a:srgbClr val="C95722"/>
@@ -16210,7 +17003,15 @@
               </a:defRPr>
             </a:pPr>
             <a:r>
-              <a:t>17</a:t>
+              <a:rPr sz="3225" b="1">
+                <a:solidFill>
+                  <a:srgbClr val="C95722"/>
+                </a:solidFill>
+                <a:latin typeface="Georgia"/>
+                <a:ea typeface="Georgia"/>
+                <a:cs typeface="Georgia"/>
+              </a:rPr>
+              <a:t>16</a:t>
             </a:r>
           </a:p>
         </p:txBody>
@@ -16243,6 +17044,7 @@
           <a:lstStyle xmlns:a="http://schemas.openxmlformats.org/drawingml/2006/main"/>
           <a:p xmlns:a="http://schemas.openxmlformats.org/drawingml/2006/main">
             <a:pPr>
+              <a:buNone/>
               <a:defRPr sz="900" b="1">
                 <a:solidFill>
                   <a:srgbClr val="15252D"/>
@@ -16253,11 +17055,12 @@
               </a:defRPr>
             </a:pPr>
             <a:r>
-              <a:t>UTI episodes in the</a:t>
-            </a:r>
-          </a:p>
-          <a:p xmlns:a="http://schemas.openxmlformats.org/drawingml/2006/main">
-            <a:pPr>
+              <a:t>operational UTI episodes</a:t>
+            </a:r>
+          </a:p>
+          <a:p xmlns:a="http://schemas.openxmlformats.org/drawingml/2006/main">
+            <a:pPr>
+              <a:buNone/>
               <a:defRPr sz="900" b="1">
                 <a:solidFill>
                   <a:srgbClr val="15252D"/>
@@ -16268,7 +17071,7 @@
               </a:defRPr>
             </a:pPr>
             <a:r>
-              <a:t>VF/model-ready cohort</a:t>
+              <a:t>in the selected cohort</a:t>
             </a:r>
           </a:p>
         </p:txBody>
@@ -16317,17 +17120,18 @@
         <p:spPr>
           <a:xfrm xmlns:a="http://schemas.openxmlformats.org/drawingml/2006/main">
             <a:off x="8877300" y="3137535"/>
-            <a:ext cx="499110" cy="320040"/>
-          </a:xfrm>
-          <a:prstGeom xmlns:a="http://schemas.openxmlformats.org/drawingml/2006/main" prst="rect">
-            <a:avLst/>
-          </a:prstGeom>
-        </p:spPr>
-        <p:txBody>
-          <a:bodyPr xmlns:a="http://schemas.openxmlformats.org/drawingml/2006/main" lIns="0" tIns="0" rIns="0" bIns="0"/>
-          <a:lstStyle xmlns:a="http://schemas.openxmlformats.org/drawingml/2006/main"/>
-          <a:p xmlns:a="http://schemas.openxmlformats.org/drawingml/2006/main">
-            <a:pPr>
+            <a:ext cx="952500" cy="320040"/>
+          </a:xfrm>
+          <a:prstGeom xmlns:a="http://schemas.openxmlformats.org/drawingml/2006/main" prst="rect">
+            <a:avLst/>
+          </a:prstGeom>
+        </p:spPr>
+        <p:txBody>
+          <a:bodyPr xmlns:a="http://schemas.openxmlformats.org/drawingml/2006/main" lIns="0" tIns="0" rIns="0" bIns="0"/>
+          <a:lstStyle xmlns:a="http://schemas.openxmlformats.org/drawingml/2006/main"/>
+          <a:p xmlns:a="http://schemas.openxmlformats.org/drawingml/2006/main">
+            <a:pPr>
+              <a:buNone/>
               <a:defRPr sz="2100" b="1">
                 <a:solidFill>
                   <a:srgbClr val="176C96"/>
@@ -16338,7 +17142,7 @@
               </a:defRPr>
             </a:pPr>
             <a:r>
-              <a:t>539</a:t>
+              <a:t>516</a:t>
             </a:r>
           </a:p>
         </p:txBody>
@@ -16371,6 +17175,7 @@
           <a:lstStyle xmlns:a="http://schemas.openxmlformats.org/drawingml/2006/main"/>
           <a:p xmlns:a="http://schemas.openxmlformats.org/drawingml/2006/main">
             <a:pPr>
+              <a:buNone/>
               <a:defRPr sz="900" b="1">
                 <a:solidFill>
                   <a:srgbClr val="15252D"/>
@@ -16441,6 +17246,7 @@
           <a:lstStyle xmlns:a="http://schemas.openxmlformats.org/drawingml/2006/main"/>
           <a:p xmlns:a="http://schemas.openxmlformats.org/drawingml/2006/main">
             <a:pPr>
+              <a:buNone/>
               <a:defRPr sz="1050" b="1">
                 <a:solidFill>
                   <a:srgbClr val="D99518"/>
@@ -16484,6 +17290,7 @@
           <a:lstStyle xmlns:a="http://schemas.openxmlformats.org/drawingml/2006/main"/>
           <a:p xmlns:a="http://schemas.openxmlformats.org/drawingml/2006/main">
             <a:pPr>
+              <a:buNone/>
               <a:defRPr sz="900">
                 <a:solidFill>
                   <a:srgbClr val="15252D"/>
@@ -16556,6 +17363,7 @@
           <a:lstStyle xmlns:a="http://schemas.openxmlformats.org/drawingml/2006/main"/>
           <a:p xmlns:a="http://schemas.openxmlformats.org/drawingml/2006/main">
             <a:pPr algn="ctr">
+              <a:buNone/>
               <a:defRPr sz="675" b="1">
                 <a:solidFill>
                   <a:srgbClr val="15252D"/>
@@ -16632,6 +17440,7 @@
           <a:lstStyle xmlns:a="http://schemas.openxmlformats.org/drawingml/2006/main"/>
           <a:p xmlns:a="http://schemas.openxmlformats.org/drawingml/2006/main">
             <a:pPr>
+              <a:buNone/>
               <a:defRPr sz="675">
                 <a:solidFill>
                   <a:srgbClr val="53636A"/>
@@ -16642,7 +17451,7 @@
               </a:defRPr>
             </a:pPr>
             <a:r>
-              <a:t>Source: Main Figure 1; final_figure_validation_checks.csv (validated denominators)</a:t>
+              <a:t>Source: current final-run denominator figure; selected cohort only</a:t>
             </a:r>
           </a:p>
         </p:txBody>
@@ -16675,6 +17484,7 @@
           <a:lstStyle xmlns:a="http://schemas.openxmlformats.org/drawingml/2006/main"/>
           <a:p xmlns:a="http://schemas.openxmlformats.org/drawingml/2006/main">
             <a:pPr algn="r">
+              <a:buNone/>
               <a:defRPr sz="750" b="1">
                 <a:solidFill>
                   <a:srgbClr val="53636A"/>
@@ -16767,6 +17577,7 @@
           <a:lstStyle xmlns:a="http://schemas.openxmlformats.org/drawingml/2006/main"/>
           <a:p xmlns:a="http://schemas.openxmlformats.org/drawingml/2006/main">
             <a:pPr>
+              <a:buNone/>
               <a:defRPr sz="900" b="1">
                 <a:solidFill>
                   <a:srgbClr val="C95722"/>
@@ -16810,6 +17621,7 @@
           <a:lstStyle xmlns:a="http://schemas.openxmlformats.org/drawingml/2006/main"/>
           <a:p xmlns:a="http://schemas.openxmlformats.org/drawingml/2006/main">
             <a:pPr algn="l">
+              <a:buNone/>
               <a:defRPr sz="825" b="1">
                 <a:solidFill>
                   <a:srgbClr val="53636A"/>
@@ -16853,6 +17665,7 @@
           <a:lstStyle xmlns:a="http://schemas.openxmlformats.org/drawingml/2006/main"/>
           <a:p xmlns:a="http://schemas.openxmlformats.org/drawingml/2006/main">
             <a:pPr>
+              <a:buNone/>
               <a:defRPr sz="2775" b="1">
                 <a:solidFill>
                   <a:srgbClr val="15252D"/>
@@ -16863,7 +17676,7 @@
               </a:defRPr>
             </a:pPr>
             <a:r>
-              <a:t>Participant 20026 changes clinical state without measured profile acquisition.</a:t>
+              <a:t>9 operational Not_UTI-to-UTI transitions are all genomically linked.</a:t>
             </a:r>
           </a:p>
         </p:txBody>
@@ -16896,6 +17709,7 @@
           <a:lstStyle xmlns:a="http://schemas.openxmlformats.org/drawingml/2006/main"/>
           <a:p xmlns:a="http://schemas.openxmlformats.org/drawingml/2006/main">
             <a:pPr>
+              <a:buNone/>
               <a:defRPr sz="1125">
                 <a:solidFill>
                   <a:srgbClr val="53636A"/>
@@ -16906,7 +17720,7 @@
               </a:defRPr>
             </a:pPr>
             <a:r>
-              <a:t>One concrete Not_UTI to UTI transition anchors the aggregate interpretation.</a:t>
+              <a:t>Direct pair evidence is primary: 5 of 9 are at or below 25 SNPs.</a:t>
             </a:r>
           </a:p>
         </p:txBody>
@@ -16939,6 +17753,7 @@
           <a:lstStyle xmlns:a="http://schemas.openxmlformats.org/drawingml/2006/main"/>
           <a:p xmlns:a="http://schemas.openxmlformats.org/drawingml/2006/main">
             <a:pPr>
+              <a:buNone/>
               <a:defRPr sz="1125" b="1">
                 <a:solidFill>
                   <a:srgbClr val="2F8A61"/>
@@ -16982,6 +17797,7 @@
           <a:lstStyle xmlns:a="http://schemas.openxmlformats.org/drawingml/2006/main"/>
           <a:p xmlns:a="http://schemas.openxmlformats.org/drawingml/2006/main">
             <a:pPr>
+              <a:buNone/>
               <a:defRPr sz="750" b="1">
                 <a:solidFill>
                   <a:srgbClr val="53636A"/>
@@ -16992,7 +17808,7 @@
               </a:defRPr>
             </a:pPr>
             <a:r>
-              <a:t>DESCRIPTIVE WORKED EXAMPLE</a:t>
+              <a:t>DESCRIPTIVE AGGREGATE</a:t>
             </a:r>
           </a:p>
         </p:txBody>
@@ -17081,6 +17897,7 @@
           <a:lstStyle xmlns:a="http://schemas.openxmlformats.org/drawingml/2006/main"/>
           <a:p xmlns:a="http://schemas.openxmlformats.org/drawingml/2006/main">
             <a:pPr algn="ctr">
+              <a:buNone/>
               <a:defRPr sz="675" b="1">
                 <a:solidFill>
                   <a:srgbClr val="FFFFFF"/>
@@ -17124,6 +17941,7 @@
           <a:lstStyle xmlns:a="http://schemas.openxmlformats.org/drawingml/2006/main"/>
           <a:p xmlns:a="http://schemas.openxmlformats.org/drawingml/2006/main">
             <a:pPr algn="r">
+              <a:buNone/>
               <a:defRPr sz="825" b="1">
                 <a:solidFill>
                   <a:srgbClr val="53636A"/>
@@ -17134,7 +17952,7 @@
               </a:defRPr>
             </a:pPr>
             <a:r>
-              <a:t>T3</a:t>
+              <a:t>9 cases</a:t>
             </a:r>
           </a:p>
         </p:txBody>
@@ -17167,6 +17985,7 @@
           <a:lstStyle xmlns:a="http://schemas.openxmlformats.org/drawingml/2006/main"/>
           <a:p xmlns:a="http://schemas.openxmlformats.org/drawingml/2006/main">
             <a:pPr>
+              <a:buNone/>
               <a:defRPr sz="1575" b="1">
                 <a:solidFill>
                   <a:srgbClr val="15252D"/>
@@ -17177,7 +17996,7 @@
               </a:defRPr>
             </a:pPr>
             <a:r>
-              <a:t>02 Dec 2024</a:t>
+              <a:t>371 adjacent pairs</a:t>
             </a:r>
           </a:p>
         </p:txBody>
@@ -17243,6 +18062,7 @@
           <a:lstStyle xmlns:a="http://schemas.openxmlformats.org/drawingml/2006/main"/>
           <a:p xmlns:a="http://schemas.openxmlformats.org/drawingml/2006/main">
             <a:pPr>
+              <a:buNone/>
               <a:defRPr sz="900" b="1">
                 <a:solidFill>
                   <a:srgbClr val="15252D"/>
@@ -17253,7 +18073,7 @@
               </a:defRPr>
             </a:pPr>
             <a:r>
-              <a:t>10,000-100,000 CFU/mL</a:t>
+              <a:t>139 residents</a:t>
             </a:r>
           </a:p>
         </p:txBody>
@@ -17286,6 +18106,7 @@
           <a:lstStyle xmlns:a="http://schemas.openxmlformats.org/drawingml/2006/main"/>
           <a:p xmlns:a="http://schemas.openxmlformats.org/drawingml/2006/main">
             <a:pPr>
+              <a:buNone/>
               <a:defRPr sz="900">
                 <a:solidFill>
                   <a:srgbClr val="53636A"/>
@@ -17296,7 +18117,7 @@
               </a:defRPr>
             </a:pPr>
             <a:r>
-              <a:t>No defining symptoms recorded</a:t>
+              <a:t>Operational Not_UTI endpoint</a:t>
             </a:r>
           </a:p>
         </p:txBody>
@@ -17329,6 +18150,7 @@
           <a:lstStyle xmlns:a="http://schemas.openxmlformats.org/drawingml/2006/main"/>
           <a:p xmlns:a="http://schemas.openxmlformats.org/drawingml/2006/main">
             <a:pPr algn="ctr">
+              <a:buNone/>
               <a:defRPr sz="900" b="1">
                 <a:solidFill>
                   <a:srgbClr val="53636A"/>
@@ -17339,7 +18161,7 @@
               </a:defRPr>
             </a:pPr>
             <a:r>
-              <a:t>42 DAYS</a:t>
+              <a:t>25 SNP CUTOFF</a:t>
             </a:r>
           </a:p>
         </p:txBody>
@@ -17405,6 +18227,7 @@
           <a:lstStyle xmlns:a="http://schemas.openxmlformats.org/drawingml/2006/main"/>
           <a:p xmlns:a="http://schemas.openxmlformats.org/drawingml/2006/main">
             <a:pPr algn="ctr">
+              <a:buNone/>
               <a:defRPr sz="1575" b="1">
                 <a:solidFill>
                   <a:srgbClr val="2F8A61"/>
@@ -17510,6 +18333,7 @@
           <a:lstStyle xmlns:a="http://schemas.openxmlformats.org/drawingml/2006/main"/>
           <a:p xmlns:a="http://schemas.openxmlformats.org/drawingml/2006/main">
             <a:pPr algn="ctr">
+              <a:buNone/>
               <a:defRPr sz="675" b="1">
                 <a:solidFill>
                   <a:srgbClr val="FFFFFF"/>
@@ -17520,7 +18344,7 @@
               </a:defRPr>
             </a:pPr>
             <a:r>
-              <a:t>5 SNPS | STRONG LINK</a:t>
+              <a:t>5 OF 9 AT OR BELOW</a:t>
             </a:r>
           </a:p>
         </p:txBody>
@@ -17609,6 +18433,7 @@
           <a:lstStyle xmlns:a="http://schemas.openxmlformats.org/drawingml/2006/main"/>
           <a:p xmlns:a="http://schemas.openxmlformats.org/drawingml/2006/main">
             <a:pPr algn="ctr">
+              <a:buNone/>
               <a:defRPr sz="675" b="1">
                 <a:solidFill>
                   <a:srgbClr val="FFFFFF"/>
@@ -17652,6 +18477,7 @@
           <a:lstStyle xmlns:a="http://schemas.openxmlformats.org/drawingml/2006/main"/>
           <a:p xmlns:a="http://schemas.openxmlformats.org/drawingml/2006/main">
             <a:pPr algn="r">
+              <a:buNone/>
               <a:defRPr sz="825" b="1">
                 <a:solidFill>
                   <a:srgbClr val="53636A"/>
@@ -17662,7 +18488,7 @@
               </a:defRPr>
             </a:pPr>
             <a:r>
-              <a:t>UTI-1</a:t>
+              <a:t>9 linked</a:t>
             </a:r>
           </a:p>
         </p:txBody>
@@ -17695,6 +18521,7 @@
           <a:lstStyle xmlns:a="http://schemas.openxmlformats.org/drawingml/2006/main"/>
           <a:p xmlns:a="http://schemas.openxmlformats.org/drawingml/2006/main">
             <a:pPr>
+              <a:buNone/>
               <a:defRPr sz="1575" b="1">
                 <a:solidFill>
                   <a:srgbClr val="15252D"/>
@@ -17705,7 +18532,7 @@
               </a:defRPr>
             </a:pPr>
             <a:r>
-              <a:t>13 Jan 2025</a:t>
+              <a:t>9 casebook rows</a:t>
             </a:r>
           </a:p>
         </p:txBody>
@@ -17760,17 +18587,18 @@
         <p:spPr>
           <a:xfrm xmlns:a="http://schemas.openxmlformats.org/drawingml/2006/main">
             <a:off x="7429500" y="3321368"/>
-            <a:ext cx="1024795" cy="137160"/>
-          </a:xfrm>
-          <a:prstGeom xmlns:a="http://schemas.openxmlformats.org/drawingml/2006/main" prst="rect">
-            <a:avLst/>
-          </a:prstGeom>
-        </p:spPr>
-        <p:txBody>
-          <a:bodyPr xmlns:a="http://schemas.openxmlformats.org/drawingml/2006/main" lIns="0" tIns="0" rIns="0" bIns="0"/>
-          <a:lstStyle xmlns:a="http://schemas.openxmlformats.org/drawingml/2006/main"/>
-          <a:p xmlns:a="http://schemas.openxmlformats.org/drawingml/2006/main">
-            <a:pPr>
+            <a:ext cx="1524000" cy="137160"/>
+          </a:xfrm>
+          <a:prstGeom xmlns:a="http://schemas.openxmlformats.org/drawingml/2006/main" prst="rect">
+            <a:avLst/>
+          </a:prstGeom>
+        </p:spPr>
+        <p:txBody>
+          <a:bodyPr xmlns:a="http://schemas.openxmlformats.org/drawingml/2006/main" lIns="0" tIns="0" rIns="0" bIns="0"/>
+          <a:lstStyle xmlns:a="http://schemas.openxmlformats.org/drawingml/2006/main"/>
+          <a:p xmlns:a="http://schemas.openxmlformats.org/drawingml/2006/main">
+            <a:pPr>
+              <a:buNone/>
               <a:defRPr sz="900" b="1">
                 <a:solidFill>
                   <a:srgbClr val="15252D"/>
@@ -17781,7 +18609,7 @@
               </a:defRPr>
             </a:pPr>
             <a:r>
-              <a:t>&gt;100,000 CFU/mL</a:t>
+              <a:t>0 endpoints missing</a:t>
             </a:r>
           </a:p>
         </p:txBody>
@@ -17814,6 +18642,7 @@
           <a:lstStyle xmlns:a="http://schemas.openxmlformats.org/drawingml/2006/main"/>
           <a:p xmlns:a="http://schemas.openxmlformats.org/drawingml/2006/main">
             <a:pPr>
+              <a:buNone/>
               <a:defRPr sz="900">
                 <a:solidFill>
                   <a:srgbClr val="53636A"/>
@@ -17824,7 +18653,7 @@
               </a:defRPr>
             </a:pPr>
             <a:r>
-              <a:t>Symptoms now satisfy UTI definition</a:t>
+              <a:t>Operational UTI endpoint</a:t>
             </a:r>
           </a:p>
         </p:txBody>
@@ -17884,6 +18713,7 @@
           <a:lstStyle xmlns:a="http://schemas.openxmlformats.org/drawingml/2006/main"/>
           <a:p xmlns:a="http://schemas.openxmlformats.org/drawingml/2006/main">
             <a:pPr>
+              <a:buNone/>
               <a:defRPr sz="1575" b="1">
                 <a:solidFill>
                   <a:srgbClr val="2F8A61"/>
@@ -17894,7 +18724,7 @@
               </a:defRPr>
             </a:pPr>
             <a:r>
-              <a:t>1.00</a:t>
+              <a:t>893</a:t>
             </a:r>
           </a:p>
         </p:txBody>
@@ -17927,6 +18757,7 @@
           <a:lstStyle xmlns:a="http://schemas.openxmlformats.org/drawingml/2006/main"/>
           <a:p xmlns:a="http://schemas.openxmlformats.org/drawingml/2006/main">
             <a:pPr>
+              <a:buNone/>
               <a:defRPr sz="675" b="1">
                 <a:solidFill>
                   <a:srgbClr val="15252D"/>
@@ -17937,7 +18768,7 @@
               </a:defRPr>
             </a:pPr>
             <a:r>
-              <a:t>VF JACCARD</a:t>
+              <a:t>ALL DIRECT PAIRS</a:t>
             </a:r>
           </a:p>
         </p:txBody>
@@ -17997,6 +18828,7 @@
           <a:lstStyle xmlns:a="http://schemas.openxmlformats.org/drawingml/2006/main"/>
           <a:p xmlns:a="http://schemas.openxmlformats.org/drawingml/2006/main">
             <a:pPr>
+              <a:buNone/>
               <a:defRPr sz="1575" b="1">
                 <a:solidFill>
                   <a:srgbClr val="2F8A61"/>
@@ -18007,7 +18839,7 @@
               </a:defRPr>
             </a:pPr>
             <a:r>
-              <a:t>1.00</a:t>
+              <a:t>371</a:t>
             </a:r>
           </a:p>
         </p:txBody>
@@ -18040,6 +18872,7 @@
           <a:lstStyle xmlns:a="http://schemas.openxmlformats.org/drawingml/2006/main"/>
           <a:p xmlns:a="http://schemas.openxmlformats.org/drawingml/2006/main">
             <a:pPr>
+              <a:buNone/>
               <a:defRPr sz="675" b="1">
                 <a:solidFill>
                   <a:srgbClr val="15252D"/>
@@ -18050,7 +18883,7 @@
               </a:defRPr>
             </a:pPr>
             <a:r>
-              <a:t>MODULE JACCARD</a:t>
+              <a:t>ADJACENT PAIRS</a:t>
             </a:r>
           </a:p>
         </p:txBody>
@@ -18110,6 +18943,7 @@
           <a:lstStyle xmlns:a="http://schemas.openxmlformats.org/drawingml/2006/main"/>
           <a:p xmlns:a="http://schemas.openxmlformats.org/drawingml/2006/main">
             <a:pPr>
+              <a:buNone/>
               <a:defRPr sz="1575" b="1">
                 <a:solidFill>
                   <a:srgbClr val="2F8A61"/>
@@ -18120,7 +18954,7 @@
               </a:defRPr>
             </a:pPr>
             <a:r>
-              <a:t>0 / 0</a:t>
+              <a:t>140</a:t>
             </a:r>
           </a:p>
         </p:txBody>
@@ -18153,6 +18987,7 @@
           <a:lstStyle xmlns:a="http://schemas.openxmlformats.org/drawingml/2006/main"/>
           <a:p xmlns:a="http://schemas.openxmlformats.org/drawingml/2006/main">
             <a:pPr>
+              <a:buNone/>
               <a:defRPr sz="675" b="1">
                 <a:solidFill>
                   <a:srgbClr val="15252D"/>
@@ -18163,7 +18998,7 @@
               </a:defRPr>
             </a:pPr>
             <a:r>
-              <a:t>PLASMID GAIN / LOSS</a:t>
+              <a:t>PAIRS &lt;= 25 SNPs</a:t>
             </a:r>
           </a:p>
         </p:txBody>
@@ -18223,6 +19058,7 @@
           <a:lstStyle xmlns:a="http://schemas.openxmlformats.org/drawingml/2006/main"/>
           <a:p xmlns:a="http://schemas.openxmlformats.org/drawingml/2006/main">
             <a:pPr>
+              <a:buNone/>
               <a:defRPr sz="1575" b="1">
                 <a:solidFill>
                   <a:srgbClr val="2F8A61"/>
@@ -18233,7 +19069,7 @@
               </a:defRPr>
             </a:pPr>
             <a:r>
-              <a:t>0 / 0</a:t>
+              <a:t>9</a:t>
             </a:r>
           </a:p>
         </p:txBody>
@@ -18266,6 +19102,7 @@
           <a:lstStyle xmlns:a="http://schemas.openxmlformats.org/drawingml/2006/main"/>
           <a:p xmlns:a="http://schemas.openxmlformats.org/drawingml/2006/main">
             <a:pPr>
+              <a:buNone/>
               <a:defRPr sz="675" b="1">
                 <a:solidFill>
                   <a:srgbClr val="15252D"/>
@@ -18276,7 +19113,7 @@
               </a:defRPr>
             </a:pPr>
             <a:r>
-              <a:t>AMR GAIN / LOSS</a:t>
+              <a:t>CASEBOOK LINKED</a:t>
             </a:r>
           </a:p>
         </p:txBody>
@@ -18336,6 +19173,7 @@
           <a:lstStyle xmlns:a="http://schemas.openxmlformats.org/drawingml/2006/main"/>
           <a:p xmlns:a="http://schemas.openxmlformats.org/drawingml/2006/main">
             <a:pPr>
+              <a:buNone/>
               <a:defRPr sz="1275" b="1">
                 <a:solidFill>
                   <a:srgbClr val="2F8A61"/>
@@ -18346,7 +19184,7 @@
               </a:defRPr>
             </a:pPr>
             <a:r>
-              <a:t>Symptoms</a:t>
+              <a:t>Operational</a:t>
             </a:r>
           </a:p>
         </p:txBody>
@@ -18379,6 +19217,7 @@
           <a:lstStyle xmlns:a="http://schemas.openxmlformats.org/drawingml/2006/main"/>
           <a:p xmlns:a="http://schemas.openxmlformats.org/drawingml/2006/main">
             <a:pPr>
+              <a:buNone/>
               <a:defRPr sz="675" b="1">
                 <a:solidFill>
                   <a:srgbClr val="15252D"/>
@@ -18389,7 +19228,7 @@
               </a:defRPr>
             </a:pPr>
             <a:r>
-              <a:t>CLINICAL CHANGE</a:t>
+              <a:t>PHENOTYPE</a:t>
             </a:r>
           </a:p>
         </p:txBody>
@@ -18449,6 +19288,7 @@
           <a:lstStyle xmlns:a="http://schemas.openxmlformats.org/drawingml/2006/main"/>
           <a:p xmlns:a="http://schemas.openxmlformats.org/drawingml/2006/main">
             <a:pPr>
+              <a:buNone/>
               <a:defRPr sz="975" b="1">
                 <a:solidFill>
                   <a:srgbClr val="15252D"/>
@@ -18459,7 +19299,7 @@
               </a:defRPr>
             </a:pPr>
             <a:r>
-              <a:t>Stable measured bacterial profile + changing clinical state: host context or unmeasured expression/regulation remains plausible.</a:t>
+              <a:t>Close direct pairs motivate host-state or regulatory hypotheses; distant pairs remain replacement-consistent. Neither pattern proves mechanism.</a:t>
             </a:r>
           </a:p>
         </p:txBody>
@@ -18525,6 +19365,7 @@
           <a:lstStyle xmlns:a="http://schemas.openxmlformats.org/drawingml/2006/main"/>
           <a:p xmlns:a="http://schemas.openxmlformats.org/drawingml/2006/main">
             <a:pPr>
+              <a:buNone/>
               <a:defRPr sz="675">
                 <a:solidFill>
                   <a:srgbClr val="53636A"/>
@@ -18535,7 +19376,7 @@
               </a:defRPr>
             </a:pPr>
             <a:r>
-              <a:t>Source: not_uti_to_uti_casebook.csv; participant 20026 / case_191</a:t>
+              <a:t>Source: direct pair table, canonical transitions and 9-row linked casebook</a:t>
             </a:r>
           </a:p>
         </p:txBody>
@@ -18568,6 +19409,7 @@
           <a:lstStyle xmlns:a="http://schemas.openxmlformats.org/drawingml/2006/main"/>
           <a:p xmlns:a="http://schemas.openxmlformats.org/drawingml/2006/main">
             <a:pPr algn="r">
+              <a:buNone/>
               <a:defRPr sz="750" b="1">
                 <a:solidFill>
                   <a:srgbClr val="53636A"/>
@@ -18660,6 +19502,7 @@
           <a:lstStyle xmlns:a="http://schemas.openxmlformats.org/drawingml/2006/main"/>
           <a:p xmlns:a="http://schemas.openxmlformats.org/drawingml/2006/main">
             <a:pPr>
+              <a:buNone/>
               <a:defRPr sz="900" b="1">
                 <a:solidFill>
                   <a:srgbClr val="C95722"/>
@@ -18703,6 +19546,7 @@
           <a:lstStyle xmlns:a="http://schemas.openxmlformats.org/drawingml/2006/main"/>
           <a:p xmlns:a="http://schemas.openxmlformats.org/drawingml/2006/main">
             <a:pPr algn="l">
+              <a:buNone/>
               <a:defRPr sz="825" b="1">
                 <a:solidFill>
                   <a:srgbClr val="53636A"/>
@@ -18746,6 +19590,7 @@
           <a:lstStyle xmlns:a="http://schemas.openxmlformats.org/drawingml/2006/main"/>
           <a:p xmlns:a="http://schemas.openxmlformats.org/drawingml/2006/main">
             <a:pPr>
+              <a:buNone/>
               <a:defRPr sz="2775" b="1">
                 <a:solidFill>
                   <a:srgbClr val="15252D"/>
@@ -18789,6 +19634,7 @@
           <a:lstStyle xmlns:a="http://schemas.openxmlformats.org/drawingml/2006/main"/>
           <a:p xmlns:a="http://schemas.openxmlformats.org/drawingml/2006/main">
             <a:pPr>
+              <a:buNone/>
               <a:defRPr sz="1125">
                 <a:solidFill>
                   <a:srgbClr val="53636A"/>
@@ -18799,7 +19645,7 @@
               </a:defRPr>
             </a:pPr>
             <a:r>
-              <a:t>Eleven clinical transitions are tracked; ten have linked WGS/VF evidence.</a:t>
+              <a:t>9 operational transitions are tracked; all 9 have linked genomic evidence.</a:t>
             </a:r>
           </a:p>
         </p:txBody>
@@ -18833,18 +19679,18 @@
       </p:sp>
       <p:pic>
         <p:nvPicPr>
-          <p:cNvPr id="7" name=""/>
+          <p:cNvPr id="30" name=""/>
           <p:cNvPicPr>
             <a:picLocks xmlns:a="http://schemas.openxmlformats.org/drawingml/2006/main" noChangeAspect="1"/>
           </p:cNvPicPr>
           <p:nvPr/>
         </p:nvPicPr>
         <p:blipFill>
-          <a:blip xmlns:r="http://schemas.openxmlformats.org/officeDocument/2006/relationships" xmlns:a="http://schemas.openxmlformats.org/drawingml/2006/main" r:embed="Rca3473c3cc2a4ea2"/>
+          <a:blip xmlns:r="http://schemas.openxmlformats.org/officeDocument/2006/relationships" xmlns:a="http://schemas.openxmlformats.org/drawingml/2006/main" r:embed="R528e00f0590c48ca"/>
           <a:stretch xmlns:a="http://schemas.openxmlformats.org/drawingml/2006/main"/>
         </p:blipFill>
         <p:spPr>
-          <a:xfrm xmlns:a="http://schemas.openxmlformats.org/drawingml/2006/main">
+          <a:xfrm xmlns:a="http://schemas.openxmlformats.org/drawingml/2006/main" flipH="0" flipV="0">
             <a:off x="731334" y="1941195"/>
             <a:ext cx="8214732" cy="4210050"/>
           </a:xfrm>
@@ -18881,6 +19727,7 @@
           <a:lstStyle xmlns:a="http://schemas.openxmlformats.org/drawingml/2006/main"/>
           <a:p xmlns:a="http://schemas.openxmlformats.org/drawingml/2006/main">
             <a:pPr>
+              <a:buNone/>
               <a:defRPr sz="1125" b="1">
                 <a:solidFill>
                   <a:srgbClr val="176C96"/>
@@ -18924,6 +19771,7 @@
           <a:lstStyle xmlns:a="http://schemas.openxmlformats.org/drawingml/2006/main"/>
           <a:p xmlns:a="http://schemas.openxmlformats.org/drawingml/2006/main">
             <a:pPr>
+              <a:buNone/>
               <a:defRPr sz="750" b="1">
                 <a:solidFill>
                   <a:srgbClr val="53636A"/>
@@ -18996,6 +19844,7 @@
           <a:lstStyle xmlns:a="http://schemas.openxmlformats.org/drawingml/2006/main"/>
           <a:p xmlns:a="http://schemas.openxmlformats.org/drawingml/2006/main">
             <a:pPr algn="ctr">
+              <a:buNone/>
               <a:defRPr sz="675" b="1">
                 <a:solidFill>
                   <a:srgbClr val="FFFFFF"/>
@@ -19006,7 +19855,7 @@
               </a:defRPr>
             </a:pPr>
             <a:r>
-              <a:t>10 WGS/VF LINKED</a:t>
+              <a:t>9/9 GENOMICALLY LINKED</a:t>
             </a:r>
           </a:p>
         </p:txBody>
@@ -19066,6 +19915,7 @@
           <a:lstStyle xmlns:a="http://schemas.openxmlformats.org/drawingml/2006/main"/>
           <a:p xmlns:a="http://schemas.openxmlformats.org/drawingml/2006/main">
             <a:pPr>
+              <a:buNone/>
               <a:defRPr sz="975" b="1">
                 <a:solidFill>
                   <a:srgbClr val="2F8A61"/>
@@ -19076,11 +19926,12 @@
               </a:defRPr>
             </a:pPr>
             <a:r>
-              <a:t>4  same-strain,</a:t>
-            </a:r>
-          </a:p>
-          <a:p xmlns:a="http://schemas.openxmlformats.org/drawingml/2006/main">
-            <a:pPr>
+              <a:t>5  at or below</a:t>
+            </a:r>
+          </a:p>
+          <a:p xmlns:a="http://schemas.openxmlformats.org/drawingml/2006/main">
+            <a:pPr>
+              <a:buNone/>
               <a:defRPr sz="975" b="1">
                 <a:solidFill>
                   <a:srgbClr val="2F8A61"/>
@@ -19091,7 +19942,7 @@
               </a:defRPr>
             </a:pPr>
             <a:r>
-              <a:t>stable-profile</a:t>
+              <a:t>25 SNPs</a:t>
             </a:r>
           </a:p>
         </p:txBody>
@@ -19151,6 +20002,7 @@
           <a:lstStyle xmlns:a="http://schemas.openxmlformats.org/drawingml/2006/main"/>
           <a:p xmlns:a="http://schemas.openxmlformats.org/drawingml/2006/main">
             <a:pPr>
+              <a:buNone/>
               <a:defRPr sz="975" b="1">
                 <a:solidFill>
                   <a:srgbClr val="B7532E"/>
@@ -19161,11 +20013,12 @@
               </a:defRPr>
             </a:pPr>
             <a:r>
-              <a:t>3  consistent with</a:t>
-            </a:r>
-          </a:p>
-          <a:p xmlns:a="http://schemas.openxmlformats.org/drawingml/2006/main">
-            <a:pPr>
+              <a:t>4  above the</a:t>
+            </a:r>
+          </a:p>
+          <a:p xmlns:a="http://schemas.openxmlformats.org/drawingml/2006/main">
+            <a:pPr>
+              <a:buNone/>
               <a:defRPr sz="975" b="1">
                 <a:solidFill>
                   <a:srgbClr val="B7532E"/>
@@ -19176,7 +20029,7 @@
               </a:defRPr>
             </a:pPr>
             <a:r>
-              <a:t>strain replacement</a:t>
+              <a:t>operational threshold</a:t>
             </a:r>
           </a:p>
         </p:txBody>
@@ -19236,6 +20089,7 @@
           <a:lstStyle xmlns:a="http://schemas.openxmlformats.org/drawingml/2006/main"/>
           <a:p xmlns:a="http://schemas.openxmlformats.org/drawingml/2006/main">
             <a:pPr>
+              <a:buNone/>
               <a:defRPr sz="975" b="1">
                 <a:solidFill>
                   <a:srgbClr val="78889A"/>
@@ -19246,11 +20100,12 @@
               </a:defRPr>
             </a:pPr>
             <a:r>
-              <a:t>2  uncertain</a:t>
-            </a:r>
-          </a:p>
-          <a:p xmlns:a="http://schemas.openxmlformats.org/drawingml/2006/main">
-            <a:pPr>
+              <a:t>893 direct pairs</a:t>
+            </a:r>
+          </a:p>
+          <a:p xmlns:a="http://schemas.openxmlformats.org/drawingml/2006/main">
+            <a:pPr>
+              <a:buNone/>
               <a:defRPr sz="975" b="1">
                 <a:solidFill>
                   <a:srgbClr val="78889A"/>
@@ -19261,7 +20116,7 @@
               </a:defRPr>
             </a:pPr>
             <a:r>
-              <a:t>mechanisms</a:t>
+              <a:t>in the selected cohort</a:t>
             </a:r>
           </a:p>
         </p:txBody>
@@ -19321,6 +20176,7 @@
           <a:lstStyle xmlns:a="http://schemas.openxmlformats.org/drawingml/2006/main"/>
           <a:p xmlns:a="http://schemas.openxmlformats.org/drawingml/2006/main">
             <a:pPr>
+              <a:buNone/>
               <a:defRPr sz="900">
                 <a:solidFill>
                   <a:srgbClr val="15252D"/>
@@ -19331,11 +20187,12 @@
               </a:defRPr>
             </a:pPr>
             <a:r>
-              <a:t>1 profile-change case</a:t>
-            </a:r>
-          </a:p>
-          <a:p xmlns:a="http://schemas.openxmlformats.org/drawingml/2006/main">
-            <a:pPr>
+              <a:t>0 missing genomic endpoints</a:t>
+            </a:r>
+          </a:p>
+          <a:p xmlns:a="http://schemas.openxmlformats.org/drawingml/2006/main">
+            <a:pPr>
+              <a:buNone/>
               <a:defRPr sz="900">
                 <a:solidFill>
                   <a:srgbClr val="15252D"/>
@@ -19346,7 +20203,7 @@
               </a:defRPr>
             </a:pPr>
             <a:r>
-              <a:t>1 missing genomic endpoint</a:t>
+              <a:t>mechanism labels are descriptive</a:t>
             </a:r>
           </a:p>
         </p:txBody>
@@ -19412,6 +20269,7 @@
           <a:lstStyle xmlns:a="http://schemas.openxmlformats.org/drawingml/2006/main"/>
           <a:p xmlns:a="http://schemas.openxmlformats.org/drawingml/2006/main">
             <a:pPr>
+              <a:buNone/>
               <a:defRPr sz="675">
                 <a:solidFill>
                   <a:srgbClr val="53636A"/>
@@ -19422,7 +20280,7 @@
               </a:defRPr>
             </a:pPr>
             <a:r>
-              <a:t>Source: Main Figure 2; final_figure_validation_checks.csv and captions</a:t>
+              <a:t>Source: current final-run mechanism casebook and direct pair evidence</a:t>
             </a:r>
           </a:p>
         </p:txBody>
@@ -19455,6 +20313,7 @@
           <a:lstStyle xmlns:a="http://schemas.openxmlformats.org/drawingml/2006/main"/>
           <a:p xmlns:a="http://schemas.openxmlformats.org/drawingml/2006/main">
             <a:pPr algn="r">
+              <a:buNone/>
               <a:defRPr sz="750" b="1">
                 <a:solidFill>
                   <a:srgbClr val="53636A"/>
@@ -19547,6 +20406,7 @@
           <a:lstStyle xmlns:a="http://schemas.openxmlformats.org/drawingml/2006/main"/>
           <a:p xmlns:a="http://schemas.openxmlformats.org/drawingml/2006/main">
             <a:pPr>
+              <a:buNone/>
               <a:defRPr sz="900" b="1">
                 <a:solidFill>
                   <a:srgbClr val="C95722"/>
@@ -19590,6 +20450,7 @@
           <a:lstStyle xmlns:a="http://schemas.openxmlformats.org/drawingml/2006/main"/>
           <a:p xmlns:a="http://schemas.openxmlformats.org/drawingml/2006/main">
             <a:pPr algn="l">
+              <a:buNone/>
               <a:defRPr sz="825" b="1">
                 <a:solidFill>
                   <a:srgbClr val="53636A"/>
@@ -19633,6 +20494,7 @@
           <a:lstStyle xmlns:a="http://schemas.openxmlformats.org/drawingml/2006/main"/>
           <a:p xmlns:a="http://schemas.openxmlformats.org/drawingml/2006/main">
             <a:pPr>
+              <a:buNone/>
               <a:defRPr sz="2775" b="1">
                 <a:solidFill>
                   <a:srgbClr val="15252D"/>
@@ -19643,7 +20505,7 @@
               </a:defRPr>
             </a:pPr>
             <a:r>
-              <a:t>Stable bacterial profiles can coexist with changing clinical state.</a:t>
+              <a:t>Direct paired evidence separates close and distant clinical transitions.</a:t>
             </a:r>
           </a:p>
         </p:txBody>
@@ -19676,6 +20538,7 @@
           <a:lstStyle xmlns:a="http://schemas.openxmlformats.org/drawingml/2006/main"/>
           <a:p xmlns:a="http://schemas.openxmlformats.org/drawingml/2006/main">
             <a:pPr>
+              <a:buNone/>
               <a:defRPr sz="1125">
                 <a:solidFill>
                   <a:srgbClr val="53636A"/>
@@ -19686,7 +20549,7 @@
               </a:defRPr>
             </a:pPr>
             <a:r>
-              <a:t>Low SNP distance and stable VF content do not guarantee the same symptom state.</a:t>
+              <a:t>5 of 9 focused transitions are at or below 25 SNPs; 4 are above.</a:t>
             </a:r>
           </a:p>
         </p:txBody>
@@ -19720,18 +20583,18 @@
       </p:sp>
       <p:pic>
         <p:nvPicPr>
-          <p:cNvPr id="7" name=""/>
+          <p:cNvPr id="28" name=""/>
           <p:cNvPicPr>
             <a:picLocks xmlns:a="http://schemas.openxmlformats.org/drawingml/2006/main" noChangeAspect="1"/>
           </p:cNvPicPr>
           <p:nvPr/>
         </p:nvPicPr>
         <p:blipFill>
-          <a:blip xmlns:r="http://schemas.openxmlformats.org/officeDocument/2006/relationships" xmlns:a="http://schemas.openxmlformats.org/drawingml/2006/main" r:embed="Re3ce1405767849a8"/>
+          <a:blip xmlns:r="http://schemas.openxmlformats.org/officeDocument/2006/relationships" xmlns:a="http://schemas.openxmlformats.org/drawingml/2006/main" r:embed="Rb15bb9bfca47406c"/>
           <a:stretch xmlns:a="http://schemas.openxmlformats.org/drawingml/2006/main"/>
         </p:blipFill>
         <p:spPr>
-          <a:xfrm xmlns:a="http://schemas.openxmlformats.org/drawingml/2006/main">
+          <a:xfrm xmlns:a="http://schemas.openxmlformats.org/drawingml/2006/main" flipH="0" flipV="0">
             <a:off x="628650" y="1979295"/>
             <a:ext cx="8267700" cy="4133850"/>
           </a:xfrm>
@@ -19768,6 +20631,7 @@
           <a:lstStyle xmlns:a="http://schemas.openxmlformats.org/drawingml/2006/main"/>
           <a:p xmlns:a="http://schemas.openxmlformats.org/drawingml/2006/main">
             <a:pPr>
+              <a:buNone/>
               <a:defRPr sz="1125" b="1">
                 <a:solidFill>
                   <a:srgbClr val="2F8A61"/>
@@ -19811,6 +20675,7 @@
           <a:lstStyle xmlns:a="http://schemas.openxmlformats.org/drawingml/2006/main"/>
           <a:p xmlns:a="http://schemas.openxmlformats.org/drawingml/2006/main">
             <a:pPr>
+              <a:buNone/>
               <a:defRPr sz="750" b="1">
                 <a:solidFill>
                   <a:srgbClr val="53636A"/>
@@ -19881,6 +20746,7 @@
           <a:lstStyle xmlns:a="http://schemas.openxmlformats.org/drawingml/2006/main"/>
           <a:p xmlns:a="http://schemas.openxmlformats.org/drawingml/2006/main">
             <a:pPr>
+              <a:buNone/>
               <a:defRPr sz="3375" b="1">
                 <a:solidFill>
                   <a:srgbClr val="2F8A61"/>
@@ -19891,7 +20757,7 @@
               </a:defRPr>
             </a:pPr>
             <a:r>
-              <a:t>4</a:t>
+              <a:t>5</a:t>
             </a:r>
           </a:p>
         </p:txBody>
@@ -19924,6 +20790,7 @@
           <a:lstStyle xmlns:a="http://schemas.openxmlformats.org/drawingml/2006/main"/>
           <a:p xmlns:a="http://schemas.openxmlformats.org/drawingml/2006/main">
             <a:pPr>
+              <a:buNone/>
               <a:defRPr sz="900" b="1">
                 <a:solidFill>
                   <a:srgbClr val="15252D"/>
@@ -19934,22 +20801,7 @@
               </a:defRPr>
             </a:pPr>
             <a:r>
-              <a:t>same-strain stable-profile</a:t>
-            </a:r>
-          </a:p>
-          <a:p xmlns:a="http://schemas.openxmlformats.org/drawingml/2006/main">
-            <a:pPr>
-              <a:defRPr sz="900" b="1">
-                <a:solidFill>
-                  <a:srgbClr val="15252D"/>
-                </a:solidFill>
-                <a:latin typeface="Avenir Next"/>
-                <a:ea typeface="Avenir Next"/>
-                <a:cs typeface="Avenir Next"/>
-              </a:defRPr>
-            </a:pPr>
-            <a:r>
-              <a:t>transitions</a:t>
+              <a:t>focused transitions &lt;=25 SNPs</a:t>
             </a:r>
           </a:p>
         </p:txBody>
@@ -20009,6 +20861,7 @@
           <a:lstStyle xmlns:a="http://schemas.openxmlformats.org/drawingml/2006/main"/>
           <a:p xmlns:a="http://schemas.openxmlformats.org/drawingml/2006/main">
             <a:pPr>
+              <a:buNone/>
               <a:defRPr sz="1050" b="1">
                 <a:solidFill>
                   <a:srgbClr val="2F8A61"/>
@@ -20052,6 +20905,7 @@
           <a:lstStyle xmlns:a="http://schemas.openxmlformats.org/drawingml/2006/main"/>
           <a:p xmlns:a="http://schemas.openxmlformats.org/drawingml/2006/main">
             <a:pPr>
+              <a:buNone/>
               <a:defRPr sz="900">
                 <a:solidFill>
                   <a:srgbClr val="15252D"/>
@@ -20062,7 +20916,7 @@
               </a:defRPr>
             </a:pPr>
             <a:r>
-              <a:t>Persistent strain evidence moves the next hypothesis toward host state or unmeasured regulation.</a:t>
+              <a:t>Close direct pairs move the next hypothesis toward host state or unmeasured regulation.</a:t>
             </a:r>
           </a:p>
         </p:txBody>
@@ -20122,6 +20976,7 @@
           <a:lstStyle xmlns:a="http://schemas.openxmlformats.org/drawingml/2006/main"/>
           <a:p xmlns:a="http://schemas.openxmlformats.org/drawingml/2006/main">
             <a:pPr>
+              <a:buNone/>
               <a:defRPr sz="975">
                 <a:solidFill>
                   <a:srgbClr val="15252D"/>
@@ -20132,7 +20987,7 @@
               </a:defRPr>
             </a:pPr>
             <a:r>
-              <a:t>Stable profile does not prove causality, persistence, or a non-genomic trigger.</a:t>
+              <a:t>A distance threshold is operational evidence, not mechanistic proof.</a:t>
             </a:r>
           </a:p>
         </p:txBody>
@@ -20198,6 +21053,7 @@
           <a:lstStyle xmlns:a="http://schemas.openxmlformats.org/drawingml/2006/main"/>
           <a:p xmlns:a="http://schemas.openxmlformats.org/drawingml/2006/main">
             <a:pPr>
+              <a:buNone/>
               <a:defRPr sz="675">
                 <a:solidFill>
                   <a:srgbClr val="53636A"/>
@@ -20208,7 +21064,7 @@
               </a:defRPr>
             </a:pPr>
             <a:r>
-              <a:t>Source: Main Figure 3; final_figure_captions.md (hypothesis-generating)</a:t>
+              <a:t>Source: current final-run direct pair and host-context figure</a:t>
             </a:r>
           </a:p>
         </p:txBody>
@@ -20241,6 +21097,7 @@
           <a:lstStyle xmlns:a="http://schemas.openxmlformats.org/drawingml/2006/main"/>
           <a:p xmlns:a="http://schemas.openxmlformats.org/drawingml/2006/main">
             <a:pPr algn="r">
+              <a:buNone/>
               <a:defRPr sz="750" b="1">
                 <a:solidFill>
                   <a:srgbClr val="53636A"/>
